--- a/decks/the-repair-kit-lesson-v2.pptx
+++ b/decks/the-repair-kit-lesson-v2.pptx
@@ -18,6 +18,7 @@
     <p:sldId id="266" r:id="rId18"/>
     <p:sldId id="267" r:id="rId19"/>
     <p:sldId id="268" r:id="rId20"/>
+    <p:sldId id="269" r:id="rId21"/>
   </p:sldIdLst>
   <p:sldSz cx="12192000" cy="6858000" type="screen4x3"/>
   <p:notesSz cx="6858000" cy="9144000"/>
@@ -514,7 +515,7 @@
           <a:lstStyle/>
           <a:p>
             <a:r>
-              <a:t>This page and the next three are hidden. They stay in the deck for you and are skipped when you present.</a:t>
+              <a:t>This page is hidden and skipped when you present. The full plan, care notes and research are on the hidden pages at the end of the deck, if you want them.</a:t>
             </a:r>
           </a:p>
         </p:txBody>
@@ -585,6 +586,76 @@
           <a:p>
             <a:r>
               <a:t>3 MINUTES. Students draft on their card, for a real conflict or a practice one, and keep it. Check: does it start with what you did? Does it offer repair? Is there a "but," an "if," or a request for forgiveness you could drop? Share the take-home link (post it on your class page too). It has the repair sequence, the online moves, a private check-in, and who to talk to. Close with the times an apology isn't enough: someone is threatening you or anyone else, a fight is turning into a pile-on, someone keeps hurting you and apologizing, or something made you feel unsafe. Those go to an adult.</a:t>
+            </a:r>
+          </a:p>
+        </p:txBody>
+      </p:sp>
+      <p:sp>
+        <p:nvSpPr>
+          <p:cNvPr id="4" name="Slide Number Placeholder 3"/>
+          <p:cNvSpPr>
+            <a:spLocks noGrp="1"/>
+          </p:cNvSpPr>
+          <p:nvPr>
+            <p:ph type="sldNum" idx="5" sz="quarter"/>
+          </p:nvPr>
+        </p:nvSpPr>
+        <p:spPr/>
+      </p:sp>
+    </p:spTree>
+  </p:cSld>
+  <p:clrMapOvr>
+    <a:masterClrMapping/>
+  </p:clrMapOvr>
+</p:notes>
+</file>
+
+<file path=ppt/notesSlides/notesSlide11.xml><?xml version="1.0" encoding="utf-8"?>
+<p:notes xmlns:a="http://schemas.openxmlformats.org/drawingml/2006/main" xmlns:p="http://schemas.openxmlformats.org/presentationml/2006/main" xmlns:r="http://schemas.openxmlformats.org/officeDocument/2006/relationships">
+  <p:cSld>
+    <p:spTree>
+      <p:nvGrpSpPr>
+        <p:cNvPr id="1" name=""/>
+        <p:cNvGrpSpPr/>
+        <p:nvPr/>
+      </p:nvGrpSpPr>
+      <p:grpSpPr>
+        <a:xfrm>
+          <a:off x="0" y="0"/>
+          <a:ext cx="0" cy="0"/>
+          <a:chOff x="0" y="0"/>
+          <a:chExt cx="0" cy="0"/>
+        </a:xfrm>
+      </p:grpSpPr>
+      <p:sp>
+        <p:nvSpPr>
+          <p:cNvPr id="2" name="Slide Image Placeholder 1"/>
+          <p:cNvSpPr>
+            <a:spLocks noGrp="1"/>
+          </p:cNvSpPr>
+          <p:nvPr>
+            <p:ph type="sldImg" idx="2"/>
+          </p:nvPr>
+        </p:nvSpPr>
+        <p:spPr/>
+      </p:sp>
+      <p:sp>
+        <p:nvSpPr>
+          <p:cNvPr id="3" name="Notes Placeholder 2"/>
+          <p:cNvSpPr>
+            <a:spLocks noGrp="1"/>
+          </p:cNvSpPr>
+          <p:nvPr>
+            <p:ph type="body" idx="3" sz="quarter"/>
+          </p:nvPr>
+        </p:nvSpPr>
+        <p:spPr/>
+        <p:txBody>
+          <a:bodyPr/>
+          <a:lstStyle/>
+          <a:p>
+            <a:r>
+              <a:t>If you want more: this page and the next three are hidden and skipped when you present.</a:t>
             </a:r>
           </a:p>
         </p:txBody>
@@ -4236,7 +4307,7 @@
                 </a:solidFill>
                 <a:latin typeface="Inter Tight"/>
               </a:rPr>
-              <a:t>TEACHER PAGE  ·  skipped when you present  ·  Lesson plan</a:t>
+              <a:t>TEACHER PAGE  ·  skipped when you present  ·  Before you start</a:t>
             </a:r>
           </a:p>
         </p:txBody>
@@ -4327,8 +4398,8 @@
         </p:nvSpPr>
         <p:spPr>
           <a:xfrm>
-            <a:off x="548640" y="1828800"/>
-            <a:ext cx="5120640" cy="4389120"/>
+            <a:off x="548640" y="2011680"/>
+            <a:ext cx="11064240" cy="4206240"/>
           </a:xfrm>
           <a:prstGeom prst="rect">
             <a:avLst/>
@@ -4343,43 +4414,43 @@
           <a:p>
             <a:pPr algn="l">
               <a:spcAft>
-                <a:spcPts val="675"/>
-              </a:spcAft>
-            </a:pPr>
-            <a:r>
-              <a:rPr sz="1100" b="1" i="0">
+                <a:spcPts val="810"/>
+              </a:spcAft>
+            </a:pPr>
+            <a:r>
+              <a:rPr sz="1200" b="1" i="0">
                 <a:solidFill>
                   <a:srgbClr val="0B2D5B"/>
                 </a:solidFill>
                 <a:latin typeface="Inter Tight"/>
               </a:rPr>
-              <a:t>GOAL</a:t>
-            </a:r>
-          </a:p>
-          <a:p>
-            <a:pPr algn="l">
-              <a:spcAft>
-                <a:spcPts val="675"/>
-              </a:spcAft>
-            </a:pPr>
-            <a:r>
-              <a:rPr sz="1500" b="0" i="0">
+              <a:t>BEFORE YOU START</a:t>
+            </a:r>
+          </a:p>
+          <a:p>
+            <a:pPr algn="l">
+              <a:spcAft>
+                <a:spcPts val="810"/>
+              </a:spcAft>
+            </a:pPr>
+            <a:r>
+              <a:rPr sz="1800" b="0" i="0">
                 <a:solidFill>
                   <a:srgbClr val="1C1B19"/>
                 </a:solidFill>
                 <a:latin typeface="Source Serif 4"/>
               </a:rPr>
-              <a:t>Students can name which parts of an apology matter most (taking responsibility, then an offer to fix it), explain why sorry is hard to say, use the repair sequence on a real or practice conflict, and know their options when they're the one who got hurt. Nobody retells a real fight in class.</a:t>
-            </a:r>
-          </a:p>
-          <a:p>
-            <a:pPr algn="l">
-              <a:spcAft>
-                <a:spcPts val="675"/>
-              </a:spcAft>
-            </a:pPr>
-            <a:r>
-              <a:rPr sz="1500" b="0" i="0">
+              <a:t>Students learn which parts of an apology matter most and why sorry is hard to say, then practice the repair sequence. Bring index cards, don't retell or stage real fights since both sides may be in the room, and remember nobody owes forgiveness.</a:t>
+            </a:r>
+          </a:p>
+          <a:p>
+            <a:pPr algn="l">
+              <a:spcAft>
+                <a:spcPts val="810"/>
+              </a:spcAft>
+            </a:pPr>
+            <a:r>
+              <a:rPr sz="1800" b="0" i="0">
                 <a:solidFill>
                   <a:srgbClr val="1C1B19"/>
                 </a:solidFill>
@@ -4391,346 +4462,75 @@
           <a:p>
             <a:pPr algn="l">
               <a:spcAft>
-                <a:spcPts val="675"/>
-              </a:spcAft>
-            </a:pPr>
-            <a:r>
-              <a:rPr sz="1100" b="1" i="0">
+                <a:spcPts val="810"/>
+              </a:spcAft>
+            </a:pPr>
+            <a:r>
+              <a:rPr sz="1200" b="1" i="0">
                 <a:solidFill>
                   <a:srgbClr val="0B2D5B"/>
                 </a:solidFill>
                 <a:latin typeface="Inter Tight"/>
               </a:rPr>
-              <a:t>MATERIALS</a:t>
-            </a:r>
-          </a:p>
-          <a:p>
-            <a:pPr algn="l">
-              <a:spcAft>
-                <a:spcPts val="675"/>
-              </a:spcAft>
-            </a:pPr>
-            <a:r>
-              <a:rPr sz="1500" b="0" i="0">
+              <a:t>EVERY STUDENT IN THE ROOM</a:t>
+            </a:r>
+          </a:p>
+          <a:p>
+            <a:pPr algn="l">
+              <a:spcAft>
+                <a:spcPts val="810"/>
+              </a:spcAft>
+            </a:pPr>
+            <a:r>
+              <a:rPr sz="1800" b="0" i="0">
                 <a:solidFill>
                   <a:srgbClr val="1C1B19"/>
                 </a:solidFill>
                 <a:latin typeface="Source Serif 4"/>
               </a:rPr>
-              <a:t>Index cards for the private reflections and the exit card</a:t>
-            </a:r>
-          </a:p>
-          <a:p>
-            <a:pPr algn="l">
-              <a:spcAft>
-                <a:spcPts val="675"/>
-              </a:spcAft>
-            </a:pPr>
-            <a:r>
-              <a:rPr sz="1500" b="0" i="0">
+              <a:t>Repair looks different from family to family (sometimes action, sometimes words), and making it right should never depend on money.</a:t>
+            </a:r>
+          </a:p>
+          <a:p>
+            <a:pPr algn="l">
+              <a:spcAft>
+                <a:spcPts val="810"/>
+              </a:spcAft>
+            </a:pPr>
+            <a:r>
+              <a:rPr sz="1800" b="0" i="0">
                 <a:solidFill>
                   <a:srgbClr val="1C1B19"/>
                 </a:solidFill>
                 <a:latin typeface="Source Serif 4"/>
               </a:rPr>
-              <a:t>Scrap paper for the ranking vote (or use hands)</a:t>
-            </a:r>
-          </a:p>
-          <a:p>
-            <a:pPr algn="l">
-              <a:spcAft>
-                <a:spcPts val="675"/>
-              </a:spcAft>
-            </a:pPr>
-            <a:r>
-              <a:rPr sz="1500" b="0" i="0">
-                <a:solidFill>
-                  <a:srgbClr val="1C1B19"/>
-                </a:solidFill>
-                <a:latin typeface="Source Serif 4"/>
-              </a:rPr>
-              <a:t>The take-home link (last slide) to share after class</a:t>
-            </a:r>
-          </a:p>
-        </p:txBody>
-      </p:sp>
-      <p:sp>
-        <p:nvSpPr>
-          <p:cNvPr id="7" name="TextBox 6"/>
-          <p:cNvSpPr txBox="1"/>
-          <p:nvPr/>
-        </p:nvSpPr>
-        <p:spPr>
-          <a:xfrm>
-            <a:off x="6126480" y="1828800"/>
-            <a:ext cx="5486400" cy="4389120"/>
-          </a:xfrm>
-          <a:prstGeom prst="rect">
-            <a:avLst/>
-          </a:prstGeom>
-          <a:noFill/>
-        </p:spPr>
-        <p:txBody>
-          <a:bodyPr wrap="square" anchor="t" lIns="0" rIns="0" tIns="0" bIns="0">
-            <a:spAutoFit/>
-          </a:bodyPr>
-          <a:lstStyle/>
-          <a:p>
-            <a:pPr algn="l">
-              <a:spcAft>
-                <a:spcPts val="630"/>
-              </a:spcAft>
-            </a:pPr>
-            <a:r>
-              <a:rPr sz="1100" b="1" i="0">
+              <a:t/>
+            </a:r>
+          </a:p>
+          <a:p>
+            <a:pPr algn="l">
+              <a:spcAft>
+                <a:spcPts val="810"/>
+              </a:spcAft>
+            </a:pPr>
+            <a:r>
+              <a:rPr sz="1200" b="1" i="0">
                 <a:solidFill>
                   <a:srgbClr val="0B2D5B"/>
                 </a:solidFill>
                 <a:latin typeface="Inter Tight"/>
               </a:rPr>
-              <a:t>FLOW</a:t>
-            </a:r>
-          </a:p>
-          <a:p>
-            <a:pPr algn="l">
-              <a:spcAft>
-                <a:spcPts val="630"/>
-              </a:spcAft>
-            </a:pPr>
-            <a:r>
-              <a:rPr sz="1300" b="1" i="0">
-                <a:solidFill>
-                  <a:srgbClr val="F47B20"/>
-                </a:solidFill>
-                <a:latin typeface="Inter Tight"/>
-              </a:rPr>
-              <a:t>5 min   </a:t>
-            </a:r>
-            <a:r>
-              <a:rPr sz="1400" b="0" i="0">
-                <a:solidFill>
-                  <a:srgbClr val="1C1B19"/>
-                </a:solidFill>
-                <a:latin typeface="Source Serif 4"/>
-              </a:rPr>
-              <a:t>Guess the ranking (quick vote)</a:t>
-            </a:r>
-          </a:p>
-          <a:p>
-            <a:pPr algn="l">
-              <a:spcAft>
-                <a:spcPts val="630"/>
-              </a:spcAft>
-            </a:pPr>
-            <a:r>
-              <a:rPr sz="1300" b="1" i="0">
-                <a:solidFill>
-                  <a:srgbClr val="F47B20"/>
-                </a:solidFill>
-                <a:latin typeface="Inter Tight"/>
-              </a:rPr>
-              <a:t>5 min   </a:t>
-            </a:r>
-            <a:r>
-              <a:rPr sz="1400" b="0" i="0">
-                <a:solidFill>
-                  <a:srgbClr val="1C1B19"/>
-                </a:solidFill>
-                <a:latin typeface="Source Serif 4"/>
-              </a:rPr>
-              <a:t>What makes an apology work</a:t>
-            </a:r>
-          </a:p>
-          <a:p>
-            <a:pPr algn="l">
-              <a:spcAft>
-                <a:spcPts val="630"/>
-              </a:spcAft>
-            </a:pPr>
-            <a:r>
-              <a:rPr sz="1300" b="1" i="0">
-                <a:solidFill>
-                  <a:srgbClr val="F47B20"/>
-                </a:solidFill>
-                <a:latin typeface="Inter Tight"/>
-              </a:rPr>
-              <a:t>5 min   </a:t>
-            </a:r>
-            <a:r>
-              <a:rPr sz="1400" b="0" i="0">
-                <a:solidFill>
-                  <a:srgbClr val="1C1B19"/>
-                </a:solidFill>
-                <a:latin typeface="Source Serif 4"/>
-              </a:rPr>
-              <a:t>Why sorry is so hard</a:t>
-            </a:r>
-          </a:p>
-          <a:p>
-            <a:pPr algn="l">
-              <a:spcAft>
-                <a:spcPts val="630"/>
-              </a:spcAft>
-            </a:pPr>
-            <a:r>
-              <a:rPr sz="1300" b="1" i="0">
-                <a:solidFill>
-                  <a:srgbClr val="F47B20"/>
-                </a:solidFill>
-                <a:latin typeface="Inter Tight"/>
-              </a:rPr>
-              <a:t>5 min   </a:t>
-            </a:r>
-            <a:r>
-              <a:rPr sz="1400" b="0" i="0">
-                <a:solidFill>
-                  <a:srgbClr val="1C1B19"/>
-                </a:solidFill>
-                <a:latin typeface="Source Serif 4"/>
-              </a:rPr>
-              <a:t>Step back (private reflection)</a:t>
-            </a:r>
-          </a:p>
-          <a:p>
-            <a:pPr algn="l">
-              <a:spcAft>
-                <a:spcPts val="630"/>
-              </a:spcAft>
-            </a:pPr>
-            <a:r>
-              <a:rPr sz="1300" b="1" i="0">
-                <a:solidFill>
-                  <a:srgbClr val="F47B20"/>
-                </a:solidFill>
-                <a:latin typeface="Inter Tight"/>
-              </a:rPr>
-              <a:t>5 min   </a:t>
-            </a:r>
-            <a:r>
-              <a:rPr sz="1400" b="0" i="0">
-                <a:solidFill>
-                  <a:srgbClr val="1C1B19"/>
-                </a:solidFill>
-                <a:latin typeface="Source Serif 4"/>
-              </a:rPr>
-              <a:t>The repair sequence</a:t>
-            </a:r>
-          </a:p>
-          <a:p>
-            <a:pPr algn="l">
-              <a:spcAft>
-                <a:spcPts val="630"/>
-              </a:spcAft>
-            </a:pPr>
-            <a:r>
-              <a:rPr sz="1300" b="1" i="0">
-                <a:solidFill>
-                  <a:srgbClr val="F47B20"/>
-                </a:solidFill>
-                <a:latin typeface="Inter Tight"/>
-              </a:rPr>
-              <a:t>10 min   </a:t>
-            </a:r>
-            <a:r>
-              <a:rPr sz="1400" b="0" i="0">
-                <a:solidFill>
-                  <a:srgbClr val="1C1B19"/>
-                </a:solidFill>
-                <a:latin typeface="Source Serif 4"/>
-              </a:rPr>
-              <a:t>Which apology lands? (small groups)</a:t>
-            </a:r>
-          </a:p>
-          <a:p>
-            <a:pPr algn="l">
-              <a:spcAft>
-                <a:spcPts val="630"/>
-              </a:spcAft>
-            </a:pPr>
-            <a:r>
-              <a:rPr sz="1300" b="1" i="0">
-                <a:solidFill>
-                  <a:srgbClr val="F47B20"/>
-                </a:solidFill>
-                <a:latin typeface="Inter Tight"/>
-              </a:rPr>
-              <a:t>7 min   </a:t>
-            </a:r>
-            <a:r>
-              <a:rPr sz="1400" b="0" i="0">
-                <a:solidFill>
-                  <a:srgbClr val="1C1B19"/>
-                </a:solidFill>
-                <a:latin typeface="Source Serif 4"/>
-              </a:rPr>
-              <a:t>If you got hurt, and how your family repairs (private reflection)</a:t>
-            </a:r>
-          </a:p>
-          <a:p>
-            <a:pPr algn="l">
-              <a:spcAft>
-                <a:spcPts val="630"/>
-              </a:spcAft>
-            </a:pPr>
-            <a:r>
-              <a:rPr sz="1300" b="1" i="0">
-                <a:solidFill>
-                  <a:srgbClr val="F47B20"/>
-                </a:solidFill>
-                <a:latin typeface="Inter Tight"/>
-              </a:rPr>
-              <a:t>3 min   </a:t>
-            </a:r>
-            <a:r>
-              <a:rPr sz="1400" b="0" i="0">
-                <a:solidFill>
-                  <a:srgbClr val="1C1B19"/>
-                </a:solidFill>
-                <a:latin typeface="Source Serif 4"/>
-              </a:rPr>
-              <a:t>Exit card and take-home link</a:t>
-            </a:r>
-          </a:p>
-          <a:p>
-            <a:pPr algn="l">
-              <a:spcAft>
-                <a:spcPts val="630"/>
-              </a:spcAft>
-            </a:pPr>
-            <a:r>
-              <a:rPr sz="1400" b="0" i="0">
-                <a:solidFill>
-                  <a:srgbClr val="1C1B19"/>
-                </a:solidFill>
-                <a:latin typeface="Source Serif 4"/>
-              </a:rPr>
-              <a:t/>
-            </a:r>
-          </a:p>
-          <a:p>
-            <a:pPr algn="l">
-              <a:spcAft>
-                <a:spcPts val="630"/>
-              </a:spcAft>
-            </a:pPr>
-            <a:r>
-              <a:rPr sz="1100" b="1" i="0">
-                <a:solidFill>
-                  <a:srgbClr val="0B2D5B"/>
-                </a:solidFill>
-                <a:latin typeface="Inter Tight"/>
-              </a:rPr>
               <a:t>SHORT ON TIME (20-MINUTE ADVISORY)</a:t>
             </a:r>
           </a:p>
           <a:p>
             <a:pPr algn="l">
               <a:spcAft>
-                <a:spcPts val="630"/>
-              </a:spcAft>
-            </a:pPr>
-            <a:r>
-              <a:rPr sz="1400" b="0" i="0">
+                <a:spcPts val="810"/>
+              </a:spcAft>
+            </a:pPr>
+            <a:r>
+              <a:rPr sz="1800" b="0" i="0">
                 <a:solidFill>
                   <a:srgbClr val="1C1B19"/>
                 </a:solidFill>
@@ -4845,7 +4645,7 @@
                 </a:solidFill>
                 <a:latin typeface="Inter Tight"/>
               </a:rPr>
-              <a:t>THE REPAIR SEQUENCE</a:t>
+              <a:t>BEFORE YOU GO</a:t>
             </a:r>
           </a:p>
         </p:txBody>
@@ -4897,8 +4697,8 @@
         </p:nvSpPr>
         <p:spPr>
           <a:xfrm>
-            <a:off x="822960" y="1005840"/>
-            <a:ext cx="10515600" cy="1097280"/>
+            <a:off x="822960" y="1188720"/>
+            <a:ext cx="10515600" cy="914400"/>
           </a:xfrm>
           <a:prstGeom prst="rect">
             <a:avLst/>
@@ -4923,7 +4723,7 @@
                 </a:solidFill>
                 <a:latin typeface="Source Serif 4"/>
               </a:rPr>
-              <a:t>Cool down, own it, make it right, listen.</a:t>
+              <a:t>Draft it messy</a:t>
             </a:r>
           </a:p>
         </p:txBody>
@@ -4936,8 +4736,8 @@
         </p:nvSpPr>
         <p:spPr>
           <a:xfrm>
-            <a:off x="822960" y="2057400"/>
-            <a:ext cx="548640" cy="804672"/>
+            <a:off x="822960" y="2286000"/>
+            <a:ext cx="10515600" cy="1463040"/>
           </a:xfrm>
           <a:prstGeom prst="rect">
             <a:avLst/>
@@ -4952,31 +4752,77 @@
           <a:p>
             <a:pPr algn="l">
               <a:spcAft>
-                <a:spcPts val="1170"/>
-              </a:spcAft>
-            </a:pPr>
-            <a:r>
-              <a:rPr sz="2600" b="1" i="0">
-                <a:solidFill>
-                  <a:srgbClr val="F47B20"/>
-                </a:solidFill>
-                <a:latin typeface="Source Serif 4"/>
-              </a:rPr>
-              <a:t>1</a:t>
-            </a:r>
-          </a:p>
-        </p:txBody>
-      </p:sp>
-      <p:sp>
-        <p:nvSpPr>
-          <p:cNvPr id="7" name="TextBox 6"/>
+                <a:spcPts val="1080"/>
+              </a:spcAft>
+            </a:pPr>
+            <a:r>
+              <a:rPr sz="2400" b="0" i="0">
+                <a:solidFill>
+                  <a:srgbClr val="1C1B19"/>
+                </a:solidFill>
+                <a:latin typeface="Source Serif 4"/>
+              </a:rPr>
+              <a:t>What I did, specifically, with no "but." How I'll make it right. What I'll do differently.</a:t>
+            </a:r>
+          </a:p>
+        </p:txBody>
+      </p:sp>
+      <p:sp>
+        <p:nvSpPr>
+          <p:cNvPr id="7" name="Rectangle 6"/>
+          <p:cNvSpPr/>
+          <p:nvPr/>
+        </p:nvSpPr>
+        <p:spPr>
+          <a:xfrm>
+            <a:off x="822960" y="4023360"/>
+            <a:ext cx="10515600" cy="1371600"/>
+          </a:xfrm>
+          <a:prstGeom prst="rect">
+            <a:avLst/>
+          </a:prstGeom>
+          <a:solidFill>
+            <a:srgbClr val="FFFFFF"/>
+          </a:solidFill>
+          <a:ln w="15875">
+            <a:solidFill>
+              <a:srgbClr val="1C1B19"/>
+            </a:solidFill>
+          </a:ln>
+          <a:effectLst/>
+        </p:spPr>
+        <p:style>
+          <a:lnRef idx="1">
+            <a:schemeClr val="accent1"/>
+          </a:lnRef>
+          <a:fillRef idx="3">
+            <a:schemeClr val="accent1"/>
+          </a:fillRef>
+          <a:effectRef idx="2">
+            <a:schemeClr val="accent1"/>
+          </a:effectRef>
+          <a:fontRef idx="minor">
+            <a:schemeClr val="lt1"/>
+          </a:fontRef>
+        </p:style>
+        <p:txBody>
+          <a:bodyPr rtlCol="0" anchor="ctr"/>
+          <a:lstStyle/>
+          <a:p>
+            <a:pPr algn="ctr"/>
+          </a:p>
+        </p:txBody>
+      </p:sp>
+      <p:sp>
+        <p:nvSpPr>
+          <p:cNvPr id="8" name="TextBox 7"/>
           <p:cNvSpPr txBox="1"/>
           <p:nvPr/>
         </p:nvSpPr>
         <p:spPr>
           <a:xfrm>
-            <a:off x="1463040" y="2093976"/>
-            <a:ext cx="9875520" cy="804672"/>
+            <a:off x="1097280" y="4206240"/>
+            <a:ext cx="10058400" cy="365760"/>
           </a:xfrm>
           <a:prstGeom prst="rect">
             <a:avLst/>
@@ -4991,47 +4837,31 @@
           <a:p>
             <a:pPr algn="l">
               <a:spcAft>
-                <a:spcPts val="945"/>
-              </a:spcAft>
-            </a:pPr>
-            <a:r>
-              <a:rPr sz="2100" b="1" i="0">
-                <a:solidFill>
-                  <a:srgbClr val="1C1B19"/>
-                </a:solidFill>
-                <a:latin typeface="Source Serif 4"/>
-              </a:rPr>
-              <a:t>Cool down first.</a:t>
-            </a:r>
-          </a:p>
-          <a:p>
-            <a:pPr algn="l">
-              <a:spcAft>
-                <a:spcPts val="945"/>
-              </a:spcAft>
-            </a:pPr>
-            <a:r>
-              <a:rPr sz="1600" b="0" i="0">
-                <a:solidFill>
-                  <a:srgbClr val="5D5A54"/>
-                </a:solidFill>
-                <a:latin typeface="Source Serif 4"/>
-              </a:rPr>
-              <a:t>Ready when you're curious about their side.</a:t>
-            </a:r>
-          </a:p>
-        </p:txBody>
-      </p:sp>
-      <p:sp>
-        <p:nvSpPr>
-          <p:cNvPr id="8" name="TextBox 7"/>
+                <a:spcPts val="540"/>
+              </a:spcAft>
+            </a:pPr>
+            <a:r>
+              <a:rPr sz="1200" b="1" i="0">
+                <a:solidFill>
+                  <a:srgbClr val="0B2D5B"/>
+                </a:solidFill>
+                <a:latin typeface="Inter Tight"/>
+              </a:rPr>
+              <a:t>ON THE BVR DINER MENU</a:t>
+            </a:r>
+          </a:p>
+        </p:txBody>
+      </p:sp>
+      <p:sp>
+        <p:nvSpPr>
+          <p:cNvPr id="9" name="TextBox 8"/>
           <p:cNvSpPr txBox="1"/>
           <p:nvPr/>
         </p:nvSpPr>
         <p:spPr>
           <a:xfrm>
-            <a:off x="822960" y="2862072"/>
-            <a:ext cx="548640" cy="804672"/>
+            <a:off x="1097280" y="4617720"/>
+            <a:ext cx="10058400" cy="640080"/>
           </a:xfrm>
           <a:prstGeom prst="rect">
             <a:avLst/>
@@ -5046,354 +4876,17 @@
           <a:p>
             <a:pPr algn="l">
               <a:spcAft>
-                <a:spcPts val="1170"/>
-              </a:spcAft>
-            </a:pPr>
-            <a:r>
-              <a:rPr sz="2600" b="1" i="0">
-                <a:solidFill>
-                  <a:srgbClr val="F47B20"/>
-                </a:solidFill>
-                <a:latin typeface="Source Serif 4"/>
-              </a:rPr>
-              <a:t>2</a:t>
-            </a:r>
-          </a:p>
-        </p:txBody>
-      </p:sp>
-      <p:sp>
-        <p:nvSpPr>
-          <p:cNvPr id="9" name="TextBox 8"/>
-          <p:cNvSpPr txBox="1"/>
-          <p:nvPr/>
-        </p:nvSpPr>
-        <p:spPr>
-          <a:xfrm>
-            <a:off x="1463040" y="2898648"/>
-            <a:ext cx="9875520" cy="804672"/>
-          </a:xfrm>
-          <a:prstGeom prst="rect">
-            <a:avLst/>
-          </a:prstGeom>
-          <a:noFill/>
-        </p:spPr>
-        <p:txBody>
-          <a:bodyPr wrap="square" anchor="t" lIns="0" rIns="0" tIns="0" bIns="0">
-            <a:spAutoFit/>
-          </a:bodyPr>
-          <a:lstStyle/>
-          <a:p>
-            <a:pPr algn="l">
-              <a:spcAft>
-                <a:spcPts val="945"/>
-              </a:spcAft>
-            </a:pPr>
-            <a:r>
-              <a:rPr sz="2100" b="1" i="0">
+                <a:spcPts val="900"/>
+              </a:spcAft>
+            </a:pPr>
+            <a:r>
+              <a:rPr sz="2000" b="0" i="0">
                 <a:solidFill>
                   <a:srgbClr val="1C1B19"/>
                 </a:solidFill>
-                <a:latin typeface="Source Serif 4"/>
-              </a:rPr>
-              <a:t>Lead with responsibility.</a:t>
-            </a:r>
-          </a:p>
-          <a:p>
-            <a:pPr algn="l">
-              <a:spcAft>
-                <a:spcPts val="945"/>
-              </a:spcAft>
-            </a:pPr>
-            <a:r>
-              <a:rPr sz="1600" b="0" i="0">
-                <a:solidFill>
-                  <a:srgbClr val="5D5A54"/>
-                </a:solidFill>
-                <a:latin typeface="Source Serif 4"/>
-              </a:rPr>
-              <a:t>"I shouldn't have posted your message."</a:t>
-            </a:r>
-          </a:p>
-        </p:txBody>
-      </p:sp>
-      <p:sp>
-        <p:nvSpPr>
-          <p:cNvPr id="10" name="TextBox 9"/>
-          <p:cNvSpPr txBox="1"/>
-          <p:nvPr/>
-        </p:nvSpPr>
-        <p:spPr>
-          <a:xfrm>
-            <a:off x="822960" y="3666744"/>
-            <a:ext cx="548640" cy="804672"/>
-          </a:xfrm>
-          <a:prstGeom prst="rect">
-            <a:avLst/>
-          </a:prstGeom>
-          <a:noFill/>
-        </p:spPr>
-        <p:txBody>
-          <a:bodyPr wrap="square" anchor="t" lIns="0" rIns="0" tIns="0" bIns="0">
-            <a:spAutoFit/>
-          </a:bodyPr>
-          <a:lstStyle/>
-          <a:p>
-            <a:pPr algn="l">
-              <a:spcAft>
-                <a:spcPts val="1170"/>
-              </a:spcAft>
-            </a:pPr>
-            <a:r>
-              <a:rPr sz="2600" b="1" i="0">
-                <a:solidFill>
-                  <a:srgbClr val="F47B20"/>
-                </a:solidFill>
-                <a:latin typeface="Source Serif 4"/>
-              </a:rPr>
-              <a:t>3</a:t>
-            </a:r>
-          </a:p>
-        </p:txBody>
-      </p:sp>
-      <p:sp>
-        <p:nvSpPr>
-          <p:cNvPr id="11" name="TextBox 10"/>
-          <p:cNvSpPr txBox="1"/>
-          <p:nvPr/>
-        </p:nvSpPr>
-        <p:spPr>
-          <a:xfrm>
-            <a:off x="1463040" y="3703320"/>
-            <a:ext cx="9875520" cy="804672"/>
-          </a:xfrm>
-          <a:prstGeom prst="rect">
-            <a:avLst/>
-          </a:prstGeom>
-          <a:noFill/>
-        </p:spPr>
-        <p:txBody>
-          <a:bodyPr wrap="square" anchor="t" lIns="0" rIns="0" tIns="0" bIns="0">
-            <a:spAutoFit/>
-          </a:bodyPr>
-          <a:lstStyle/>
-          <a:p>
-            <a:pPr algn="l">
-              <a:spcAft>
-                <a:spcPts val="945"/>
-              </a:spcAft>
-            </a:pPr>
-            <a:r>
-              <a:rPr sz="2100" b="1" i="0">
-                <a:solidFill>
-                  <a:srgbClr val="1C1B19"/>
-                </a:solidFill>
-                <a:latin typeface="Source Serif 4"/>
-              </a:rPr>
-              <a:t>Offer to repair, and do it.</a:t>
-            </a:r>
-          </a:p>
-          <a:p>
-            <a:pPr algn="l">
-              <a:spcAft>
-                <a:spcPts val="945"/>
-              </a:spcAft>
-            </a:pPr>
-            <a:r>
-              <a:rPr sz="1600" b="0" i="0">
-                <a:solidFill>
-                  <a:srgbClr val="5D5A54"/>
-                </a:solidFill>
-                <a:latin typeface="Source Serif 4"/>
-              </a:rPr>
-              <a:t>The part people skip.</a:t>
-            </a:r>
-          </a:p>
-        </p:txBody>
-      </p:sp>
-      <p:sp>
-        <p:nvSpPr>
-          <p:cNvPr id="12" name="TextBox 11"/>
-          <p:cNvSpPr txBox="1"/>
-          <p:nvPr/>
-        </p:nvSpPr>
-        <p:spPr>
-          <a:xfrm>
-            <a:off x="822960" y="4471416"/>
-            <a:ext cx="548640" cy="804672"/>
-          </a:xfrm>
-          <a:prstGeom prst="rect">
-            <a:avLst/>
-          </a:prstGeom>
-          <a:noFill/>
-        </p:spPr>
-        <p:txBody>
-          <a:bodyPr wrap="square" anchor="t" lIns="0" rIns="0" tIns="0" bIns="0">
-            <a:spAutoFit/>
-          </a:bodyPr>
-          <a:lstStyle/>
-          <a:p>
-            <a:pPr algn="l">
-              <a:spcAft>
-                <a:spcPts val="1170"/>
-              </a:spcAft>
-            </a:pPr>
-            <a:r>
-              <a:rPr sz="2600" b="1" i="0">
-                <a:solidFill>
-                  <a:srgbClr val="F47B20"/>
-                </a:solidFill>
-                <a:latin typeface="Source Serif 4"/>
-              </a:rPr>
-              <a:t>4</a:t>
-            </a:r>
-          </a:p>
-        </p:txBody>
-      </p:sp>
-      <p:sp>
-        <p:nvSpPr>
-          <p:cNvPr id="13" name="TextBox 12"/>
-          <p:cNvSpPr txBox="1"/>
-          <p:nvPr/>
-        </p:nvSpPr>
-        <p:spPr>
-          <a:xfrm>
-            <a:off x="1463040" y="4507992"/>
-            <a:ext cx="9875520" cy="804672"/>
-          </a:xfrm>
-          <a:prstGeom prst="rect">
-            <a:avLst/>
-          </a:prstGeom>
-          <a:noFill/>
-        </p:spPr>
-        <p:txBody>
-          <a:bodyPr wrap="square" anchor="t" lIns="0" rIns="0" tIns="0" bIns="0">
-            <a:spAutoFit/>
-          </a:bodyPr>
-          <a:lstStyle/>
-          <a:p>
-            <a:pPr algn="l">
-              <a:spcAft>
-                <a:spcPts val="945"/>
-              </a:spcAft>
-            </a:pPr>
-            <a:r>
-              <a:rPr sz="2100" b="1" i="0">
-                <a:solidFill>
-                  <a:srgbClr val="1C1B19"/>
-                </a:solidFill>
-                <a:latin typeface="Source Serif 4"/>
-              </a:rPr>
-              <a:t>Drop the "but."</a:t>
-            </a:r>
-          </a:p>
-          <a:p>
-            <a:pPr algn="l">
-              <a:spcAft>
-                <a:spcPts val="945"/>
-              </a:spcAft>
-            </a:pPr>
-            <a:r>
-              <a:rPr sz="1600" b="0" i="0">
-                <a:solidFill>
-                  <a:srgbClr val="5D5A54"/>
-                </a:solidFill>
-                <a:latin typeface="Source Serif 4"/>
-              </a:rPr>
-              <a:t>"Sorry, but you started it" cancels it.</a:t>
-            </a:r>
-          </a:p>
-        </p:txBody>
-      </p:sp>
-      <p:sp>
-        <p:nvSpPr>
-          <p:cNvPr id="14" name="TextBox 13"/>
-          <p:cNvSpPr txBox="1"/>
-          <p:nvPr/>
-        </p:nvSpPr>
-        <p:spPr>
-          <a:xfrm>
-            <a:off x="822960" y="5276088"/>
-            <a:ext cx="548640" cy="804672"/>
-          </a:xfrm>
-          <a:prstGeom prst="rect">
-            <a:avLst/>
-          </a:prstGeom>
-          <a:noFill/>
-        </p:spPr>
-        <p:txBody>
-          <a:bodyPr wrap="square" anchor="t" lIns="0" rIns="0" tIns="0" bIns="0">
-            <a:spAutoFit/>
-          </a:bodyPr>
-          <a:lstStyle/>
-          <a:p>
-            <a:pPr algn="l">
-              <a:spcAft>
-                <a:spcPts val="1170"/>
-              </a:spcAft>
-            </a:pPr>
-            <a:r>
-              <a:rPr sz="2600" b="1" i="0">
-                <a:solidFill>
-                  <a:srgbClr val="F47B20"/>
-                </a:solidFill>
-                <a:latin typeface="Source Serif 4"/>
-              </a:rPr>
-              <a:t>5</a:t>
-            </a:r>
-          </a:p>
-        </p:txBody>
-      </p:sp>
-      <p:sp>
-        <p:nvSpPr>
-          <p:cNvPr id="15" name="TextBox 14"/>
-          <p:cNvSpPr txBox="1"/>
-          <p:nvPr/>
-        </p:nvSpPr>
-        <p:spPr>
-          <a:xfrm>
-            <a:off x="1463040" y="5312664"/>
-            <a:ext cx="9875520" cy="804672"/>
-          </a:xfrm>
-          <a:prstGeom prst="rect">
-            <a:avLst/>
-          </a:prstGeom>
-          <a:noFill/>
-        </p:spPr>
-        <p:txBody>
-          <a:bodyPr wrap="square" anchor="t" lIns="0" rIns="0" tIns="0" bIns="0">
-            <a:spAutoFit/>
-          </a:bodyPr>
-          <a:lstStyle/>
-          <a:p>
-            <a:pPr algn="l">
-              <a:spcAft>
-                <a:spcPts val="945"/>
-              </a:spcAft>
-            </a:pPr>
-            <a:r>
-              <a:rPr sz="2100" b="1" i="0">
-                <a:solidFill>
-                  <a:srgbClr val="1C1B19"/>
-                </a:solidFill>
-                <a:latin typeface="Source Serif 4"/>
-              </a:rPr>
-              <a:t>Listen to understand.</a:t>
-            </a:r>
-          </a:p>
-          <a:p>
-            <a:pPr algn="l">
-              <a:spcAft>
-                <a:spcPts val="945"/>
-              </a:spcAft>
-            </a:pPr>
-            <a:r>
-              <a:rPr sz="1600" b="0" i="0">
-                <a:solidFill>
-                  <a:srgbClr val="5D5A54"/>
-                </a:solidFill>
-                <a:latin typeface="Source Serif 4"/>
-              </a:rPr>
-              <a:t>"What was it like from your side?"</a:t>
+                <a:latin typeface="Inter Tight"/>
+              </a:rPr>
+              <a:t>https://rmwtoolkit.github.io/bcds-toolkit/the-repair-kit-high-school.html</a:t>
             </a:r>
           </a:p>
         </p:txBody>
@@ -5407,6 +4900,2269 @@
 </file>
 
 <file path=ppt/slides/slide11.xml><?xml version="1.0" encoding="utf-8"?>
+<p:sld xmlns:a="http://schemas.openxmlformats.org/drawingml/2006/main" xmlns:p="http://schemas.openxmlformats.org/presentationml/2006/main" xmlns:r="http://schemas.openxmlformats.org/officeDocument/2006/relationships" show="0">
+  <p:cSld>
+    <p:bg>
+      <p:bgPr>
+        <a:solidFill>
+          <a:srgbClr val="EEEBE4"/>
+        </a:solidFill>
+        <a:effectLst/>
+      </p:bgPr>
+    </p:bg>
+    <p:spTree>
+      <p:nvGrpSpPr>
+        <p:cNvPr id="1" name=""/>
+        <p:cNvGrpSpPr/>
+        <p:nvPr/>
+      </p:nvGrpSpPr>
+      <p:grpSpPr/>
+      <p:sp>
+        <p:nvSpPr>
+          <p:cNvPr id="2" name="Rectangle 1"/>
+          <p:cNvSpPr/>
+          <p:nvPr/>
+        </p:nvSpPr>
+        <p:spPr>
+          <a:xfrm>
+            <a:off x="0" y="0"/>
+            <a:ext cx="12191695" cy="384048"/>
+          </a:xfrm>
+          <a:prstGeom prst="rect">
+            <a:avLst/>
+          </a:prstGeom>
+          <a:solidFill>
+            <a:srgbClr val="0B2D5B"/>
+          </a:solidFill>
+          <a:ln>
+            <a:noFill/>
+          </a:ln>
+          <a:effectLst/>
+        </p:spPr>
+        <p:style>
+          <a:lnRef idx="1">
+            <a:schemeClr val="accent1"/>
+          </a:lnRef>
+          <a:fillRef idx="3">
+            <a:schemeClr val="accent1"/>
+          </a:fillRef>
+          <a:effectRef idx="2">
+            <a:schemeClr val="accent1"/>
+          </a:effectRef>
+          <a:fontRef idx="minor">
+            <a:schemeClr val="lt1"/>
+          </a:fontRef>
+        </p:style>
+        <p:txBody>
+          <a:bodyPr rtlCol="0" anchor="ctr"/>
+          <a:lstStyle/>
+          <a:p>
+            <a:pPr algn="ctr"/>
+          </a:p>
+        </p:txBody>
+      </p:sp>
+      <p:sp>
+        <p:nvSpPr>
+          <p:cNvPr id="3" name="TextBox 2"/>
+          <p:cNvSpPr txBox="1"/>
+          <p:nvPr/>
+        </p:nvSpPr>
+        <p:spPr>
+          <a:xfrm>
+            <a:off x="548640" y="100584"/>
+            <a:ext cx="10972800" cy="274320"/>
+          </a:xfrm>
+          <a:prstGeom prst="rect">
+            <a:avLst/>
+          </a:prstGeom>
+          <a:noFill/>
+        </p:spPr>
+        <p:txBody>
+          <a:bodyPr wrap="square" anchor="t" lIns="0" rIns="0" tIns="0" bIns="0">
+            <a:spAutoFit/>
+          </a:bodyPr>
+          <a:lstStyle/>
+          <a:p>
+            <a:pPr algn="l">
+              <a:spcAft>
+                <a:spcPts val="495"/>
+              </a:spcAft>
+            </a:pPr>
+            <a:r>
+              <a:rPr sz="1100" b="1" i="0">
+                <a:solidFill>
+                  <a:srgbClr val="FFFFFF"/>
+                </a:solidFill>
+                <a:latin typeface="Inter Tight"/>
+              </a:rPr>
+              <a:t>TEACHER PAGE  ·  skipped when you present  ·  Lesson plan</a:t>
+            </a:r>
+          </a:p>
+        </p:txBody>
+      </p:sp>
+      <p:sp>
+        <p:nvSpPr>
+          <p:cNvPr id="4" name="TextBox 3"/>
+          <p:cNvSpPr txBox="1"/>
+          <p:nvPr/>
+        </p:nvSpPr>
+        <p:spPr>
+          <a:xfrm>
+            <a:off x="548640" y="685800"/>
+            <a:ext cx="10972800" cy="731520"/>
+          </a:xfrm>
+          <a:prstGeom prst="rect">
+            <a:avLst/>
+          </a:prstGeom>
+          <a:noFill/>
+        </p:spPr>
+        <p:txBody>
+          <a:bodyPr wrap="square" anchor="t" lIns="0" rIns="0" tIns="0" bIns="0">
+            <a:spAutoFit/>
+          </a:bodyPr>
+          <a:lstStyle/>
+          <a:p>
+            <a:pPr algn="l">
+              <a:spcAft>
+                <a:spcPts val="1530"/>
+              </a:spcAft>
+            </a:pPr>
+            <a:r>
+              <a:rPr sz="3400" b="1" i="0">
+                <a:solidFill>
+                  <a:srgbClr val="1C1B19"/>
+                </a:solidFill>
+                <a:latin typeface="Source Serif 4"/>
+              </a:rPr>
+              <a:t>The Repair Kit</a:t>
+            </a:r>
+          </a:p>
+        </p:txBody>
+      </p:sp>
+      <p:sp>
+        <p:nvSpPr>
+          <p:cNvPr id="5" name="TextBox 4"/>
+          <p:cNvSpPr txBox="1"/>
+          <p:nvPr/>
+        </p:nvSpPr>
+        <p:spPr>
+          <a:xfrm>
+            <a:off x="548640" y="1325880"/>
+            <a:ext cx="10972800" cy="365760"/>
+          </a:xfrm>
+          <a:prstGeom prst="rect">
+            <a:avLst/>
+          </a:prstGeom>
+          <a:noFill/>
+        </p:spPr>
+        <p:txBody>
+          <a:bodyPr wrap="square" anchor="t" lIns="0" rIns="0" tIns="0" bIns="0">
+            <a:spAutoFit/>
+          </a:bodyPr>
+          <a:lstStyle/>
+          <a:p>
+            <a:pPr algn="l">
+              <a:spcAft>
+                <a:spcPts val="630"/>
+              </a:spcAft>
+            </a:pPr>
+            <a:r>
+              <a:rPr sz="1400" b="0" i="0">
+                <a:solidFill>
+                  <a:srgbClr val="5D5A54"/>
+                </a:solidFill>
+                <a:latin typeface="Inter Tight"/>
+              </a:rPr>
+              <a:t>Upper School  ·  45 minutes (20-minute advisory version below)  ·  9th grade advisory, health class, or a counselor-led group</a:t>
+            </a:r>
+          </a:p>
+        </p:txBody>
+      </p:sp>
+      <p:sp>
+        <p:nvSpPr>
+          <p:cNvPr id="6" name="TextBox 5"/>
+          <p:cNvSpPr txBox="1"/>
+          <p:nvPr/>
+        </p:nvSpPr>
+        <p:spPr>
+          <a:xfrm>
+            <a:off x="548640" y="1828800"/>
+            <a:ext cx="5120640" cy="4389120"/>
+          </a:xfrm>
+          <a:prstGeom prst="rect">
+            <a:avLst/>
+          </a:prstGeom>
+          <a:noFill/>
+        </p:spPr>
+        <p:txBody>
+          <a:bodyPr wrap="square" anchor="t" lIns="0" rIns="0" tIns="0" bIns="0">
+            <a:spAutoFit/>
+          </a:bodyPr>
+          <a:lstStyle/>
+          <a:p>
+            <a:pPr algn="l">
+              <a:spcAft>
+                <a:spcPts val="675"/>
+              </a:spcAft>
+            </a:pPr>
+            <a:r>
+              <a:rPr sz="1100" b="1" i="0">
+                <a:solidFill>
+                  <a:srgbClr val="0B2D5B"/>
+                </a:solidFill>
+                <a:latin typeface="Inter Tight"/>
+              </a:rPr>
+              <a:t>GOAL</a:t>
+            </a:r>
+          </a:p>
+          <a:p>
+            <a:pPr algn="l">
+              <a:spcAft>
+                <a:spcPts val="675"/>
+              </a:spcAft>
+            </a:pPr>
+            <a:r>
+              <a:rPr sz="1500" b="0" i="0">
+                <a:solidFill>
+                  <a:srgbClr val="1C1B19"/>
+                </a:solidFill>
+                <a:latin typeface="Source Serif 4"/>
+              </a:rPr>
+              <a:t>Students can name which parts of an apology matter most (taking responsibility, then an offer to fix it), explain why sorry is hard to say, use the repair sequence on a real or practice conflict, and know their options when they're the one who got hurt. Nobody retells a real fight in class.</a:t>
+            </a:r>
+          </a:p>
+          <a:p>
+            <a:pPr algn="l">
+              <a:spcAft>
+                <a:spcPts val="675"/>
+              </a:spcAft>
+            </a:pPr>
+            <a:r>
+              <a:rPr sz="1500" b="0" i="0">
+                <a:solidFill>
+                  <a:srgbClr val="1C1B19"/>
+                </a:solidFill>
+                <a:latin typeface="Source Serif 4"/>
+              </a:rPr>
+              <a:t/>
+            </a:r>
+          </a:p>
+          <a:p>
+            <a:pPr algn="l">
+              <a:spcAft>
+                <a:spcPts val="675"/>
+              </a:spcAft>
+            </a:pPr>
+            <a:r>
+              <a:rPr sz="1100" b="1" i="0">
+                <a:solidFill>
+                  <a:srgbClr val="0B2D5B"/>
+                </a:solidFill>
+                <a:latin typeface="Inter Tight"/>
+              </a:rPr>
+              <a:t>MATERIALS</a:t>
+            </a:r>
+          </a:p>
+          <a:p>
+            <a:pPr algn="l">
+              <a:spcAft>
+                <a:spcPts val="675"/>
+              </a:spcAft>
+            </a:pPr>
+            <a:r>
+              <a:rPr sz="1500" b="0" i="0">
+                <a:solidFill>
+                  <a:srgbClr val="1C1B19"/>
+                </a:solidFill>
+                <a:latin typeface="Source Serif 4"/>
+              </a:rPr>
+              <a:t>Index cards for the private reflections and the exit card</a:t>
+            </a:r>
+          </a:p>
+          <a:p>
+            <a:pPr algn="l">
+              <a:spcAft>
+                <a:spcPts val="675"/>
+              </a:spcAft>
+            </a:pPr>
+            <a:r>
+              <a:rPr sz="1500" b="0" i="0">
+                <a:solidFill>
+                  <a:srgbClr val="1C1B19"/>
+                </a:solidFill>
+                <a:latin typeface="Source Serif 4"/>
+              </a:rPr>
+              <a:t>Scrap paper for the ranking vote (or use hands)</a:t>
+            </a:r>
+          </a:p>
+          <a:p>
+            <a:pPr algn="l">
+              <a:spcAft>
+                <a:spcPts val="675"/>
+              </a:spcAft>
+            </a:pPr>
+            <a:r>
+              <a:rPr sz="1500" b="0" i="0">
+                <a:solidFill>
+                  <a:srgbClr val="1C1B19"/>
+                </a:solidFill>
+                <a:latin typeface="Source Serif 4"/>
+              </a:rPr>
+              <a:t>The take-home link (last slide) to share after class</a:t>
+            </a:r>
+          </a:p>
+        </p:txBody>
+      </p:sp>
+      <p:sp>
+        <p:nvSpPr>
+          <p:cNvPr id="7" name="TextBox 6"/>
+          <p:cNvSpPr txBox="1"/>
+          <p:nvPr/>
+        </p:nvSpPr>
+        <p:spPr>
+          <a:xfrm>
+            <a:off x="6126480" y="1828800"/>
+            <a:ext cx="5486400" cy="4389120"/>
+          </a:xfrm>
+          <a:prstGeom prst="rect">
+            <a:avLst/>
+          </a:prstGeom>
+          <a:noFill/>
+        </p:spPr>
+        <p:txBody>
+          <a:bodyPr wrap="square" anchor="t" lIns="0" rIns="0" tIns="0" bIns="0">
+            <a:spAutoFit/>
+          </a:bodyPr>
+          <a:lstStyle/>
+          <a:p>
+            <a:pPr algn="l">
+              <a:spcAft>
+                <a:spcPts val="630"/>
+              </a:spcAft>
+            </a:pPr>
+            <a:r>
+              <a:rPr sz="1100" b="1" i="0">
+                <a:solidFill>
+                  <a:srgbClr val="0B2D5B"/>
+                </a:solidFill>
+                <a:latin typeface="Inter Tight"/>
+              </a:rPr>
+              <a:t>FLOW</a:t>
+            </a:r>
+          </a:p>
+          <a:p>
+            <a:pPr algn="l">
+              <a:spcAft>
+                <a:spcPts val="630"/>
+              </a:spcAft>
+            </a:pPr>
+            <a:r>
+              <a:rPr sz="1300" b="1" i="0">
+                <a:solidFill>
+                  <a:srgbClr val="F47B20"/>
+                </a:solidFill>
+                <a:latin typeface="Inter Tight"/>
+              </a:rPr>
+              <a:t>5 min   </a:t>
+            </a:r>
+            <a:r>
+              <a:rPr sz="1400" b="0" i="0">
+                <a:solidFill>
+                  <a:srgbClr val="1C1B19"/>
+                </a:solidFill>
+                <a:latin typeface="Source Serif 4"/>
+              </a:rPr>
+              <a:t>Guess the ranking (quick vote)</a:t>
+            </a:r>
+          </a:p>
+          <a:p>
+            <a:pPr algn="l">
+              <a:spcAft>
+                <a:spcPts val="630"/>
+              </a:spcAft>
+            </a:pPr>
+            <a:r>
+              <a:rPr sz="1300" b="1" i="0">
+                <a:solidFill>
+                  <a:srgbClr val="F47B20"/>
+                </a:solidFill>
+                <a:latin typeface="Inter Tight"/>
+              </a:rPr>
+              <a:t>5 min   </a:t>
+            </a:r>
+            <a:r>
+              <a:rPr sz="1400" b="0" i="0">
+                <a:solidFill>
+                  <a:srgbClr val="1C1B19"/>
+                </a:solidFill>
+                <a:latin typeface="Source Serif 4"/>
+              </a:rPr>
+              <a:t>What makes an apology work</a:t>
+            </a:r>
+          </a:p>
+          <a:p>
+            <a:pPr algn="l">
+              <a:spcAft>
+                <a:spcPts val="630"/>
+              </a:spcAft>
+            </a:pPr>
+            <a:r>
+              <a:rPr sz="1300" b="1" i="0">
+                <a:solidFill>
+                  <a:srgbClr val="F47B20"/>
+                </a:solidFill>
+                <a:latin typeface="Inter Tight"/>
+              </a:rPr>
+              <a:t>5 min   </a:t>
+            </a:r>
+            <a:r>
+              <a:rPr sz="1400" b="0" i="0">
+                <a:solidFill>
+                  <a:srgbClr val="1C1B19"/>
+                </a:solidFill>
+                <a:latin typeface="Source Serif 4"/>
+              </a:rPr>
+              <a:t>Why sorry is so hard</a:t>
+            </a:r>
+          </a:p>
+          <a:p>
+            <a:pPr algn="l">
+              <a:spcAft>
+                <a:spcPts val="630"/>
+              </a:spcAft>
+            </a:pPr>
+            <a:r>
+              <a:rPr sz="1300" b="1" i="0">
+                <a:solidFill>
+                  <a:srgbClr val="F47B20"/>
+                </a:solidFill>
+                <a:latin typeface="Inter Tight"/>
+              </a:rPr>
+              <a:t>5 min   </a:t>
+            </a:r>
+            <a:r>
+              <a:rPr sz="1400" b="0" i="0">
+                <a:solidFill>
+                  <a:srgbClr val="1C1B19"/>
+                </a:solidFill>
+                <a:latin typeface="Source Serif 4"/>
+              </a:rPr>
+              <a:t>Step back (private reflection)</a:t>
+            </a:r>
+          </a:p>
+          <a:p>
+            <a:pPr algn="l">
+              <a:spcAft>
+                <a:spcPts val="630"/>
+              </a:spcAft>
+            </a:pPr>
+            <a:r>
+              <a:rPr sz="1300" b="1" i="0">
+                <a:solidFill>
+                  <a:srgbClr val="F47B20"/>
+                </a:solidFill>
+                <a:latin typeface="Inter Tight"/>
+              </a:rPr>
+              <a:t>5 min   </a:t>
+            </a:r>
+            <a:r>
+              <a:rPr sz="1400" b="0" i="0">
+                <a:solidFill>
+                  <a:srgbClr val="1C1B19"/>
+                </a:solidFill>
+                <a:latin typeface="Source Serif 4"/>
+              </a:rPr>
+              <a:t>The repair sequence</a:t>
+            </a:r>
+          </a:p>
+          <a:p>
+            <a:pPr algn="l">
+              <a:spcAft>
+                <a:spcPts val="630"/>
+              </a:spcAft>
+            </a:pPr>
+            <a:r>
+              <a:rPr sz="1300" b="1" i="0">
+                <a:solidFill>
+                  <a:srgbClr val="F47B20"/>
+                </a:solidFill>
+                <a:latin typeface="Inter Tight"/>
+              </a:rPr>
+              <a:t>10 min   </a:t>
+            </a:r>
+            <a:r>
+              <a:rPr sz="1400" b="0" i="0">
+                <a:solidFill>
+                  <a:srgbClr val="1C1B19"/>
+                </a:solidFill>
+                <a:latin typeface="Source Serif 4"/>
+              </a:rPr>
+              <a:t>Which apology lands? (small groups)</a:t>
+            </a:r>
+          </a:p>
+          <a:p>
+            <a:pPr algn="l">
+              <a:spcAft>
+                <a:spcPts val="630"/>
+              </a:spcAft>
+            </a:pPr>
+            <a:r>
+              <a:rPr sz="1300" b="1" i="0">
+                <a:solidFill>
+                  <a:srgbClr val="F47B20"/>
+                </a:solidFill>
+                <a:latin typeface="Inter Tight"/>
+              </a:rPr>
+              <a:t>7 min   </a:t>
+            </a:r>
+            <a:r>
+              <a:rPr sz="1400" b="0" i="0">
+                <a:solidFill>
+                  <a:srgbClr val="1C1B19"/>
+                </a:solidFill>
+                <a:latin typeface="Source Serif 4"/>
+              </a:rPr>
+              <a:t>If you got hurt, and how your family repairs (private reflection)</a:t>
+            </a:r>
+          </a:p>
+          <a:p>
+            <a:pPr algn="l">
+              <a:spcAft>
+                <a:spcPts val="630"/>
+              </a:spcAft>
+            </a:pPr>
+            <a:r>
+              <a:rPr sz="1300" b="1" i="0">
+                <a:solidFill>
+                  <a:srgbClr val="F47B20"/>
+                </a:solidFill>
+                <a:latin typeface="Inter Tight"/>
+              </a:rPr>
+              <a:t>3 min   </a:t>
+            </a:r>
+            <a:r>
+              <a:rPr sz="1400" b="0" i="0">
+                <a:solidFill>
+                  <a:srgbClr val="1C1B19"/>
+                </a:solidFill>
+                <a:latin typeface="Source Serif 4"/>
+              </a:rPr>
+              <a:t>Exit card and take-home link</a:t>
+            </a:r>
+          </a:p>
+          <a:p>
+            <a:pPr algn="l">
+              <a:spcAft>
+                <a:spcPts val="630"/>
+              </a:spcAft>
+            </a:pPr>
+            <a:r>
+              <a:rPr sz="1400" b="0" i="0">
+                <a:solidFill>
+                  <a:srgbClr val="1C1B19"/>
+                </a:solidFill>
+                <a:latin typeface="Source Serif 4"/>
+              </a:rPr>
+              <a:t/>
+            </a:r>
+          </a:p>
+          <a:p>
+            <a:pPr algn="l">
+              <a:spcAft>
+                <a:spcPts val="630"/>
+              </a:spcAft>
+            </a:pPr>
+            <a:r>
+              <a:rPr sz="1100" b="1" i="0">
+                <a:solidFill>
+                  <a:srgbClr val="0B2D5B"/>
+                </a:solidFill>
+                <a:latin typeface="Inter Tight"/>
+              </a:rPr>
+              <a:t>SHORT ON TIME (20-MINUTE ADVISORY)</a:t>
+            </a:r>
+          </a:p>
+          <a:p>
+            <a:pPr algn="l">
+              <a:spcAft>
+                <a:spcPts val="630"/>
+              </a:spcAft>
+            </a:pPr>
+            <a:r>
+              <a:rPr sz="1400" b="0" i="0">
+                <a:solidFill>
+                  <a:srgbClr val="1C1B19"/>
+                </a:solidFill>
+                <a:latin typeface="Source Serif 4"/>
+              </a:rPr>
+              <a:t>Guess the ranking and the answer (7), the repair sequence (5), the Mei card (5), exit card (3). The take-home sheet has the draft-it-messy check and the online moves.</a:t>
+            </a:r>
+          </a:p>
+        </p:txBody>
+      </p:sp>
+    </p:spTree>
+  </p:cSld>
+  <p:clrMapOvr>
+    <a:masterClrMapping/>
+  </p:clrMapOvr>
+</p:sld>
+</file>
+
+<file path=ppt/slides/slide12.xml><?xml version="1.0" encoding="utf-8"?>
+<p:sld xmlns:a="http://schemas.openxmlformats.org/drawingml/2006/main" xmlns:p="http://schemas.openxmlformats.org/presentationml/2006/main" xmlns:r="http://schemas.openxmlformats.org/officeDocument/2006/relationships" show="0">
+  <p:cSld>
+    <p:bg>
+      <p:bgPr>
+        <a:solidFill>
+          <a:srgbClr val="EEEBE4"/>
+        </a:solidFill>
+        <a:effectLst/>
+      </p:bgPr>
+    </p:bg>
+    <p:spTree>
+      <p:nvGrpSpPr>
+        <p:cNvPr id="1" name=""/>
+        <p:cNvGrpSpPr/>
+        <p:nvPr/>
+      </p:nvGrpSpPr>
+      <p:grpSpPr/>
+      <p:sp>
+        <p:nvSpPr>
+          <p:cNvPr id="2" name="Rectangle 1"/>
+          <p:cNvSpPr/>
+          <p:nvPr/>
+        </p:nvSpPr>
+        <p:spPr>
+          <a:xfrm>
+            <a:off x="0" y="0"/>
+            <a:ext cx="12191695" cy="384048"/>
+          </a:xfrm>
+          <a:prstGeom prst="rect">
+            <a:avLst/>
+          </a:prstGeom>
+          <a:solidFill>
+            <a:srgbClr val="0B2D5B"/>
+          </a:solidFill>
+          <a:ln>
+            <a:noFill/>
+          </a:ln>
+          <a:effectLst/>
+        </p:spPr>
+        <p:style>
+          <a:lnRef idx="1">
+            <a:schemeClr val="accent1"/>
+          </a:lnRef>
+          <a:fillRef idx="3">
+            <a:schemeClr val="accent1"/>
+          </a:fillRef>
+          <a:effectRef idx="2">
+            <a:schemeClr val="accent1"/>
+          </a:effectRef>
+          <a:fontRef idx="minor">
+            <a:schemeClr val="lt1"/>
+          </a:fontRef>
+        </p:style>
+        <p:txBody>
+          <a:bodyPr rtlCol="0" anchor="ctr"/>
+          <a:lstStyle/>
+          <a:p>
+            <a:pPr algn="ctr"/>
+          </a:p>
+        </p:txBody>
+      </p:sp>
+      <p:sp>
+        <p:nvSpPr>
+          <p:cNvPr id="3" name="TextBox 2"/>
+          <p:cNvSpPr txBox="1"/>
+          <p:nvPr/>
+        </p:nvSpPr>
+        <p:spPr>
+          <a:xfrm>
+            <a:off x="548640" y="100584"/>
+            <a:ext cx="10972800" cy="274320"/>
+          </a:xfrm>
+          <a:prstGeom prst="rect">
+            <a:avLst/>
+          </a:prstGeom>
+          <a:noFill/>
+        </p:spPr>
+        <p:txBody>
+          <a:bodyPr wrap="square" anchor="t" lIns="0" rIns="0" tIns="0" bIns="0">
+            <a:spAutoFit/>
+          </a:bodyPr>
+          <a:lstStyle/>
+          <a:p>
+            <a:pPr algn="l">
+              <a:spcAft>
+                <a:spcPts val="495"/>
+              </a:spcAft>
+            </a:pPr>
+            <a:r>
+              <a:rPr sz="1100" b="1" i="0">
+                <a:solidFill>
+                  <a:srgbClr val="FFFFFF"/>
+                </a:solidFill>
+                <a:latin typeface="Inter Tight"/>
+              </a:rPr>
+              <a:t>TEACHER PAGE  ·  skipped when you present  ·  Before you teach</a:t>
+            </a:r>
+          </a:p>
+        </p:txBody>
+      </p:sp>
+      <p:sp>
+        <p:nvSpPr>
+          <p:cNvPr id="4" name="TextBox 3"/>
+          <p:cNvSpPr txBox="1"/>
+          <p:nvPr/>
+        </p:nvSpPr>
+        <p:spPr>
+          <a:xfrm>
+            <a:off x="548640" y="685800"/>
+            <a:ext cx="10972800" cy="640080"/>
+          </a:xfrm>
+          <a:prstGeom prst="rect">
+            <a:avLst/>
+          </a:prstGeom>
+          <a:noFill/>
+        </p:spPr>
+        <p:txBody>
+          <a:bodyPr wrap="square" anchor="t" lIns="0" rIns="0" tIns="0" bIns="0">
+            <a:spAutoFit/>
+          </a:bodyPr>
+          <a:lstStyle/>
+          <a:p>
+            <a:pPr algn="l">
+              <a:spcAft>
+                <a:spcPts val="1350"/>
+              </a:spcAft>
+            </a:pPr>
+            <a:r>
+              <a:rPr sz="3000" b="1" i="0">
+                <a:solidFill>
+                  <a:srgbClr val="1C1B19"/>
+                </a:solidFill>
+                <a:latin typeface="Source Serif 4"/>
+              </a:rPr>
+              <a:t>Before you teach</a:t>
+            </a:r>
+          </a:p>
+        </p:txBody>
+      </p:sp>
+      <p:sp>
+        <p:nvSpPr>
+          <p:cNvPr id="5" name="TextBox 4"/>
+          <p:cNvSpPr txBox="1"/>
+          <p:nvPr/>
+        </p:nvSpPr>
+        <p:spPr>
+          <a:xfrm>
+            <a:off x="548640" y="1463040"/>
+            <a:ext cx="5394960" cy="4937760"/>
+          </a:xfrm>
+          <a:prstGeom prst="rect">
+            <a:avLst/>
+          </a:prstGeom>
+          <a:noFill/>
+        </p:spPr>
+        <p:txBody>
+          <a:bodyPr wrap="square" anchor="t" lIns="0" rIns="0" tIns="0" bIns="0">
+            <a:spAutoFit/>
+          </a:bodyPr>
+          <a:lstStyle/>
+          <a:p>
+            <a:pPr algn="l">
+              <a:spcAft>
+                <a:spcPts val="585"/>
+              </a:spcAft>
+            </a:pPr>
+            <a:r>
+              <a:rPr sz="1500" b="1" i="0">
+                <a:solidFill>
+                  <a:srgbClr val="1C1B19"/>
+                </a:solidFill>
+                <a:latin typeface="Source Serif 4"/>
+              </a:rPr>
+              <a:t>Both sides of a fight may be in the room.</a:t>
+            </a:r>
+          </a:p>
+          <a:p>
+            <a:pPr algn="l">
+              <a:spcAft>
+                <a:spcPts val="585"/>
+              </a:spcAft>
+            </a:pPr>
+            <a:r>
+              <a:rPr sz="1300" b="0" i="0">
+                <a:solidFill>
+                  <a:srgbClr val="1C1B19"/>
+                </a:solidFill>
+                <a:latin typeface="Source Serif 4"/>
+              </a:rPr>
+              <a:t>9th grade conflicts often run through one advisory or one team. No real names, no retelling current fights, no "who was wrong" discussions. The reflections are private and stay on cards that go home.</a:t>
+            </a:r>
+          </a:p>
+          <a:p>
+            <a:pPr algn="l">
+              <a:spcAft>
+                <a:spcPts val="585"/>
+              </a:spcAft>
+            </a:pPr>
+            <a:r>
+              <a:rPr sz="1300" b="0" i="0">
+                <a:solidFill>
+                  <a:srgbClr val="1C1B19"/>
+                </a:solidFill>
+                <a:latin typeface="Source Serif 4"/>
+              </a:rPr>
+              <a:t/>
+            </a:r>
+          </a:p>
+          <a:p>
+            <a:pPr algn="l">
+              <a:spcAft>
+                <a:spcPts val="585"/>
+              </a:spcAft>
+            </a:pPr>
+            <a:r>
+              <a:rPr sz="1500" b="1" i="0">
+                <a:solidFill>
+                  <a:srgbClr val="1C1B19"/>
+                </a:solidFill>
+                <a:latin typeface="Source Serif 4"/>
+              </a:rPr>
+              <a:t>Don't stage apologies in class.</a:t>
+            </a:r>
+          </a:p>
+          <a:p>
+            <a:pPr algn="l">
+              <a:spcAft>
+                <a:spcPts val="585"/>
+              </a:spcAft>
+            </a:pPr>
+            <a:r>
+              <a:rPr sz="1300" b="0" i="0">
+                <a:solidFill>
+                  <a:srgbClr val="1C1B19"/>
+                </a:solidFill>
+                <a:latin typeface="Source Serif 4"/>
+              </a:rPr>
+              <a:t>If a conflict between students is live, handle it outside the lesson with a counselor or dean. A lesson on repair isn't the place to make anyone say sorry in front of peers.</a:t>
+            </a:r>
+          </a:p>
+          <a:p>
+            <a:pPr algn="l">
+              <a:spcAft>
+                <a:spcPts val="585"/>
+              </a:spcAft>
+            </a:pPr>
+            <a:r>
+              <a:rPr sz="1300" b="0" i="0">
+                <a:solidFill>
+                  <a:srgbClr val="1C1B19"/>
+                </a:solidFill>
+                <a:latin typeface="Source Serif 4"/>
+              </a:rPr>
+              <a:t/>
+            </a:r>
+          </a:p>
+          <a:p>
+            <a:pPr algn="l">
+              <a:spcAft>
+                <a:spcPts val="585"/>
+              </a:spcAft>
+            </a:pPr>
+            <a:r>
+              <a:rPr sz="1500" b="1" i="0">
+                <a:solidFill>
+                  <a:srgbClr val="1C1B19"/>
+                </a:solidFill>
+                <a:latin typeface="Source Serif 4"/>
+              </a:rPr>
+              <a:t>Hurt, then sorry, again and again, is a pattern.</a:t>
+            </a:r>
+          </a:p>
+          <a:p>
+            <a:pPr algn="l">
+              <a:spcAft>
+                <a:spcPts val="585"/>
+              </a:spcAft>
+            </a:pPr>
+            <a:r>
+              <a:rPr sz="1300" b="0" i="0">
+                <a:solidFill>
+                  <a:srgbClr val="1C1B19"/>
+                </a:solidFill>
+                <a:latin typeface="Source Serif 4"/>
+              </a:rPr>
+              <a:t>If a student describes someone who keeps hurting them and apologizing, at school, in a dating relationship, or at home, thank them and connect them with a counselor that day. Don't problem-solve it in front of the class.</a:t>
+            </a:r>
+          </a:p>
+          <a:p>
+            <a:pPr algn="l">
+              <a:spcAft>
+                <a:spcPts val="585"/>
+              </a:spcAft>
+            </a:pPr>
+            <a:r>
+              <a:rPr sz="1300" b="0" i="0">
+                <a:solidFill>
+                  <a:srgbClr val="1C1B19"/>
+                </a:solidFill>
+                <a:latin typeface="Source Serif 4"/>
+              </a:rPr>
+              <a:t/>
+            </a:r>
+          </a:p>
+        </p:txBody>
+      </p:sp>
+      <p:sp>
+        <p:nvSpPr>
+          <p:cNvPr id="6" name="TextBox 5"/>
+          <p:cNvSpPr txBox="1"/>
+          <p:nvPr/>
+        </p:nvSpPr>
+        <p:spPr>
+          <a:xfrm>
+            <a:off x="6217920" y="1463040"/>
+            <a:ext cx="5394960" cy="4937760"/>
+          </a:xfrm>
+          <a:prstGeom prst="rect">
+            <a:avLst/>
+          </a:prstGeom>
+          <a:noFill/>
+        </p:spPr>
+        <p:txBody>
+          <a:bodyPr wrap="square" anchor="t" lIns="0" rIns="0" tIns="0" bIns="0">
+            <a:spAutoFit/>
+          </a:bodyPr>
+          <a:lstStyle/>
+          <a:p>
+            <a:pPr algn="l">
+              <a:spcAft>
+                <a:spcPts val="585"/>
+              </a:spcAft>
+            </a:pPr>
+            <a:r>
+              <a:rPr sz="1500" b="1" i="0">
+                <a:solidFill>
+                  <a:srgbClr val="1C1B19"/>
+                </a:solidFill>
+                <a:latin typeface="Source Serif 4"/>
+              </a:rPr>
+              <a:t>Nobody owes forgiveness.</a:t>
+            </a:r>
+          </a:p>
+          <a:p>
+            <a:pPr algn="l">
+              <a:spcAft>
+                <a:spcPts val="585"/>
+              </a:spcAft>
+            </a:pPr>
+            <a:r>
+              <a:rPr sz="1300" b="0" i="0">
+                <a:solidFill>
+                  <a:srgbClr val="1C1B19"/>
+                </a:solidFill>
+                <a:latin typeface="Source Serif 4"/>
+              </a:rPr>
+              <a:t>Students who were hurt can accept an apology and still need time to trust, or decline one that comes with no change. Avoid language that pressures the hurt person to "just move on."</a:t>
+            </a:r>
+          </a:p>
+          <a:p>
+            <a:pPr algn="l">
+              <a:spcAft>
+                <a:spcPts val="585"/>
+              </a:spcAft>
+            </a:pPr>
+            <a:r>
+              <a:rPr sz="1300" b="0" i="0">
+                <a:solidFill>
+                  <a:srgbClr val="1C1B19"/>
+                </a:solidFill>
+                <a:latin typeface="Source Serif 4"/>
+              </a:rPr>
+              <a:t/>
+            </a:r>
+          </a:p>
+          <a:p>
+            <a:pPr algn="l">
+              <a:spcAft>
+                <a:spcPts val="585"/>
+              </a:spcAft>
+            </a:pPr>
+            <a:r>
+              <a:rPr sz="1500" b="1" i="0">
+                <a:solidFill>
+                  <a:srgbClr val="1C1B19"/>
+                </a:solidFill>
+                <a:latin typeface="Source Serif 4"/>
+              </a:rPr>
+              <a:t>Some situations need an adult more than an apology.</a:t>
+            </a:r>
+          </a:p>
+          <a:p>
+            <a:pPr algn="l">
+              <a:spcAft>
+                <a:spcPts val="585"/>
+              </a:spcAft>
+            </a:pPr>
+            <a:r>
+              <a:rPr sz="1300" b="0" i="0">
+                <a:solidFill>
+                  <a:srgbClr val="1C1B19"/>
+                </a:solidFill>
+                <a:latin typeface="Source Serif 4"/>
+              </a:rPr>
+              <a:t>Threats to anyone, a fight turning into a pile-on online or at school, or something that made a student feel unsafe. Say this plainly near the end, and know who you'd walk a student to.</a:t>
+            </a:r>
+          </a:p>
+          <a:p>
+            <a:pPr algn="l">
+              <a:spcAft>
+                <a:spcPts val="585"/>
+              </a:spcAft>
+            </a:pPr>
+            <a:r>
+              <a:rPr sz="1300" b="0" i="0">
+                <a:solidFill>
+                  <a:srgbClr val="1C1B19"/>
+                </a:solidFill>
+                <a:latin typeface="Source Serif 4"/>
+              </a:rPr>
+              <a:t/>
+            </a:r>
+          </a:p>
+          <a:p>
+            <a:pPr algn="l">
+              <a:spcAft>
+                <a:spcPts val="585"/>
+              </a:spcAft>
+            </a:pPr>
+            <a:r>
+              <a:rPr sz="1500" b="1" i="0">
+                <a:solidFill>
+                  <a:srgbClr val="1C1B19"/>
+                </a:solidFill>
+                <a:latin typeface="Source Serif 4"/>
+              </a:rPr>
+              <a:t>Screenshots of fights come up.</a:t>
+            </a:r>
+          </a:p>
+          <a:p>
+            <a:pPr algn="l">
+              <a:spcAft>
+                <a:spcPts val="585"/>
+              </a:spcAft>
+            </a:pPr>
+            <a:r>
+              <a:rPr sz="1300" b="0" i="0">
+                <a:solidFill>
+                  <a:srgbClr val="1C1B19"/>
+                </a:solidFill>
+                <a:latin typeface="Source Serif 4"/>
+              </a:rPr>
+              <a:t>Students may bring up a group chat fight everyone saw. Keep it general. If someone's private messages or photos are being passed around, that's a counselor conversation that day.</a:t>
+            </a:r>
+          </a:p>
+          <a:p>
+            <a:pPr algn="l">
+              <a:spcAft>
+                <a:spcPts val="585"/>
+              </a:spcAft>
+            </a:pPr>
+            <a:r>
+              <a:rPr sz="1300" b="0" i="0">
+                <a:solidFill>
+                  <a:srgbClr val="1C1B19"/>
+                </a:solidFill>
+                <a:latin typeface="Source Serif 4"/>
+              </a:rPr>
+              <a:t/>
+            </a:r>
+          </a:p>
+        </p:txBody>
+      </p:sp>
+    </p:spTree>
+  </p:cSld>
+  <p:clrMapOvr>
+    <a:masterClrMapping/>
+  </p:clrMapOvr>
+</p:sld>
+</file>
+
+<file path=ppt/slides/slide13.xml><?xml version="1.0" encoding="utf-8"?>
+<p:sld xmlns:a="http://schemas.openxmlformats.org/drawingml/2006/main" xmlns:p="http://schemas.openxmlformats.org/presentationml/2006/main" xmlns:r="http://schemas.openxmlformats.org/officeDocument/2006/relationships" show="0">
+  <p:cSld>
+    <p:bg>
+      <p:bgPr>
+        <a:solidFill>
+          <a:srgbClr val="EEEBE4"/>
+        </a:solidFill>
+        <a:effectLst/>
+      </p:bgPr>
+    </p:bg>
+    <p:spTree>
+      <p:nvGrpSpPr>
+        <p:cNvPr id="1" name=""/>
+        <p:cNvGrpSpPr/>
+        <p:nvPr/>
+      </p:nvGrpSpPr>
+      <p:grpSpPr/>
+      <p:sp>
+        <p:nvSpPr>
+          <p:cNvPr id="2" name="Rectangle 1"/>
+          <p:cNvSpPr/>
+          <p:nvPr/>
+        </p:nvSpPr>
+        <p:spPr>
+          <a:xfrm>
+            <a:off x="0" y="0"/>
+            <a:ext cx="12191695" cy="384048"/>
+          </a:xfrm>
+          <a:prstGeom prst="rect">
+            <a:avLst/>
+          </a:prstGeom>
+          <a:solidFill>
+            <a:srgbClr val="0B2D5B"/>
+          </a:solidFill>
+          <a:ln>
+            <a:noFill/>
+          </a:ln>
+          <a:effectLst/>
+        </p:spPr>
+        <p:style>
+          <a:lnRef idx="1">
+            <a:schemeClr val="accent1"/>
+          </a:lnRef>
+          <a:fillRef idx="3">
+            <a:schemeClr val="accent1"/>
+          </a:fillRef>
+          <a:effectRef idx="2">
+            <a:schemeClr val="accent1"/>
+          </a:effectRef>
+          <a:fontRef idx="minor">
+            <a:schemeClr val="lt1"/>
+          </a:fontRef>
+        </p:style>
+        <p:txBody>
+          <a:bodyPr rtlCol="0" anchor="ctr"/>
+          <a:lstStyle/>
+          <a:p>
+            <a:pPr algn="ctr"/>
+          </a:p>
+        </p:txBody>
+      </p:sp>
+      <p:sp>
+        <p:nvSpPr>
+          <p:cNvPr id="3" name="TextBox 2"/>
+          <p:cNvSpPr txBox="1"/>
+          <p:nvPr/>
+        </p:nvSpPr>
+        <p:spPr>
+          <a:xfrm>
+            <a:off x="548640" y="100584"/>
+            <a:ext cx="10972800" cy="274320"/>
+          </a:xfrm>
+          <a:prstGeom prst="rect">
+            <a:avLst/>
+          </a:prstGeom>
+          <a:noFill/>
+        </p:spPr>
+        <p:txBody>
+          <a:bodyPr wrap="square" anchor="t" lIns="0" rIns="0" tIns="0" bIns="0">
+            <a:spAutoFit/>
+          </a:bodyPr>
+          <a:lstStyle/>
+          <a:p>
+            <a:pPr algn="l">
+              <a:spcAft>
+                <a:spcPts val="495"/>
+              </a:spcAft>
+            </a:pPr>
+            <a:r>
+              <a:rPr sz="1100" b="1" i="0">
+                <a:solidFill>
+                  <a:srgbClr val="FFFFFF"/>
+                </a:solidFill>
+                <a:latin typeface="Inter Tight"/>
+              </a:rPr>
+              <a:t>TEACHER PAGE  ·  skipped when you present  ·  Every student in the room</a:t>
+            </a:r>
+          </a:p>
+        </p:txBody>
+      </p:sp>
+      <p:sp>
+        <p:nvSpPr>
+          <p:cNvPr id="4" name="TextBox 3"/>
+          <p:cNvSpPr txBox="1"/>
+          <p:nvPr/>
+        </p:nvSpPr>
+        <p:spPr>
+          <a:xfrm>
+            <a:off x="548640" y="685800"/>
+            <a:ext cx="10972800" cy="640080"/>
+          </a:xfrm>
+          <a:prstGeom prst="rect">
+            <a:avLst/>
+          </a:prstGeom>
+          <a:noFill/>
+        </p:spPr>
+        <p:txBody>
+          <a:bodyPr wrap="square" anchor="t" lIns="0" rIns="0" tIns="0" bIns="0">
+            <a:spAutoFit/>
+          </a:bodyPr>
+          <a:lstStyle/>
+          <a:p>
+            <a:pPr algn="l">
+              <a:spcAft>
+                <a:spcPts val="1350"/>
+              </a:spcAft>
+            </a:pPr>
+            <a:r>
+              <a:rPr sz="3000" b="1" i="0">
+                <a:solidFill>
+                  <a:srgbClr val="1C1B19"/>
+                </a:solidFill>
+                <a:latin typeface="Source Serif 4"/>
+              </a:rPr>
+              <a:t>Every student in the room</a:t>
+            </a:r>
+          </a:p>
+        </p:txBody>
+      </p:sp>
+      <p:sp>
+        <p:nvSpPr>
+          <p:cNvPr id="5" name="TextBox 4"/>
+          <p:cNvSpPr txBox="1"/>
+          <p:nvPr/>
+        </p:nvSpPr>
+        <p:spPr>
+          <a:xfrm>
+            <a:off x="548640" y="1325880"/>
+            <a:ext cx="10972800" cy="365760"/>
+          </a:xfrm>
+          <a:prstGeom prst="rect">
+            <a:avLst/>
+          </a:prstGeom>
+          <a:noFill/>
+        </p:spPr>
+        <p:txBody>
+          <a:bodyPr wrap="square" anchor="t" lIns="0" rIns="0" tIns="0" bIns="0">
+            <a:spAutoFit/>
+          </a:bodyPr>
+          <a:lstStyle/>
+          <a:p>
+            <a:pPr algn="l">
+              <a:spcAft>
+                <a:spcPts val="630"/>
+              </a:spcAft>
+            </a:pPr>
+            <a:r>
+              <a:rPr sz="1400" b="0" i="0">
+                <a:solidFill>
+                  <a:srgbClr val="5D5A54"/>
+                </a:solidFill>
+                <a:latin typeface="Inter Tight"/>
+              </a:rPr>
+              <a:t>Culture, family, identity, ability and money: what to keep in mind for this topic.</a:t>
+            </a:r>
+          </a:p>
+        </p:txBody>
+      </p:sp>
+      <p:sp>
+        <p:nvSpPr>
+          <p:cNvPr id="6" name="TextBox 5"/>
+          <p:cNvSpPr txBox="1"/>
+          <p:nvPr/>
+        </p:nvSpPr>
+        <p:spPr>
+          <a:xfrm>
+            <a:off x="548640" y="1828800"/>
+            <a:ext cx="5394960" cy="4572000"/>
+          </a:xfrm>
+          <a:prstGeom prst="rect">
+            <a:avLst/>
+          </a:prstGeom>
+          <a:noFill/>
+        </p:spPr>
+        <p:txBody>
+          <a:bodyPr wrap="square" anchor="t" lIns="0" rIns="0" tIns="0" bIns="0">
+            <a:spAutoFit/>
+          </a:bodyPr>
+          <a:lstStyle/>
+          <a:p>
+            <a:pPr algn="l">
+              <a:spcAft>
+                <a:spcPts val="585"/>
+              </a:spcAft>
+            </a:pPr>
+            <a:r>
+              <a:rPr sz="1500" b="1" i="0">
+                <a:solidFill>
+                  <a:srgbClr val="1C1B19"/>
+                </a:solidFill>
+                <a:latin typeface="Source Serif 4"/>
+              </a:rPr>
+              <a:t>Repair looks different from family to family.</a:t>
+            </a:r>
+          </a:p>
+          <a:p>
+            <a:pPr algn="l">
+              <a:spcAft>
+                <a:spcPts val="585"/>
+              </a:spcAft>
+            </a:pPr>
+            <a:r>
+              <a:rPr sz="1300" b="0" i="0">
+                <a:solidFill>
+                  <a:srgbClr val="1C1B19"/>
+                </a:solidFill>
+                <a:latin typeface="Source Serif 4"/>
+              </a:rPr>
+              <a:t>Some families expect a direct "I was wrong." Others repair through action: showing up, doing a favor, cooking for someone, acting normal again. Some rarely say sorry out loud. Present each as real repair and ask about students' own families privately.</a:t>
+            </a:r>
+          </a:p>
+          <a:p>
+            <a:pPr algn="l">
+              <a:spcAft>
+                <a:spcPts val="585"/>
+              </a:spcAft>
+            </a:pPr>
+            <a:r>
+              <a:rPr sz="1300" b="0" i="0">
+                <a:solidFill>
+                  <a:srgbClr val="1C1B19"/>
+                </a:solidFill>
+                <a:latin typeface="Source Serif 4"/>
+              </a:rPr>
+              <a:t/>
+            </a:r>
+          </a:p>
+          <a:p>
+            <a:pPr algn="l">
+              <a:spcAft>
+                <a:spcPts val="585"/>
+              </a:spcAft>
+            </a:pPr>
+            <a:r>
+              <a:rPr sz="1500" b="1" i="0">
+                <a:solidFill>
+                  <a:srgbClr val="1C1B19"/>
+                </a:solidFill>
+                <a:latin typeface="Source Serif 4"/>
+              </a:rPr>
+              <a:t>The people you can't walk away from vary.</a:t>
+            </a:r>
+          </a:p>
+          <a:p>
+            <a:pPr algn="l">
+              <a:spcAft>
+                <a:spcPts val="585"/>
+              </a:spcAft>
+            </a:pPr>
+            <a:r>
+              <a:rPr sz="1300" b="0" i="0">
+                <a:solidFill>
+                  <a:srgbClr val="1C1B19"/>
+                </a:solidFill>
+                <a:latin typeface="Source Serif 4"/>
+              </a:rPr>
+              <a:t>For some students it's a sibling, a step-sibling, a cousin they share a room with, or a parent in one of two homes. In some families an older relative steps in to settle things. Use "someone you live with" so every household fits.</a:t>
+            </a:r>
+          </a:p>
+          <a:p>
+            <a:pPr algn="l">
+              <a:spcAft>
+                <a:spcPts val="585"/>
+              </a:spcAft>
+            </a:pPr>
+            <a:r>
+              <a:rPr sz="1300" b="0" i="0">
+                <a:solidFill>
+                  <a:srgbClr val="1C1B19"/>
+                </a:solidFill>
+                <a:latin typeface="Source Serif 4"/>
+              </a:rPr>
+              <a:t/>
+            </a:r>
+          </a:p>
+          <a:p>
+            <a:pPr algn="l">
+              <a:spcAft>
+                <a:spcPts val="585"/>
+              </a:spcAft>
+            </a:pPr>
+            <a:r>
+              <a:rPr sz="1500" b="1" i="0">
+                <a:solidFill>
+                  <a:srgbClr val="1C1B19"/>
+                </a:solidFill>
+                <a:latin typeface="Source Serif 4"/>
+              </a:rPr>
+              <a:t>Apologizing in a second language.</a:t>
+            </a:r>
+          </a:p>
+          <a:p>
+            <a:pPr algn="l">
+              <a:spcAft>
+                <a:spcPts val="585"/>
+              </a:spcAft>
+            </a:pPr>
+            <a:r>
+              <a:rPr sz="1300" b="0" i="0">
+                <a:solidFill>
+                  <a:srgbClr val="1C1B19"/>
+                </a:solidFill>
+                <a:latin typeface="Source Serif 4"/>
+              </a:rPr>
+              <a:t>Getting the words exactly right is harder in a language you're still learning, and text strips out tone. Students who are new to English can apologize in person, by action, or in writing they've had time to check. The Andre card (mocking an accent) names a hurt these students know.</a:t>
+            </a:r>
+          </a:p>
+          <a:p>
+            <a:pPr algn="l">
+              <a:spcAft>
+                <a:spcPts val="585"/>
+              </a:spcAft>
+            </a:pPr>
+            <a:r>
+              <a:rPr sz="1300" b="0" i="0">
+                <a:solidFill>
+                  <a:srgbClr val="1C1B19"/>
+                </a:solidFill>
+                <a:latin typeface="Source Serif 4"/>
+              </a:rPr>
+              <a:t/>
+            </a:r>
+          </a:p>
+        </p:txBody>
+      </p:sp>
+      <p:sp>
+        <p:nvSpPr>
+          <p:cNvPr id="7" name="TextBox 6"/>
+          <p:cNvSpPr txBox="1"/>
+          <p:nvPr/>
+        </p:nvSpPr>
+        <p:spPr>
+          <a:xfrm>
+            <a:off x="6217920" y="1828800"/>
+            <a:ext cx="5394960" cy="4572000"/>
+          </a:xfrm>
+          <a:prstGeom prst="rect">
+            <a:avLst/>
+          </a:prstGeom>
+          <a:noFill/>
+        </p:spPr>
+        <p:txBody>
+          <a:bodyPr wrap="square" anchor="t" lIns="0" rIns="0" tIns="0" bIns="0">
+            <a:spAutoFit/>
+          </a:bodyPr>
+          <a:lstStyle/>
+          <a:p>
+            <a:pPr algn="l">
+              <a:spcAft>
+                <a:spcPts val="585"/>
+              </a:spcAft>
+            </a:pPr>
+            <a:r>
+              <a:rPr sz="1500" b="1" i="0">
+                <a:solidFill>
+                  <a:srgbClr val="1C1B19"/>
+                </a:solidFill>
+                <a:latin typeface="Source Serif 4"/>
+              </a:rPr>
+              <a:t>Neurodivergent students may need a script and time.</a:t>
+            </a:r>
+          </a:p>
+          <a:p>
+            <a:pPr algn="l">
+              <a:spcAft>
+                <a:spcPts val="585"/>
+              </a:spcAft>
+            </a:pPr>
+            <a:r>
+              <a:rPr sz="1300" b="0" i="0">
+                <a:solidFill>
+                  <a:srgbClr val="1C1B19"/>
+                </a:solidFill>
+                <a:latin typeface="Source Serif 4"/>
+              </a:rPr>
+              <a:t>Cooling down can take longer, and reading tone over text is harder for some students. The repair sequence works as a script. Eye contact isn't required for an apology to count, and a written apology can be the right choice.</a:t>
+            </a:r>
+          </a:p>
+          <a:p>
+            <a:pPr algn="l">
+              <a:spcAft>
+                <a:spcPts val="585"/>
+              </a:spcAft>
+            </a:pPr>
+            <a:r>
+              <a:rPr sz="1300" b="0" i="0">
+                <a:solidFill>
+                  <a:srgbClr val="1C1B19"/>
+                </a:solidFill>
+                <a:latin typeface="Source Serif 4"/>
+              </a:rPr>
+              <a:t/>
+            </a:r>
+          </a:p>
+          <a:p>
+            <a:pPr algn="l">
+              <a:spcAft>
+                <a:spcPts val="585"/>
+              </a:spcAft>
+            </a:pPr>
+            <a:r>
+              <a:rPr sz="1500" b="1" i="0">
+                <a:solidFill>
+                  <a:srgbClr val="1C1B19"/>
+                </a:solidFill>
+                <a:latin typeface="Source Serif 4"/>
+              </a:rPr>
+              <a:t>Faith can be a resource here.</a:t>
+            </a:r>
+          </a:p>
+          <a:p>
+            <a:pPr algn="l">
+              <a:spcAft>
+                <a:spcPts val="585"/>
+              </a:spcAft>
+            </a:pPr>
+            <a:r>
+              <a:rPr sz="1300" b="0" i="0">
+                <a:solidFill>
+                  <a:srgbClr val="1C1B19"/>
+                </a:solidFill>
+                <a:latin typeface="Source Serif 4"/>
+              </a:rPr>
+              <a:t>Some students' traditions have practices of confession, forgiveness, or making amends; others have none. Let "how does your family or tradition make things right?" cover both without assuming either.</a:t>
+            </a:r>
+          </a:p>
+          <a:p>
+            <a:pPr algn="l">
+              <a:spcAft>
+                <a:spcPts val="585"/>
+              </a:spcAft>
+            </a:pPr>
+            <a:r>
+              <a:rPr sz="1300" b="0" i="0">
+                <a:solidFill>
+                  <a:srgbClr val="1C1B19"/>
+                </a:solidFill>
+                <a:latin typeface="Source Serif 4"/>
+              </a:rPr>
+              <a:t/>
+            </a:r>
+          </a:p>
+          <a:p>
+            <a:pPr algn="l">
+              <a:spcAft>
+                <a:spcPts val="585"/>
+              </a:spcAft>
+            </a:pPr>
+            <a:r>
+              <a:rPr sz="1500" b="1" i="0">
+                <a:solidFill>
+                  <a:srgbClr val="1C1B19"/>
+                </a:solidFill>
+                <a:latin typeface="Source Serif 4"/>
+              </a:rPr>
+              <a:t>Making it right shouldn't depend on money.</a:t>
+            </a:r>
+          </a:p>
+          <a:p>
+            <a:pPr algn="l">
+              <a:spcAft>
+                <a:spcPts val="585"/>
+              </a:spcAft>
+            </a:pPr>
+            <a:r>
+              <a:rPr sz="1300" b="0" i="0">
+                <a:solidFill>
+                  <a:srgbClr val="1C1B19"/>
+                </a:solidFill>
+                <a:latin typeface="Source Serif 4"/>
+              </a:rPr>
+              <a:t>"Paying for what broke" is one kind of repair offer. Deleting a post, telling the group it was your fault, fixing or replacing something with time or effort all count. Keep the examples free.</a:t>
+            </a:r>
+          </a:p>
+          <a:p>
+            <a:pPr algn="l">
+              <a:spcAft>
+                <a:spcPts val="585"/>
+              </a:spcAft>
+            </a:pPr>
+            <a:r>
+              <a:rPr sz="1300" b="0" i="0">
+                <a:solidFill>
+                  <a:srgbClr val="1C1B19"/>
+                </a:solidFill>
+                <a:latin typeface="Source Serif 4"/>
+              </a:rPr>
+              <a:t/>
+            </a:r>
+          </a:p>
+        </p:txBody>
+      </p:sp>
+    </p:spTree>
+  </p:cSld>
+  <p:clrMapOvr>
+    <a:masterClrMapping/>
+  </p:clrMapOvr>
+</p:sld>
+</file>
+
+<file path=ppt/slides/slide14.xml><?xml version="1.0" encoding="utf-8"?>
+<p:sld xmlns:a="http://schemas.openxmlformats.org/drawingml/2006/main" xmlns:p="http://schemas.openxmlformats.org/presentationml/2006/main" xmlns:r="http://schemas.openxmlformats.org/officeDocument/2006/relationships" show="0">
+  <p:cSld>
+    <p:bg>
+      <p:bgPr>
+        <a:solidFill>
+          <a:srgbClr val="EEEBE4"/>
+        </a:solidFill>
+        <a:effectLst/>
+      </p:bgPr>
+    </p:bg>
+    <p:spTree>
+      <p:nvGrpSpPr>
+        <p:cNvPr id="1" name=""/>
+        <p:cNvGrpSpPr/>
+        <p:nvPr/>
+      </p:nvGrpSpPr>
+      <p:grpSpPr/>
+      <p:sp>
+        <p:nvSpPr>
+          <p:cNvPr id="2" name="Rectangle 1"/>
+          <p:cNvSpPr/>
+          <p:nvPr/>
+        </p:nvSpPr>
+        <p:spPr>
+          <a:xfrm>
+            <a:off x="0" y="0"/>
+            <a:ext cx="12191695" cy="384048"/>
+          </a:xfrm>
+          <a:prstGeom prst="rect">
+            <a:avLst/>
+          </a:prstGeom>
+          <a:solidFill>
+            <a:srgbClr val="0B2D5B"/>
+          </a:solidFill>
+          <a:ln>
+            <a:noFill/>
+          </a:ln>
+          <a:effectLst/>
+        </p:spPr>
+        <p:style>
+          <a:lnRef idx="1">
+            <a:schemeClr val="accent1"/>
+          </a:lnRef>
+          <a:fillRef idx="3">
+            <a:schemeClr val="accent1"/>
+          </a:fillRef>
+          <a:effectRef idx="2">
+            <a:schemeClr val="accent1"/>
+          </a:effectRef>
+          <a:fontRef idx="minor">
+            <a:schemeClr val="lt1"/>
+          </a:fontRef>
+        </p:style>
+        <p:txBody>
+          <a:bodyPr rtlCol="0" anchor="ctr"/>
+          <a:lstStyle/>
+          <a:p>
+            <a:pPr algn="ctr"/>
+          </a:p>
+        </p:txBody>
+      </p:sp>
+      <p:sp>
+        <p:nvSpPr>
+          <p:cNvPr id="3" name="TextBox 2"/>
+          <p:cNvSpPr txBox="1"/>
+          <p:nvPr/>
+        </p:nvSpPr>
+        <p:spPr>
+          <a:xfrm>
+            <a:off x="548640" y="100584"/>
+            <a:ext cx="10972800" cy="274320"/>
+          </a:xfrm>
+          <a:prstGeom prst="rect">
+            <a:avLst/>
+          </a:prstGeom>
+          <a:noFill/>
+        </p:spPr>
+        <p:txBody>
+          <a:bodyPr wrap="square" anchor="t" lIns="0" rIns="0" tIns="0" bIns="0">
+            <a:spAutoFit/>
+          </a:bodyPr>
+          <a:lstStyle/>
+          <a:p>
+            <a:pPr algn="l">
+              <a:spcAft>
+                <a:spcPts val="495"/>
+              </a:spcAft>
+            </a:pPr>
+            <a:r>
+              <a:rPr sz="1100" b="1" i="0">
+                <a:solidFill>
+                  <a:srgbClr val="FFFFFF"/>
+                </a:solidFill>
+                <a:latin typeface="Inter Tight"/>
+              </a:rPr>
+              <a:t>TEACHER PAGE  ·  skipped when you present  ·  Background</a:t>
+            </a:r>
+          </a:p>
+        </p:txBody>
+      </p:sp>
+      <p:sp>
+        <p:nvSpPr>
+          <p:cNvPr id="4" name="TextBox 3"/>
+          <p:cNvSpPr txBox="1"/>
+          <p:nvPr/>
+        </p:nvSpPr>
+        <p:spPr>
+          <a:xfrm>
+            <a:off x="548640" y="685800"/>
+            <a:ext cx="10972800" cy="640080"/>
+          </a:xfrm>
+          <a:prstGeom prst="rect">
+            <a:avLst/>
+          </a:prstGeom>
+          <a:noFill/>
+        </p:spPr>
+        <p:txBody>
+          <a:bodyPr wrap="square" anchor="t" lIns="0" rIns="0" tIns="0" bIns="0">
+            <a:spAutoFit/>
+          </a:bodyPr>
+          <a:lstStyle/>
+          <a:p>
+            <a:pPr algn="l">
+              <a:spcAft>
+                <a:spcPts val="1350"/>
+              </a:spcAft>
+            </a:pPr>
+            <a:r>
+              <a:rPr sz="3000" b="1" i="0">
+                <a:solidFill>
+                  <a:srgbClr val="1C1B19"/>
+                </a:solidFill>
+                <a:latin typeface="Source Serif 4"/>
+              </a:rPr>
+              <a:t>What the research says</a:t>
+            </a:r>
+          </a:p>
+        </p:txBody>
+      </p:sp>
+      <p:sp>
+        <p:nvSpPr>
+          <p:cNvPr id="5" name="TextBox 4"/>
+          <p:cNvSpPr txBox="1"/>
+          <p:nvPr/>
+        </p:nvSpPr>
+        <p:spPr>
+          <a:xfrm>
+            <a:off x="548640" y="1463040"/>
+            <a:ext cx="5394960" cy="4937760"/>
+          </a:xfrm>
+          <a:prstGeom prst="rect">
+            <a:avLst/>
+          </a:prstGeom>
+          <a:noFill/>
+        </p:spPr>
+        <p:txBody>
+          <a:bodyPr wrap="square" anchor="t" lIns="0" rIns="0" tIns="0" bIns="0">
+            <a:spAutoFit/>
+          </a:bodyPr>
+          <a:lstStyle/>
+          <a:p>
+            <a:pPr algn="l">
+              <a:spcAft>
+                <a:spcPts val="585"/>
+              </a:spcAft>
+            </a:pPr>
+            <a:r>
+              <a:rPr sz="1300" b="0" i="0">
+                <a:solidFill>
+                  <a:srgbClr val="1C1B19"/>
+                </a:solidFill>
+                <a:latin typeface="Source Serif 4"/>
+              </a:rPr>
+              <a:t>755 people rated apologies built from six possible parts. Apologies with more parts worked better, but the parts weren't equal. The studies were with adults.</a:t>
+            </a:r>
+          </a:p>
+          <a:p>
+            <a:pPr algn="l">
+              <a:spcAft>
+                <a:spcPts val="585"/>
+              </a:spcAft>
+            </a:pPr>
+            <a:r>
+              <a:rPr sz="1050" b="0" i="0">
+                <a:solidFill>
+                  <a:srgbClr val="5D5A54"/>
+                </a:solidFill>
+                <a:latin typeface="Inter Tight"/>
+              </a:rPr>
+              <a:t>Lewicki, Polin and Lount, Negotiation and Conflict Management Research, 2016 (Ohio State)</a:t>
+            </a:r>
+          </a:p>
+          <a:p>
+            <a:pPr algn="l">
+              <a:spcAft>
+                <a:spcPts val="585"/>
+              </a:spcAft>
+            </a:pPr>
+            <a:r>
+              <a:rPr sz="1300" b="0" i="0">
+                <a:solidFill>
+                  <a:srgbClr val="1C1B19"/>
+                </a:solidFill>
+                <a:latin typeface="Source Serif 4"/>
+              </a:rPr>
+              <a:t>Taking responsibility mattered most, then an offer of repair. Regret, explanation, and a promise to change were in the middle. Asking for forgiveness mattered least.</a:t>
+            </a:r>
+          </a:p>
+          <a:p>
+            <a:pPr algn="l">
+              <a:spcAft>
+                <a:spcPts val="585"/>
+              </a:spcAft>
+            </a:pPr>
+            <a:r>
+              <a:rPr sz="1050" b="0" i="0">
+                <a:solidFill>
+                  <a:srgbClr val="5D5A54"/>
+                </a:solidFill>
+                <a:latin typeface="Inter Tight"/>
+              </a:rPr>
+              <a:t>Lewicki, Polin and Lount, 2016</a:t>
+            </a:r>
+          </a:p>
+          <a:p>
+            <a:pPr algn="l">
+              <a:spcAft>
+                <a:spcPts val="585"/>
+              </a:spcAft>
+            </a:pPr>
+            <a:r>
+              <a:rPr sz="1300" b="0" i="0">
+                <a:solidFill>
+                  <a:srgbClr val="1C1B19"/>
+                </a:solidFill>
+                <a:latin typeface="Source Serif 4"/>
+              </a:rPr>
+              <a:t>Across four studies, people who believe personality can change were more likely to take responsibility after hurting someone.</a:t>
+            </a:r>
+          </a:p>
+          <a:p>
+            <a:pPr algn="l">
+              <a:spcAft>
+                <a:spcPts val="585"/>
+              </a:spcAft>
+            </a:pPr>
+            <a:r>
+              <a:rPr sz="1050" b="0" i="0">
+                <a:solidFill>
+                  <a:srgbClr val="5D5A54"/>
+                </a:solidFill>
+                <a:latin typeface="Inter Tight"/>
+              </a:rPr>
+              <a:t>Schumann and Dweck, Personality and Social Psychology Bulletin, 2014</a:t>
+            </a:r>
+          </a:p>
+        </p:txBody>
+      </p:sp>
+      <p:sp>
+        <p:nvSpPr>
+          <p:cNvPr id="6" name="TextBox 5"/>
+          <p:cNvSpPr txBox="1"/>
+          <p:nvPr/>
+        </p:nvSpPr>
+        <p:spPr>
+          <a:xfrm>
+            <a:off x="6217920" y="1463040"/>
+            <a:ext cx="5394960" cy="4937760"/>
+          </a:xfrm>
+          <a:prstGeom prst="rect">
+            <a:avLst/>
+          </a:prstGeom>
+          <a:noFill/>
+        </p:spPr>
+        <p:txBody>
+          <a:bodyPr wrap="square" anchor="t" lIns="0" rIns="0" tIns="0" bIns="0">
+            <a:spAutoFit/>
+          </a:bodyPr>
+          <a:lstStyle/>
+          <a:p>
+            <a:pPr algn="l">
+              <a:spcAft>
+                <a:spcPts val="585"/>
+              </a:spcAft>
+            </a:pPr>
+            <a:r>
+              <a:rPr sz="1300" b="0" i="0">
+                <a:solidFill>
+                  <a:srgbClr val="1C1B19"/>
+                </a:solidFill>
+                <a:latin typeface="Source Serif 4"/>
+              </a:rPr>
+              <a:t>People who wrote a message refusing to apologize felt more powerful and had higher self-esteem afterward than people who didn't.</a:t>
+            </a:r>
+          </a:p>
+          <a:p>
+            <a:pPr algn="l">
+              <a:spcAft>
+                <a:spcPts val="585"/>
+              </a:spcAft>
+            </a:pPr>
+            <a:r>
+              <a:rPr sz="1050" b="0" i="0">
+                <a:solidFill>
+                  <a:srgbClr val="5D5A54"/>
+                </a:solidFill>
+                <a:latin typeface="Inter Tight"/>
+              </a:rPr>
+              <a:t>Okimoto, Wenzel and Hedrick, European Journal of Social Psychology, 2013</a:t>
+            </a:r>
+          </a:p>
+          <a:p>
+            <a:pPr algn="l">
+              <a:spcAft>
+                <a:spcPts val="585"/>
+              </a:spcAft>
+            </a:pPr>
+            <a:r>
+              <a:rPr sz="1300" b="0" i="0">
+                <a:solidFill>
+                  <a:srgbClr val="1C1B19"/>
+                </a:solidFill>
+                <a:latin typeface="Source Serif 4"/>
+              </a:rPr>
+              <a:t>People reasoned more wisely about a friend's relationship conflict than their own: considering other viewpoints, admitting what they didn't know, looking for compromise.</a:t>
+            </a:r>
+          </a:p>
+          <a:p>
+            <a:pPr algn="l">
+              <a:spcAft>
+                <a:spcPts val="585"/>
+              </a:spcAft>
+            </a:pPr>
+            <a:r>
+              <a:rPr sz="1050" b="0" i="0">
+                <a:solidFill>
+                  <a:srgbClr val="5D5A54"/>
+                </a:solidFill>
+                <a:latin typeface="Inter Tight"/>
+              </a:rPr>
+              <a:t>Grossmann and Kross, Psychological Science, 2014</a:t>
+            </a:r>
+          </a:p>
+          <a:p>
+            <a:pPr algn="l">
+              <a:spcAft>
+                <a:spcPts val="585"/>
+              </a:spcAft>
+            </a:pPr>
+            <a:r>
+              <a:rPr sz="1300" b="0" i="0">
+                <a:solidFill>
+                  <a:srgbClr val="1C1B19"/>
+                </a:solidFill>
+                <a:latin typeface="Source Serif 4"/>
+              </a:rPr>
+              <a:t>When people thought about their own conflict from a distance, for example in the third person, the gap disappeared, in younger and older adults alike.</a:t>
+            </a:r>
+          </a:p>
+          <a:p>
+            <a:pPr algn="l">
+              <a:spcAft>
+                <a:spcPts val="585"/>
+              </a:spcAft>
+            </a:pPr>
+            <a:r>
+              <a:rPr sz="1050" b="0" i="0">
+                <a:solidFill>
+                  <a:srgbClr val="5D5A54"/>
+                </a:solidFill>
+                <a:latin typeface="Inter Tight"/>
+              </a:rPr>
+              <a:t>Grossmann and Kross, Psychological Science, 2014</a:t>
+            </a:r>
+          </a:p>
+        </p:txBody>
+      </p:sp>
+    </p:spTree>
+  </p:cSld>
+  <p:clrMapOvr>
+    <a:masterClrMapping/>
+  </p:clrMapOvr>
+</p:sld>
+</file>
+
+<file path=ppt/slides/slide2.xml><?xml version="1.0" encoding="utf-8"?>
+<p:sld xmlns:a="http://schemas.openxmlformats.org/drawingml/2006/main" xmlns:p="http://schemas.openxmlformats.org/presentationml/2006/main" xmlns:r="http://schemas.openxmlformats.org/officeDocument/2006/relationships">
+  <p:cSld>
+    <p:bg>
+      <p:bgPr>
+        <a:solidFill>
+          <a:srgbClr val="0B2D5B"/>
+        </a:solidFill>
+        <a:effectLst/>
+      </p:bgPr>
+    </p:bg>
+    <p:spTree>
+      <p:nvGrpSpPr>
+        <p:cNvPr id="1" name=""/>
+        <p:cNvGrpSpPr/>
+        <p:nvPr/>
+      </p:nvGrpSpPr>
+      <p:grpSpPr/>
+      <p:sp>
+        <p:nvSpPr>
+          <p:cNvPr id="2" name="Rectangle 1"/>
+          <p:cNvSpPr/>
+          <p:nvPr/>
+        </p:nvSpPr>
+        <p:spPr>
+          <a:xfrm>
+            <a:off x="548640" y="502920"/>
+            <a:ext cx="457200" cy="54864"/>
+          </a:xfrm>
+          <a:prstGeom prst="rect">
+            <a:avLst/>
+          </a:prstGeom>
+          <a:solidFill>
+            <a:srgbClr val="F47B20"/>
+          </a:solidFill>
+          <a:ln>
+            <a:noFill/>
+          </a:ln>
+          <a:effectLst/>
+        </p:spPr>
+        <p:style>
+          <a:lnRef idx="1">
+            <a:schemeClr val="accent1"/>
+          </a:lnRef>
+          <a:fillRef idx="3">
+            <a:schemeClr val="accent1"/>
+          </a:fillRef>
+          <a:effectRef idx="2">
+            <a:schemeClr val="accent1"/>
+          </a:effectRef>
+          <a:fontRef idx="minor">
+            <a:schemeClr val="lt1"/>
+          </a:fontRef>
+        </p:style>
+        <p:txBody>
+          <a:bodyPr rtlCol="0" anchor="ctr"/>
+          <a:lstStyle/>
+          <a:p>
+            <a:pPr algn="ctr"/>
+          </a:p>
+        </p:txBody>
+      </p:sp>
+      <p:sp>
+        <p:nvSpPr>
+          <p:cNvPr id="3" name="TextBox 2"/>
+          <p:cNvSpPr txBox="1"/>
+          <p:nvPr/>
+        </p:nvSpPr>
+        <p:spPr>
+          <a:xfrm>
+            <a:off x="1143000" y="393192"/>
+            <a:ext cx="8229600" cy="274320"/>
+          </a:xfrm>
+          <a:prstGeom prst="rect">
+            <a:avLst/>
+          </a:prstGeom>
+          <a:noFill/>
+        </p:spPr>
+        <p:txBody>
+          <a:bodyPr wrap="square" anchor="t" lIns="0" rIns="0" tIns="0" bIns="0">
+            <a:spAutoFit/>
+          </a:bodyPr>
+          <a:lstStyle/>
+          <a:p>
+            <a:pPr algn="l">
+              <a:spcAft>
+                <a:spcPts val="540"/>
+              </a:spcAft>
+            </a:pPr>
+            <a:r>
+              <a:rPr sz="1200" b="1" i="0">
+                <a:solidFill>
+                  <a:srgbClr val="5D5A54"/>
+                </a:solidFill>
+                <a:latin typeface="Inter Tight"/>
+              </a:rPr>
+              <a:t>THE REPAIR KIT</a:t>
+            </a:r>
+          </a:p>
+        </p:txBody>
+      </p:sp>
+      <p:sp>
+        <p:nvSpPr>
+          <p:cNvPr id="4" name="TextBox 3"/>
+          <p:cNvSpPr txBox="1"/>
+          <p:nvPr/>
+        </p:nvSpPr>
+        <p:spPr>
+          <a:xfrm>
+            <a:off x="8229600" y="6400800"/>
+            <a:ext cx="3410712" cy="274320"/>
+          </a:xfrm>
+          <a:prstGeom prst="rect">
+            <a:avLst/>
+          </a:prstGeom>
+          <a:noFill/>
+        </p:spPr>
+        <p:txBody>
+          <a:bodyPr wrap="square" anchor="t" lIns="0" rIns="0" tIns="0" bIns="0">
+            <a:spAutoFit/>
+          </a:bodyPr>
+          <a:lstStyle/>
+          <a:p>
+            <a:pPr algn="r">
+              <a:spcAft>
+                <a:spcPts val="450"/>
+              </a:spcAft>
+            </a:pPr>
+            <a:r>
+              <a:rPr sz="1000" b="0" i="0">
+                <a:solidFill>
+                  <a:srgbClr val="5D5A54"/>
+                </a:solidFill>
+                <a:latin typeface="Inter Tight"/>
+              </a:rPr>
+              <a:t>Beaver Counseling</a:t>
+            </a:r>
+          </a:p>
+        </p:txBody>
+      </p:sp>
+      <p:sp>
+        <p:nvSpPr>
+          <p:cNvPr id="5" name="TextBox 4"/>
+          <p:cNvSpPr txBox="1"/>
+          <p:nvPr/>
+        </p:nvSpPr>
+        <p:spPr>
+          <a:xfrm>
+            <a:off x="822960" y="2011680"/>
+            <a:ext cx="10515600" cy="1463040"/>
+          </a:xfrm>
+          <a:prstGeom prst="rect">
+            <a:avLst/>
+          </a:prstGeom>
+          <a:noFill/>
+        </p:spPr>
+        <p:txBody>
+          <a:bodyPr wrap="square" anchor="b" lIns="0" rIns="0" tIns="0" bIns="0">
+            <a:spAutoFit/>
+          </a:bodyPr>
+          <a:lstStyle/>
+          <a:p>
+            <a:pPr algn="l">
+              <a:spcAft>
+                <a:spcPts val="2700"/>
+              </a:spcAft>
+            </a:pPr>
+            <a:r>
+              <a:rPr sz="6000" b="1" i="0">
+                <a:solidFill>
+                  <a:srgbClr val="FFFFFF"/>
+                </a:solidFill>
+                <a:latin typeface="Source Serif 4"/>
+              </a:rPr>
+              <a:t>The Repair Kit</a:t>
+            </a:r>
+          </a:p>
+        </p:txBody>
+      </p:sp>
+      <p:sp>
+        <p:nvSpPr>
+          <p:cNvPr id="6" name="TextBox 5"/>
+          <p:cNvSpPr txBox="1"/>
+          <p:nvPr/>
+        </p:nvSpPr>
+        <p:spPr>
+          <a:xfrm>
+            <a:off x="822960" y="3611880"/>
+            <a:ext cx="10515600" cy="914400"/>
+          </a:xfrm>
+          <a:prstGeom prst="rect">
+            <a:avLst/>
+          </a:prstGeom>
+          <a:noFill/>
+        </p:spPr>
+        <p:txBody>
+          <a:bodyPr wrap="square" anchor="t" lIns="0" rIns="0" tIns="0" bIns="0">
+            <a:spAutoFit/>
+          </a:bodyPr>
+          <a:lstStyle/>
+          <a:p>
+            <a:pPr algn="l">
+              <a:spcAft>
+                <a:spcPts val="1080"/>
+              </a:spcAft>
+            </a:pPr>
+            <a:r>
+              <a:rPr sz="2400" b="0" i="1">
+                <a:solidFill>
+                  <a:srgbClr val="E8E4DA"/>
+                </a:solidFill>
+                <a:latin typeface="Source Serif 4"/>
+              </a:rPr>
+              <a:t>Which parts of sorry actually matter.</a:t>
+            </a:r>
+          </a:p>
+        </p:txBody>
+      </p:sp>
+      <p:sp>
+        <p:nvSpPr>
+          <p:cNvPr id="7" name="TextBox 6"/>
+          <p:cNvSpPr txBox="1"/>
+          <p:nvPr/>
+        </p:nvSpPr>
+        <p:spPr>
+          <a:xfrm>
+            <a:off x="822960" y="6035040"/>
+            <a:ext cx="7315200" cy="365760"/>
+          </a:xfrm>
+          <a:prstGeom prst="rect">
+            <a:avLst/>
+          </a:prstGeom>
+          <a:noFill/>
+        </p:spPr>
+        <p:txBody>
+          <a:bodyPr wrap="square" anchor="t" lIns="0" rIns="0" tIns="0" bIns="0">
+            <a:spAutoFit/>
+          </a:bodyPr>
+          <a:lstStyle/>
+          <a:p>
+            <a:pPr algn="l">
+              <a:spcAft>
+                <a:spcPts val="585"/>
+              </a:spcAft>
+            </a:pPr>
+            <a:r>
+              <a:rPr sz="1300" b="0" i="0">
+                <a:solidFill>
+                  <a:srgbClr val="E8E4DA"/>
+                </a:solidFill>
+                <a:latin typeface="Inter Tight"/>
+              </a:rPr>
+              <a:t>Beaver Upper School · Counseling</a:t>
+            </a:r>
+          </a:p>
+        </p:txBody>
+      </p:sp>
+    </p:spTree>
+  </p:cSld>
+  <p:clrMapOvr>
+    <a:masterClrMapping/>
+  </p:clrMapOvr>
+</p:sld>
+</file>
+
+<file path=ppt/slides/slide3.xml><?xml version="1.0" encoding="utf-8"?>
 <p:sld xmlns:a="http://schemas.openxmlformats.org/drawingml/2006/main" xmlns:p="http://schemas.openxmlformats.org/presentationml/2006/main" xmlns:r="http://schemas.openxmlformats.org/officeDocument/2006/relationships">
   <p:cSld>
     <p:bg>
@@ -5502,7 +7258,7 @@
                 </a:solidFill>
                 <a:latin typeface="Inter Tight"/>
               </a:rPr>
-              <a:t>WHICH APOLOGY LANDS?</a:t>
+              <a:t>GUESS THE RANKING</a:t>
             </a:r>
           </a:p>
         </p:txBody>
@@ -5555,7 +7311,7 @@
         <p:spPr>
           <a:xfrm>
             <a:off x="822960" y="1005840"/>
-            <a:ext cx="10515600" cy="914400"/>
+            <a:ext cx="10515600" cy="1097280"/>
           </a:xfrm>
           <a:prstGeom prst="rect">
             <a:avLst/>
@@ -5570,77 +7326,31 @@
           <a:p>
             <a:pPr algn="l">
               <a:spcAft>
-                <a:spcPts val="1530"/>
-              </a:spcAft>
-            </a:pPr>
-            <a:r>
-              <a:rPr sz="3400" b="1" i="0">
+                <a:spcPts val="1620"/>
+              </a:spcAft>
+            </a:pPr>
+            <a:r>
+              <a:rPr sz="3600" b="1" i="0">
                 <a:solidFill>
                   <a:srgbClr val="1C1B19"/>
                 </a:solidFill>
                 <a:latin typeface="Source Serif 4"/>
               </a:rPr>
-              <a:t>What would you say or do?</a:t>
-            </a:r>
-          </a:p>
-        </p:txBody>
-      </p:sp>
-      <p:sp>
-        <p:nvSpPr>
-          <p:cNvPr id="6" name="Rectangle 5"/>
-          <p:cNvSpPr/>
-          <p:nvPr/>
-        </p:nvSpPr>
-        <p:spPr>
-          <a:xfrm>
-            <a:off x="822960" y="2103120"/>
-            <a:ext cx="3322320" cy="3840480"/>
-          </a:xfrm>
-          <a:prstGeom prst="rect">
-            <a:avLst/>
-          </a:prstGeom>
-          <a:solidFill>
-            <a:srgbClr val="FFFFFF"/>
-          </a:solidFill>
-          <a:ln w="15875">
-            <a:solidFill>
-              <a:srgbClr val="D8D2C6"/>
-            </a:solidFill>
-          </a:ln>
-          <a:effectLst/>
-        </p:spPr>
-        <p:style>
-          <a:lnRef idx="1">
-            <a:schemeClr val="accent1"/>
-          </a:lnRef>
-          <a:fillRef idx="3">
-            <a:schemeClr val="accent1"/>
-          </a:fillRef>
-          <a:effectRef idx="2">
-            <a:schemeClr val="accent1"/>
-          </a:effectRef>
-          <a:fontRef idx="minor">
-            <a:schemeClr val="lt1"/>
-          </a:fontRef>
-        </p:style>
-        <p:txBody>
-          <a:bodyPr rtlCol="0" anchor="ctr"/>
-          <a:lstStyle/>
-          <a:p>
-            <a:pPr algn="ctr"/>
-          </a:p>
-        </p:txBody>
-      </p:sp>
-      <p:sp>
-        <p:nvSpPr>
-          <p:cNvPr id="7" name="TextBox 6"/>
+              <a:t>Which part of an apology matters most?</a:t>
+            </a:r>
+          </a:p>
+        </p:txBody>
+      </p:sp>
+      <p:sp>
+        <p:nvSpPr>
+          <p:cNvPr id="6" name="TextBox 5"/>
           <p:cNvSpPr txBox="1"/>
           <p:nvPr/>
         </p:nvSpPr>
         <p:spPr>
           <a:xfrm>
-            <a:off x="1051560" y="2286000"/>
-            <a:ext cx="2865120" cy="365760"/>
+            <a:off x="822960" y="2057400"/>
+            <a:ext cx="548640" cy="670560"/>
           </a:xfrm>
           <a:prstGeom prst="rect">
             <a:avLst/>
@@ -5655,31 +7365,31 @@
           <a:p>
             <a:pPr algn="l">
               <a:spcAft>
-                <a:spcPts val="585"/>
-              </a:spcAft>
-            </a:pPr>
-            <a:r>
-              <a:rPr sz="1300" b="1" i="0">
-                <a:solidFill>
-                  <a:srgbClr val="0B2D5B"/>
-                </a:solidFill>
-                <a:latin typeface="Inter Tight"/>
-              </a:rPr>
-              <a:t>YOU AND MEI</a:t>
-            </a:r>
-          </a:p>
-        </p:txBody>
-      </p:sp>
-      <p:sp>
-        <p:nvSpPr>
-          <p:cNvPr id="8" name="TextBox 7"/>
+                <a:spcPts val="1170"/>
+              </a:spcAft>
+            </a:pPr>
+            <a:r>
+              <a:rPr sz="2600" b="1" i="0">
+                <a:solidFill>
+                  <a:srgbClr val="F47B20"/>
+                </a:solidFill>
+                <a:latin typeface="Source Serif 4"/>
+              </a:rPr>
+              <a:t>1</a:t>
+            </a:r>
+          </a:p>
+        </p:txBody>
+      </p:sp>
+      <p:sp>
+        <p:nvSpPr>
+          <p:cNvPr id="7" name="TextBox 6"/>
           <p:cNvSpPr txBox="1"/>
           <p:nvPr/>
         </p:nvSpPr>
         <p:spPr>
           <a:xfrm>
-            <a:off x="1051560" y="2743200"/>
-            <a:ext cx="2865120" cy="3017520"/>
+            <a:off x="1463040" y="2093976"/>
+            <a:ext cx="9875520" cy="670560"/>
           </a:xfrm>
           <a:prstGeom prst="rect">
             <a:avLst/>
@@ -5694,77 +7404,31 @@
           <a:p>
             <a:pPr algn="l">
               <a:spcAft>
-                <a:spcPts val="810"/>
-              </a:spcAft>
-            </a:pPr>
-            <a:r>
-              <a:rPr sz="1800" b="0" i="0">
+                <a:spcPts val="945"/>
+              </a:spcAft>
+            </a:pPr>
+            <a:r>
+              <a:rPr sz="2100" b="1" i="0">
                 <a:solidFill>
                   <a:srgbClr val="1C1B19"/>
                 </a:solidFill>
                 <a:latin typeface="Source Serif 4"/>
               </a:rPr>
-              <a:t>You posted Mei's private message in the class group chat as a joke. She's furious and hasn't answered since.</a:t>
-            </a:r>
-          </a:p>
-        </p:txBody>
-      </p:sp>
-      <p:sp>
-        <p:nvSpPr>
-          <p:cNvPr id="9" name="Rectangle 8"/>
-          <p:cNvSpPr/>
-          <p:nvPr/>
-        </p:nvSpPr>
-        <p:spPr>
-          <a:xfrm>
-            <a:off x="4419600" y="2103120"/>
-            <a:ext cx="3322320" cy="3840480"/>
-          </a:xfrm>
-          <a:prstGeom prst="rect">
-            <a:avLst/>
-          </a:prstGeom>
-          <a:solidFill>
-            <a:srgbClr val="FFFFFF"/>
-          </a:solidFill>
-          <a:ln w="15875">
-            <a:solidFill>
-              <a:srgbClr val="D8D2C6"/>
-            </a:solidFill>
-          </a:ln>
-          <a:effectLst/>
-        </p:spPr>
-        <p:style>
-          <a:lnRef idx="1">
-            <a:schemeClr val="accent1"/>
-          </a:lnRef>
-          <a:fillRef idx="3">
-            <a:schemeClr val="accent1"/>
-          </a:fillRef>
-          <a:effectRef idx="2">
-            <a:schemeClr val="accent1"/>
-          </a:effectRef>
-          <a:fontRef idx="minor">
-            <a:schemeClr val="lt1"/>
-          </a:fontRef>
-        </p:style>
-        <p:txBody>
-          <a:bodyPr rtlCol="0" anchor="ctr"/>
-          <a:lstStyle/>
-          <a:p>
-            <a:pPr algn="ctr"/>
-          </a:p>
-        </p:txBody>
-      </p:sp>
-      <p:sp>
-        <p:nvSpPr>
-          <p:cNvPr id="10" name="TextBox 9"/>
+              <a:t>"I'm sorry."</a:t>
+            </a:r>
+          </a:p>
+        </p:txBody>
+      </p:sp>
+      <p:sp>
+        <p:nvSpPr>
+          <p:cNvPr id="8" name="TextBox 7"/>
           <p:cNvSpPr txBox="1"/>
           <p:nvPr/>
         </p:nvSpPr>
         <p:spPr>
           <a:xfrm>
-            <a:off x="4648200" y="2286000"/>
-            <a:ext cx="2865120" cy="365760"/>
+            <a:off x="822960" y="2727960"/>
+            <a:ext cx="548640" cy="670560"/>
           </a:xfrm>
           <a:prstGeom prst="rect">
             <a:avLst/>
@@ -5779,31 +7443,31 @@
           <a:p>
             <a:pPr algn="l">
               <a:spcAft>
-                <a:spcPts val="585"/>
-              </a:spcAft>
-            </a:pPr>
-            <a:r>
-              <a:rPr sz="1300" b="1" i="0">
-                <a:solidFill>
-                  <a:srgbClr val="0B2D5B"/>
-                </a:solidFill>
-                <a:latin typeface="Inter Tight"/>
-              </a:rPr>
-              <a:t>ANDRE</a:t>
-            </a:r>
-          </a:p>
-        </p:txBody>
-      </p:sp>
-      <p:sp>
-        <p:nvSpPr>
-          <p:cNvPr id="11" name="TextBox 10"/>
+                <a:spcPts val="1170"/>
+              </a:spcAft>
+            </a:pPr>
+            <a:r>
+              <a:rPr sz="2600" b="1" i="0">
+                <a:solidFill>
+                  <a:srgbClr val="F47B20"/>
+                </a:solidFill>
+                <a:latin typeface="Source Serif 4"/>
+              </a:rPr>
+              <a:t>2</a:t>
+            </a:r>
+          </a:p>
+        </p:txBody>
+      </p:sp>
+      <p:sp>
+        <p:nvSpPr>
+          <p:cNvPr id="9" name="TextBox 8"/>
           <p:cNvSpPr txBox="1"/>
           <p:nvPr/>
         </p:nvSpPr>
         <p:spPr>
           <a:xfrm>
-            <a:off x="4648200" y="2743200"/>
-            <a:ext cx="2865120" cy="3017520"/>
+            <a:off x="1463040" y="2764536"/>
+            <a:ext cx="9875520" cy="670560"/>
           </a:xfrm>
           <a:prstGeom prst="rect">
             <a:avLst/>
@@ -5818,77 +7482,31 @@
           <a:p>
             <a:pPr algn="l">
               <a:spcAft>
-                <a:spcPts val="810"/>
-              </a:spcAft>
-            </a:pPr>
-            <a:r>
-              <a:rPr sz="1800" b="0" i="0">
+                <a:spcPts val="945"/>
+              </a:spcAft>
+            </a:pPr>
+            <a:r>
+              <a:rPr sz="2100" b="1" i="0">
                 <a:solidFill>
                   <a:srgbClr val="1C1B19"/>
                 </a:solidFill>
                 <a:latin typeface="Source Serif 4"/>
               </a:rPr>
-              <a:t>Mocked your accent in front of the team and said sorry. A week later he did it again, and said sorry again.</a:t>
-            </a:r>
-          </a:p>
-        </p:txBody>
-      </p:sp>
-      <p:sp>
-        <p:nvSpPr>
-          <p:cNvPr id="12" name="Rectangle 11"/>
-          <p:cNvSpPr/>
-          <p:nvPr/>
-        </p:nvSpPr>
-        <p:spPr>
-          <a:xfrm>
-            <a:off x="8016239" y="2103120"/>
-            <a:ext cx="3322320" cy="3840480"/>
-          </a:xfrm>
-          <a:prstGeom prst="rect">
-            <a:avLst/>
-          </a:prstGeom>
-          <a:solidFill>
-            <a:srgbClr val="FFFFFF"/>
-          </a:solidFill>
-          <a:ln w="15875">
-            <a:solidFill>
-              <a:srgbClr val="D8D2C6"/>
-            </a:solidFill>
-          </a:ln>
-          <a:effectLst/>
-        </p:spPr>
-        <p:style>
-          <a:lnRef idx="1">
-            <a:schemeClr val="accent1"/>
-          </a:lnRef>
-          <a:fillRef idx="3">
-            <a:schemeClr val="accent1"/>
-          </a:fillRef>
-          <a:effectRef idx="2">
-            <a:schemeClr val="accent1"/>
-          </a:effectRef>
-          <a:fontRef idx="minor">
-            <a:schemeClr val="lt1"/>
-          </a:fontRef>
-        </p:style>
-        <p:txBody>
-          <a:bodyPr rtlCol="0" anchor="ctr"/>
-          <a:lstStyle/>
-          <a:p>
-            <a:pPr algn="ctr"/>
-          </a:p>
-        </p:txBody>
-      </p:sp>
-      <p:sp>
-        <p:nvSpPr>
-          <p:cNvPr id="13" name="TextBox 12"/>
+              <a:t>"Here's why it happened."</a:t>
+            </a:r>
+          </a:p>
+        </p:txBody>
+      </p:sp>
+      <p:sp>
+        <p:nvSpPr>
+          <p:cNvPr id="10" name="TextBox 9"/>
           <p:cNvSpPr txBox="1"/>
           <p:nvPr/>
         </p:nvSpPr>
         <p:spPr>
           <a:xfrm>
-            <a:off x="8244839" y="2286000"/>
-            <a:ext cx="2865120" cy="365760"/>
+            <a:off x="822960" y="3398520"/>
+            <a:ext cx="548640" cy="670560"/>
           </a:xfrm>
           <a:prstGeom prst="rect">
             <a:avLst/>
@@ -5903,31 +7521,31 @@
           <a:p>
             <a:pPr algn="l">
               <a:spcAft>
-                <a:spcPts val="585"/>
-              </a:spcAft>
-            </a:pPr>
-            <a:r>
-              <a:rPr sz="1300" b="1" i="0">
-                <a:solidFill>
-                  <a:srgbClr val="0B2D5B"/>
-                </a:solidFill>
-                <a:latin typeface="Inter Tight"/>
-              </a:rPr>
-              <a:t>TESS AND JORDAN</a:t>
-            </a:r>
-          </a:p>
-        </p:txBody>
-      </p:sp>
-      <p:sp>
-        <p:nvSpPr>
-          <p:cNvPr id="14" name="TextBox 13"/>
+                <a:spcPts val="1170"/>
+              </a:spcAft>
+            </a:pPr>
+            <a:r>
+              <a:rPr sz="2600" b="1" i="0">
+                <a:solidFill>
+                  <a:srgbClr val="F47B20"/>
+                </a:solidFill>
+                <a:latin typeface="Source Serif 4"/>
+              </a:rPr>
+              <a:t>3</a:t>
+            </a:r>
+          </a:p>
+        </p:txBody>
+      </p:sp>
+      <p:sp>
+        <p:nvSpPr>
+          <p:cNvPr id="11" name="TextBox 10"/>
           <p:cNvSpPr txBox="1"/>
           <p:nvPr/>
         </p:nvSpPr>
         <p:spPr>
           <a:xfrm>
-            <a:off x="8244839" y="2743200"/>
-            <a:ext cx="2865120" cy="3017520"/>
+            <a:off x="1463040" y="3435096"/>
+            <a:ext cx="9875520" cy="670560"/>
           </a:xfrm>
           <a:prstGeom prst="rect">
             <a:avLst/>
@@ -5942,17 +7560,251 @@
           <a:p>
             <a:pPr algn="l">
               <a:spcAft>
-                <a:spcPts val="810"/>
-              </a:spcAft>
-            </a:pPr>
-            <a:r>
-              <a:rPr sz="1800" b="0" i="0">
+                <a:spcPts val="945"/>
+              </a:spcAft>
+            </a:pPr>
+            <a:r>
+              <a:rPr sz="2100" b="1" i="0">
                 <a:solidFill>
                   <a:srgbClr val="1C1B19"/>
                 </a:solidFill>
                 <a:latin typeface="Source Serif 4"/>
               </a:rPr>
-              <a:t>JV teammates who haven't really talked since a blowup at practice two weeks ago. A month of season left.</a:t>
+              <a:t>"I did this. It was wrong."</a:t>
+            </a:r>
+          </a:p>
+        </p:txBody>
+      </p:sp>
+      <p:sp>
+        <p:nvSpPr>
+          <p:cNvPr id="12" name="TextBox 11"/>
+          <p:cNvSpPr txBox="1"/>
+          <p:nvPr/>
+        </p:nvSpPr>
+        <p:spPr>
+          <a:xfrm>
+            <a:off x="822960" y="4069080"/>
+            <a:ext cx="548640" cy="670560"/>
+          </a:xfrm>
+          <a:prstGeom prst="rect">
+            <a:avLst/>
+          </a:prstGeom>
+          <a:noFill/>
+        </p:spPr>
+        <p:txBody>
+          <a:bodyPr wrap="square" anchor="t" lIns="0" rIns="0" tIns="0" bIns="0">
+            <a:spAutoFit/>
+          </a:bodyPr>
+          <a:lstStyle/>
+          <a:p>
+            <a:pPr algn="l">
+              <a:spcAft>
+                <a:spcPts val="1170"/>
+              </a:spcAft>
+            </a:pPr>
+            <a:r>
+              <a:rPr sz="2600" b="1" i="0">
+                <a:solidFill>
+                  <a:srgbClr val="F47B20"/>
+                </a:solidFill>
+                <a:latin typeface="Source Serif 4"/>
+              </a:rPr>
+              <a:t>4</a:t>
+            </a:r>
+          </a:p>
+        </p:txBody>
+      </p:sp>
+      <p:sp>
+        <p:nvSpPr>
+          <p:cNvPr id="13" name="TextBox 12"/>
+          <p:cNvSpPr txBox="1"/>
+          <p:nvPr/>
+        </p:nvSpPr>
+        <p:spPr>
+          <a:xfrm>
+            <a:off x="1463040" y="4105656"/>
+            <a:ext cx="9875520" cy="670560"/>
+          </a:xfrm>
+          <a:prstGeom prst="rect">
+            <a:avLst/>
+          </a:prstGeom>
+          <a:noFill/>
+        </p:spPr>
+        <p:txBody>
+          <a:bodyPr wrap="square" anchor="t" lIns="0" rIns="0" tIns="0" bIns="0">
+            <a:spAutoFit/>
+          </a:bodyPr>
+          <a:lstStyle/>
+          <a:p>
+            <a:pPr algn="l">
+              <a:spcAft>
+                <a:spcPts val="945"/>
+              </a:spcAft>
+            </a:pPr>
+            <a:r>
+              <a:rPr sz="2100" b="1" i="0">
+                <a:solidFill>
+                  <a:srgbClr val="1C1B19"/>
+                </a:solidFill>
+                <a:latin typeface="Source Serif 4"/>
+              </a:rPr>
+              <a:t>"I won't do it again."</a:t>
+            </a:r>
+          </a:p>
+        </p:txBody>
+      </p:sp>
+      <p:sp>
+        <p:nvSpPr>
+          <p:cNvPr id="14" name="TextBox 13"/>
+          <p:cNvSpPr txBox="1"/>
+          <p:nvPr/>
+        </p:nvSpPr>
+        <p:spPr>
+          <a:xfrm>
+            <a:off x="822960" y="4739640"/>
+            <a:ext cx="548640" cy="670560"/>
+          </a:xfrm>
+          <a:prstGeom prst="rect">
+            <a:avLst/>
+          </a:prstGeom>
+          <a:noFill/>
+        </p:spPr>
+        <p:txBody>
+          <a:bodyPr wrap="square" anchor="t" lIns="0" rIns="0" tIns="0" bIns="0">
+            <a:spAutoFit/>
+          </a:bodyPr>
+          <a:lstStyle/>
+          <a:p>
+            <a:pPr algn="l">
+              <a:spcAft>
+                <a:spcPts val="1170"/>
+              </a:spcAft>
+            </a:pPr>
+            <a:r>
+              <a:rPr sz="2600" b="1" i="0">
+                <a:solidFill>
+                  <a:srgbClr val="F47B20"/>
+                </a:solidFill>
+                <a:latin typeface="Source Serif 4"/>
+              </a:rPr>
+              <a:t>5</a:t>
+            </a:r>
+          </a:p>
+        </p:txBody>
+      </p:sp>
+      <p:sp>
+        <p:nvSpPr>
+          <p:cNvPr id="15" name="TextBox 14"/>
+          <p:cNvSpPr txBox="1"/>
+          <p:nvPr/>
+        </p:nvSpPr>
+        <p:spPr>
+          <a:xfrm>
+            <a:off x="1463040" y="4776216"/>
+            <a:ext cx="9875520" cy="670560"/>
+          </a:xfrm>
+          <a:prstGeom prst="rect">
+            <a:avLst/>
+          </a:prstGeom>
+          <a:noFill/>
+        </p:spPr>
+        <p:txBody>
+          <a:bodyPr wrap="square" anchor="t" lIns="0" rIns="0" tIns="0" bIns="0">
+            <a:spAutoFit/>
+          </a:bodyPr>
+          <a:lstStyle/>
+          <a:p>
+            <a:pPr algn="l">
+              <a:spcAft>
+                <a:spcPts val="945"/>
+              </a:spcAft>
+            </a:pPr>
+            <a:r>
+              <a:rPr sz="2100" b="1" i="0">
+                <a:solidFill>
+                  <a:srgbClr val="1C1B19"/>
+                </a:solidFill>
+                <a:latin typeface="Source Serif 4"/>
+              </a:rPr>
+              <a:t>"Here's how I'll fix it."</a:t>
+            </a:r>
+          </a:p>
+        </p:txBody>
+      </p:sp>
+      <p:sp>
+        <p:nvSpPr>
+          <p:cNvPr id="16" name="TextBox 15"/>
+          <p:cNvSpPr txBox="1"/>
+          <p:nvPr/>
+        </p:nvSpPr>
+        <p:spPr>
+          <a:xfrm>
+            <a:off x="822960" y="5410200"/>
+            <a:ext cx="548640" cy="670560"/>
+          </a:xfrm>
+          <a:prstGeom prst="rect">
+            <a:avLst/>
+          </a:prstGeom>
+          <a:noFill/>
+        </p:spPr>
+        <p:txBody>
+          <a:bodyPr wrap="square" anchor="t" lIns="0" rIns="0" tIns="0" bIns="0">
+            <a:spAutoFit/>
+          </a:bodyPr>
+          <a:lstStyle/>
+          <a:p>
+            <a:pPr algn="l">
+              <a:spcAft>
+                <a:spcPts val="1170"/>
+              </a:spcAft>
+            </a:pPr>
+            <a:r>
+              <a:rPr sz="2600" b="1" i="0">
+                <a:solidFill>
+                  <a:srgbClr val="F47B20"/>
+                </a:solidFill>
+                <a:latin typeface="Source Serif 4"/>
+              </a:rPr>
+              <a:t>6</a:t>
+            </a:r>
+          </a:p>
+        </p:txBody>
+      </p:sp>
+      <p:sp>
+        <p:nvSpPr>
+          <p:cNvPr id="17" name="TextBox 16"/>
+          <p:cNvSpPr txBox="1"/>
+          <p:nvPr/>
+        </p:nvSpPr>
+        <p:spPr>
+          <a:xfrm>
+            <a:off x="1463040" y="5446776"/>
+            <a:ext cx="9875520" cy="670560"/>
+          </a:xfrm>
+          <a:prstGeom prst="rect">
+            <a:avLst/>
+          </a:prstGeom>
+          <a:noFill/>
+        </p:spPr>
+        <p:txBody>
+          <a:bodyPr wrap="square" anchor="t" lIns="0" rIns="0" tIns="0" bIns="0">
+            <a:spAutoFit/>
+          </a:bodyPr>
+          <a:lstStyle/>
+          <a:p>
+            <a:pPr algn="l">
+              <a:spcAft>
+                <a:spcPts val="945"/>
+              </a:spcAft>
+            </a:pPr>
+            <a:r>
+              <a:rPr sz="2100" b="1" i="0">
+                <a:solidFill>
+                  <a:srgbClr val="1C1B19"/>
+                </a:solidFill>
+                <a:latin typeface="Source Serif 4"/>
+              </a:rPr>
+              <a:t>"Will you forgive me?"</a:t>
             </a:r>
           </a:p>
         </p:txBody>
@@ -5965,7 +7817,7 @@
 </p:sld>
 </file>
 
-<file path=ppt/slides/slide12.xml><?xml version="1.0" encoding="utf-8"?>
+<file path=ppt/slides/slide4.xml><?xml version="1.0" encoding="utf-8"?>
 <p:sld xmlns:a="http://schemas.openxmlformats.org/drawingml/2006/main" xmlns:p="http://schemas.openxmlformats.org/presentationml/2006/main" xmlns:r="http://schemas.openxmlformats.org/officeDocument/2006/relationships">
   <p:cSld>
     <p:bg>
@@ -6061,7 +7913,7 @@
                 </a:solidFill>
                 <a:latin typeface="Inter Tight"/>
               </a:rPr>
-              <a:t>IF YOU GOT HURT</a:t>
+              <a:t>WHAT MAKES AN APOLOGY WORK</a:t>
             </a:r>
           </a:p>
         </p:txBody>
@@ -6114,7 +7966,7 @@
         <p:spPr>
           <a:xfrm>
             <a:off x="822960" y="1005840"/>
-            <a:ext cx="10515600" cy="914400"/>
+            <a:ext cx="10515600" cy="1097280"/>
           </a:xfrm>
           <a:prstGeom prst="rect">
             <a:avLst/>
@@ -6129,77 +7981,31 @@
           <a:p>
             <a:pPr algn="l">
               <a:spcAft>
-                <a:spcPts val="1530"/>
-              </a:spcAft>
-            </a:pPr>
-            <a:r>
-              <a:rPr sz="3400" b="1" i="0">
+                <a:spcPts val="1620"/>
+              </a:spcAft>
+            </a:pPr>
+            <a:r>
+              <a:rPr sz="3600" b="1" i="0">
                 <a:solidFill>
                   <a:srgbClr val="1C1B19"/>
                 </a:solidFill>
                 <a:latin typeface="Source Serif 4"/>
               </a:rPr>
-              <a:t>Your side of repair counts too.</a:t>
-            </a:r>
-          </a:p>
-        </p:txBody>
-      </p:sp>
-      <p:sp>
-        <p:nvSpPr>
-          <p:cNvPr id="6" name="Rectangle 5"/>
-          <p:cNvSpPr/>
-          <p:nvPr/>
-        </p:nvSpPr>
-        <p:spPr>
-          <a:xfrm>
-            <a:off x="822960" y="2103120"/>
-            <a:ext cx="5120640" cy="3931920"/>
-          </a:xfrm>
-          <a:prstGeom prst="rect">
-            <a:avLst/>
-          </a:prstGeom>
-          <a:solidFill>
-            <a:srgbClr val="FFFFFF"/>
-          </a:solidFill>
-          <a:ln w="15875">
-            <a:solidFill>
-              <a:srgbClr val="D8D2C6"/>
-            </a:solidFill>
-          </a:ln>
-          <a:effectLst/>
-        </p:spPr>
-        <p:style>
-          <a:lnRef idx="1">
-            <a:schemeClr val="accent1"/>
-          </a:lnRef>
-          <a:fillRef idx="3">
-            <a:schemeClr val="accent1"/>
-          </a:fillRef>
-          <a:effectRef idx="2">
-            <a:schemeClr val="accent1"/>
-          </a:effectRef>
-          <a:fontRef idx="minor">
-            <a:schemeClr val="lt1"/>
-          </a:fontRef>
-        </p:style>
-        <p:txBody>
-          <a:bodyPr rtlCol="0" anchor="ctr"/>
-          <a:lstStyle/>
-          <a:p>
-            <a:pPr algn="ctr"/>
-          </a:p>
-        </p:txBody>
-      </p:sp>
-      <p:sp>
-        <p:nvSpPr>
-          <p:cNvPr id="7" name="TextBox 6"/>
+              <a:t>What 755 people said</a:t>
+            </a:r>
+          </a:p>
+        </p:txBody>
+      </p:sp>
+      <p:sp>
+        <p:nvSpPr>
+          <p:cNvPr id="6" name="TextBox 5"/>
           <p:cNvSpPr txBox="1"/>
           <p:nvPr/>
         </p:nvSpPr>
         <p:spPr>
           <a:xfrm>
-            <a:off x="1097280" y="2286000"/>
-            <a:ext cx="4572000" cy="457200"/>
+            <a:off x="822960" y="2194560"/>
+            <a:ext cx="548640" cy="1005840"/>
           </a:xfrm>
           <a:prstGeom prst="rect">
             <a:avLst/>
@@ -6214,31 +8020,31 @@
           <a:p>
             <a:pPr algn="l">
               <a:spcAft>
-                <a:spcPts val="585"/>
-              </a:spcAft>
-            </a:pPr>
-            <a:r>
-              <a:rPr sz="1300" b="1" i="0">
-                <a:solidFill>
-                  <a:srgbClr val="0B2D5B"/>
-                </a:solidFill>
-                <a:latin typeface="Inter Tight"/>
-              </a:rPr>
-              <a:t>WHAT HELPS</a:t>
-            </a:r>
-          </a:p>
-        </p:txBody>
-      </p:sp>
-      <p:sp>
-        <p:nvSpPr>
-          <p:cNvPr id="8" name="TextBox 7"/>
+                <a:spcPts val="1170"/>
+              </a:spcAft>
+            </a:pPr>
+            <a:r>
+              <a:rPr sz="2600" b="1" i="0">
+                <a:solidFill>
+                  <a:srgbClr val="F47B20"/>
+                </a:solidFill>
+                <a:latin typeface="Source Serif 4"/>
+              </a:rPr>
+              <a:t>1</a:t>
+            </a:r>
+          </a:p>
+        </p:txBody>
+      </p:sp>
+      <p:sp>
+        <p:nvSpPr>
+          <p:cNvPr id="7" name="TextBox 6"/>
           <p:cNvSpPr txBox="1"/>
           <p:nvPr/>
         </p:nvSpPr>
         <p:spPr>
           <a:xfrm>
-            <a:off x="1097280" y="2788920"/>
-            <a:ext cx="4572000" cy="3108960"/>
+            <a:off x="1463040" y="2231136"/>
+            <a:ext cx="9875520" cy="1005840"/>
           </a:xfrm>
           <a:prstGeom prst="rect">
             <a:avLst/>
@@ -6253,125 +8059,47 @@
           <a:p>
             <a:pPr algn="l">
               <a:spcAft>
-                <a:spcPts val="855"/>
-              </a:spcAft>
-            </a:pPr>
-            <a:r>
-              <a:rPr sz="1900" b="0" i="0">
+                <a:spcPts val="945"/>
+              </a:spcAft>
+            </a:pPr>
+            <a:r>
+              <a:rPr sz="2100" b="1" i="0">
                 <a:solidFill>
                   <a:srgbClr val="1C1B19"/>
                 </a:solidFill>
                 <a:latin typeface="Source Serif 4"/>
               </a:rPr>
-              <a:t>Say it once: "When you ___, I felt ___."</a:t>
-            </a:r>
-          </a:p>
-          <a:p>
-            <a:pPr algn="l">
-              <a:spcAft>
-                <a:spcPts val="855"/>
-              </a:spcAft>
-            </a:pPr>
-            <a:r>
-              <a:rPr sz="1900" b="0" i="0">
-                <a:solidFill>
-                  <a:srgbClr val="1C1B19"/>
-                </a:solidFill>
-                <a:latin typeface="Source Serif 4"/>
-              </a:rPr>
-              <a:t>One thing, not a list</a:t>
-            </a:r>
-          </a:p>
-          <a:p>
-            <a:pPr algn="l">
-              <a:spcAft>
-                <a:spcPts val="855"/>
-              </a:spcAft>
-            </a:pPr>
-            <a:r>
-              <a:rPr sz="1900" b="0" i="0">
-                <a:solidFill>
-                  <a:srgbClr val="1C1B19"/>
-                </a:solidFill>
-                <a:latin typeface="Source Serif 4"/>
-              </a:rPr>
-              <a:t>Let them answer</a:t>
-            </a:r>
-          </a:p>
-          <a:p>
-            <a:pPr algn="l">
-              <a:spcAft>
-                <a:spcPts val="855"/>
-              </a:spcAft>
-            </a:pPr>
-            <a:r>
-              <a:rPr sz="1900" b="0" i="0">
-                <a:solidFill>
-                  <a:srgbClr val="1C1B19"/>
-                </a:solidFill>
-                <a:latin typeface="Source Serif 4"/>
-              </a:rPr>
-              <a:t>Take time to trust again</a:t>
-            </a:r>
-          </a:p>
-        </p:txBody>
-      </p:sp>
-      <p:sp>
-        <p:nvSpPr>
-          <p:cNvPr id="9" name="Rectangle 8"/>
-          <p:cNvSpPr/>
-          <p:nvPr/>
-        </p:nvSpPr>
-        <p:spPr>
-          <a:xfrm>
-            <a:off x="6309360" y="2103120"/>
-            <a:ext cx="5120640" cy="3931920"/>
-          </a:xfrm>
-          <a:prstGeom prst="rect">
-            <a:avLst/>
-          </a:prstGeom>
-          <a:solidFill>
-            <a:srgbClr val="FFFFFF"/>
-          </a:solidFill>
-          <a:ln w="15875">
-            <a:solidFill>
-              <a:srgbClr val="D8D2C6"/>
-            </a:solidFill>
-          </a:ln>
-          <a:effectLst/>
-        </p:spPr>
-        <p:style>
-          <a:lnRef idx="1">
-            <a:schemeClr val="accent1"/>
-          </a:lnRef>
-          <a:fillRef idx="3">
-            <a:schemeClr val="accent1"/>
-          </a:fillRef>
-          <a:effectRef idx="2">
-            <a:schemeClr val="accent1"/>
-          </a:effectRef>
-          <a:fontRef idx="minor">
-            <a:schemeClr val="lt1"/>
-          </a:fontRef>
-        </p:style>
-        <p:txBody>
-          <a:bodyPr rtlCol="0" anchor="ctr"/>
-          <a:lstStyle/>
-          <a:p>
-            <a:pPr algn="ctr"/>
-          </a:p>
-        </p:txBody>
-      </p:sp>
-      <p:sp>
-        <p:nvSpPr>
-          <p:cNvPr id="10" name="TextBox 9"/>
+              <a:t>Taking responsibility.</a:t>
+            </a:r>
+          </a:p>
+          <a:p>
+            <a:pPr algn="l">
+              <a:spcAft>
+                <a:spcPts val="945"/>
+              </a:spcAft>
+            </a:pPr>
+            <a:r>
+              <a:rPr sz="1600" b="0" i="0">
+                <a:solidFill>
+                  <a:srgbClr val="5D5A54"/>
+                </a:solidFill>
+                <a:latin typeface="Source Serif 4"/>
+              </a:rPr>
+              <a:t>Specific, with no "if" and no "but." Mattered most.</a:t>
+            </a:r>
+          </a:p>
+        </p:txBody>
+      </p:sp>
+      <p:sp>
+        <p:nvSpPr>
+          <p:cNvPr id="8" name="TextBox 7"/>
           <p:cNvSpPr txBox="1"/>
           <p:nvPr/>
         </p:nvSpPr>
         <p:spPr>
           <a:xfrm>
-            <a:off x="6583680" y="2286000"/>
-            <a:ext cx="4572000" cy="457200"/>
+            <a:off x="822960" y="3200400"/>
+            <a:ext cx="548640" cy="1005840"/>
           </a:xfrm>
           <a:prstGeom prst="rect">
             <a:avLst/>
@@ -6386,31 +8114,31 @@
           <a:p>
             <a:pPr algn="l">
               <a:spcAft>
-                <a:spcPts val="585"/>
-              </a:spcAft>
-            </a:pPr>
-            <a:r>
-              <a:rPr sz="1300" b="1" i="0">
-                <a:solidFill>
-                  <a:srgbClr val="0B2D5B"/>
-                </a:solidFill>
-                <a:latin typeface="Inter Tight"/>
-              </a:rPr>
-              <a:t>WHAT MAKES IT BIGGER</a:t>
-            </a:r>
-          </a:p>
-        </p:txBody>
-      </p:sp>
-      <p:sp>
-        <p:nvSpPr>
-          <p:cNvPr id="11" name="TextBox 10"/>
+                <a:spcPts val="1170"/>
+              </a:spcAft>
+            </a:pPr>
+            <a:r>
+              <a:rPr sz="2600" b="1" i="0">
+                <a:solidFill>
+                  <a:srgbClr val="F47B20"/>
+                </a:solidFill>
+                <a:latin typeface="Source Serif 4"/>
+              </a:rPr>
+              <a:t>2</a:t>
+            </a:r>
+          </a:p>
+        </p:txBody>
+      </p:sp>
+      <p:sp>
+        <p:nvSpPr>
+          <p:cNvPr id="9" name="TextBox 8"/>
           <p:cNvSpPr txBox="1"/>
           <p:nvPr/>
         </p:nvSpPr>
         <p:spPr>
           <a:xfrm>
-            <a:off x="6583680" y="2788920"/>
-            <a:ext cx="4572000" cy="3108960"/>
+            <a:off x="1463040" y="3236976"/>
+            <a:ext cx="9875520" cy="1005840"/>
           </a:xfrm>
           <a:prstGeom prst="rect">
             <a:avLst/>
@@ -6425,65 +8153,221 @@
           <a:p>
             <a:pPr algn="l">
               <a:spcAft>
-                <a:spcPts val="855"/>
-              </a:spcAft>
-            </a:pPr>
-            <a:r>
-              <a:rPr sz="1900" b="0" i="0">
+                <a:spcPts val="945"/>
+              </a:spcAft>
+            </a:pPr>
+            <a:r>
+              <a:rPr sz="2100" b="1" i="0">
                 <a:solidFill>
                   <a:srgbClr val="1C1B19"/>
                 </a:solidFill>
                 <a:latin typeface="Source Serif 4"/>
               </a:rPr>
-              <a:t>Fighting over text</a:t>
-            </a:r>
-          </a:p>
-          <a:p>
-            <a:pPr algn="l">
-              <a:spcAft>
-                <a:spcPts val="855"/>
-              </a:spcAft>
-            </a:pPr>
-            <a:r>
-              <a:rPr sz="1900" b="0" i="0">
+              <a:t>An offer to fix it.</a:t>
+            </a:r>
+          </a:p>
+          <a:p>
+            <a:pPr algn="l">
+              <a:spcAft>
+                <a:spcPts val="945"/>
+              </a:spcAft>
+            </a:pPr>
+            <a:r>
+              <a:rPr sz="1600" b="0" i="0">
+                <a:solidFill>
+                  <a:srgbClr val="5D5A54"/>
+                </a:solidFill>
+                <a:latin typeface="Source Serif 4"/>
+              </a:rPr>
+              <a:t>Delete it, tell the group, make it right.</a:t>
+            </a:r>
+          </a:p>
+        </p:txBody>
+      </p:sp>
+      <p:sp>
+        <p:nvSpPr>
+          <p:cNvPr id="10" name="TextBox 9"/>
+          <p:cNvSpPr txBox="1"/>
+          <p:nvPr/>
+        </p:nvSpPr>
+        <p:spPr>
+          <a:xfrm>
+            <a:off x="822960" y="4206240"/>
+            <a:ext cx="548640" cy="1005840"/>
+          </a:xfrm>
+          <a:prstGeom prst="rect">
+            <a:avLst/>
+          </a:prstGeom>
+          <a:noFill/>
+        </p:spPr>
+        <p:txBody>
+          <a:bodyPr wrap="square" anchor="t" lIns="0" rIns="0" tIns="0" bIns="0">
+            <a:spAutoFit/>
+          </a:bodyPr>
+          <a:lstStyle/>
+          <a:p>
+            <a:pPr algn="l">
+              <a:spcAft>
+                <a:spcPts val="1170"/>
+              </a:spcAft>
+            </a:pPr>
+            <a:r>
+              <a:rPr sz="2600" b="1" i="0">
+                <a:solidFill>
+                  <a:srgbClr val="F47B20"/>
+                </a:solidFill>
+                <a:latin typeface="Source Serif 4"/>
+              </a:rPr>
+              <a:t>3</a:t>
+            </a:r>
+          </a:p>
+        </p:txBody>
+      </p:sp>
+      <p:sp>
+        <p:nvSpPr>
+          <p:cNvPr id="11" name="TextBox 10"/>
+          <p:cNvSpPr txBox="1"/>
+          <p:nvPr/>
+        </p:nvSpPr>
+        <p:spPr>
+          <a:xfrm>
+            <a:off x="1463040" y="4242816"/>
+            <a:ext cx="9875520" cy="1005840"/>
+          </a:xfrm>
+          <a:prstGeom prst="rect">
+            <a:avLst/>
+          </a:prstGeom>
+          <a:noFill/>
+        </p:spPr>
+        <p:txBody>
+          <a:bodyPr wrap="square" anchor="t" lIns="0" rIns="0" tIns="0" bIns="0">
+            <a:spAutoFit/>
+          </a:bodyPr>
+          <a:lstStyle/>
+          <a:p>
+            <a:pPr algn="l">
+              <a:spcAft>
+                <a:spcPts val="945"/>
+              </a:spcAft>
+            </a:pPr>
+            <a:r>
+              <a:rPr sz="2100" b="1" i="0">
                 <a:solidFill>
                   <a:srgbClr val="1C1B19"/>
                 </a:solidFill>
                 <a:latin typeface="Source Serif 4"/>
               </a:rPr>
-              <a:t>Recruiting a team</a:t>
-            </a:r>
-          </a:p>
-          <a:p>
-            <a:pPr algn="l">
-              <a:spcAft>
-                <a:spcPts val="855"/>
-              </a:spcAft>
-            </a:pPr>
-            <a:r>
-              <a:rPr sz="1900" b="0" i="0">
+              <a:t>Regret, explanation, a promise.</a:t>
+            </a:r>
+          </a:p>
+          <a:p>
+            <a:pPr algn="l">
+              <a:spcAft>
+                <a:spcPts val="945"/>
+              </a:spcAft>
+            </a:pPr>
+            <a:r>
+              <a:rPr sz="1600" b="0" i="0">
+                <a:solidFill>
+                  <a:srgbClr val="5D5A54"/>
+                </a:solidFill>
+                <a:latin typeface="Source Serif 4"/>
+              </a:rPr>
+              <a:t>All help, about equally.</a:t>
+            </a:r>
+          </a:p>
+        </p:txBody>
+      </p:sp>
+      <p:sp>
+        <p:nvSpPr>
+          <p:cNvPr id="12" name="TextBox 11"/>
+          <p:cNvSpPr txBox="1"/>
+          <p:nvPr/>
+        </p:nvSpPr>
+        <p:spPr>
+          <a:xfrm>
+            <a:off x="822960" y="5212080"/>
+            <a:ext cx="548640" cy="1005840"/>
+          </a:xfrm>
+          <a:prstGeom prst="rect">
+            <a:avLst/>
+          </a:prstGeom>
+          <a:noFill/>
+        </p:spPr>
+        <p:txBody>
+          <a:bodyPr wrap="square" anchor="t" lIns="0" rIns="0" tIns="0" bIns="0">
+            <a:spAutoFit/>
+          </a:bodyPr>
+          <a:lstStyle/>
+          <a:p>
+            <a:pPr algn="l">
+              <a:spcAft>
+                <a:spcPts val="1170"/>
+              </a:spcAft>
+            </a:pPr>
+            <a:r>
+              <a:rPr sz="2600" b="1" i="0">
+                <a:solidFill>
+                  <a:srgbClr val="F47B20"/>
+                </a:solidFill>
+                <a:latin typeface="Source Serif 4"/>
+              </a:rPr>
+              <a:t>4</a:t>
+            </a:r>
+          </a:p>
+        </p:txBody>
+      </p:sp>
+      <p:sp>
+        <p:nvSpPr>
+          <p:cNvPr id="13" name="TextBox 12"/>
+          <p:cNvSpPr txBox="1"/>
+          <p:nvPr/>
+        </p:nvSpPr>
+        <p:spPr>
+          <a:xfrm>
+            <a:off x="1463040" y="5248656"/>
+            <a:ext cx="9875520" cy="1005840"/>
+          </a:xfrm>
+          <a:prstGeom prst="rect">
+            <a:avLst/>
+          </a:prstGeom>
+          <a:noFill/>
+        </p:spPr>
+        <p:txBody>
+          <a:bodyPr wrap="square" anchor="t" lIns="0" rIns="0" tIns="0" bIns="0">
+            <a:spAutoFit/>
+          </a:bodyPr>
+          <a:lstStyle/>
+          <a:p>
+            <a:pPr algn="l">
+              <a:spcAft>
+                <a:spcPts val="945"/>
+              </a:spcAft>
+            </a:pPr>
+            <a:r>
+              <a:rPr sz="2100" b="1" i="0">
                 <a:solidFill>
                   <a:srgbClr val="1C1B19"/>
                 </a:solidFill>
                 <a:latin typeface="Source Serif 4"/>
               </a:rPr>
-              <a:t>Bringing up everything ever</a:t>
-            </a:r>
-          </a:p>
-          <a:p>
-            <a:pPr algn="l">
-              <a:spcAft>
-                <a:spcPts val="855"/>
-              </a:spcAft>
-            </a:pPr>
-            <a:r>
-              <a:rPr sz="1900" b="0" i="0">
-                <a:solidFill>
-                  <a:srgbClr val="1C1B19"/>
-                </a:solidFill>
-                <a:latin typeface="Source Serif 4"/>
-              </a:rPr>
-              <a:t>Screenshotting and sharing</a:t>
+              <a:t>Asking forgiveness.</a:t>
+            </a:r>
+          </a:p>
+          <a:p>
+            <a:pPr algn="l">
+              <a:spcAft>
+                <a:spcPts val="945"/>
+              </a:spcAft>
+            </a:pPr>
+            <a:r>
+              <a:rPr sz="1600" b="0" i="0">
+                <a:solidFill>
+                  <a:srgbClr val="5D5A54"/>
+                </a:solidFill>
+                <a:latin typeface="Source Serif 4"/>
+              </a:rPr>
+              <a:t>Mattered least. It can feel like pressure.</a:t>
             </a:r>
           </a:p>
         </p:txBody>
@@ -6496,7 +8380,7 @@
 </p:sld>
 </file>
 
-<file path=ppt/slides/slide13.xml><?xml version="1.0" encoding="utf-8"?>
+<file path=ppt/slides/slide5.xml><?xml version="1.0" encoding="utf-8"?>
 <p:sld xmlns:a="http://schemas.openxmlformats.org/drawingml/2006/main" xmlns:p="http://schemas.openxmlformats.org/presentationml/2006/main" xmlns:r="http://schemas.openxmlformats.org/officeDocument/2006/relationships">
   <p:cSld>
     <p:bg>
@@ -6592,7 +8476,7 @@
                 </a:solidFill>
                 <a:latin typeface="Inter Tight"/>
               </a:rPr>
-              <a:t>BEFORE YOU GO</a:t>
+              <a:t>WHY IT'S SO HARD</a:t>
             </a:r>
           </a:p>
         </p:txBody>
@@ -6644,8 +8528,47 @@
         </p:nvSpPr>
         <p:spPr>
           <a:xfrm>
-            <a:off x="822960" y="1188720"/>
-            <a:ext cx="10515600" cy="914400"/>
+            <a:off x="822960" y="1463040"/>
+            <a:ext cx="10515600" cy="3291840"/>
+          </a:xfrm>
+          <a:prstGeom prst="rect">
+            <a:avLst/>
+          </a:prstGeom>
+          <a:noFill/>
+        </p:spPr>
+        <p:txBody>
+          <a:bodyPr wrap="square" anchor="ctr" lIns="0" rIns="0" tIns="0" bIns="0">
+            <a:spAutoFit/>
+          </a:bodyPr>
+          <a:lstStyle/>
+          <a:p>
+            <a:pPr algn="l">
+              <a:spcAft>
+                <a:spcPts val="2070"/>
+              </a:spcAft>
+            </a:pPr>
+            <a:r>
+              <a:rPr sz="4600" b="1" i="0">
+                <a:solidFill>
+                  <a:srgbClr val="1C1B19"/>
+                </a:solidFill>
+                <a:latin typeface="Source Serif 4"/>
+              </a:rPr>
+              <a:t>Refusing to apologize feels good. For a minute.</a:t>
+            </a:r>
+          </a:p>
+        </p:txBody>
+      </p:sp>
+      <p:sp>
+        <p:nvSpPr>
+          <p:cNvPr id="6" name="TextBox 5"/>
+          <p:cNvSpPr txBox="1"/>
+          <p:nvPr/>
+        </p:nvSpPr>
+        <p:spPr>
+          <a:xfrm>
+            <a:off x="822960" y="4846320"/>
+            <a:ext cx="10515600" cy="1097280"/>
           </a:xfrm>
           <a:prstGeom prst="rect">
             <a:avLst/>
@@ -6660,1834 +8583,17 @@
           <a:p>
             <a:pPr algn="l">
               <a:spcAft>
-                <a:spcPts val="1620"/>
-              </a:spcAft>
-            </a:pPr>
-            <a:r>
-              <a:rPr sz="3600" b="1" i="0">
-                <a:solidFill>
-                  <a:srgbClr val="1C1B19"/>
-                </a:solidFill>
-                <a:latin typeface="Source Serif 4"/>
-              </a:rPr>
-              <a:t>Draft it messy</a:t>
-            </a:r>
-          </a:p>
-        </p:txBody>
-      </p:sp>
-      <p:sp>
-        <p:nvSpPr>
-          <p:cNvPr id="6" name="TextBox 5"/>
-          <p:cNvSpPr txBox="1"/>
-          <p:nvPr/>
-        </p:nvSpPr>
-        <p:spPr>
-          <a:xfrm>
-            <a:off x="822960" y="2286000"/>
-            <a:ext cx="10515600" cy="1463040"/>
-          </a:xfrm>
-          <a:prstGeom prst="rect">
-            <a:avLst/>
-          </a:prstGeom>
-          <a:noFill/>
-        </p:spPr>
-        <p:txBody>
-          <a:bodyPr wrap="square" anchor="t" lIns="0" rIns="0" tIns="0" bIns="0">
-            <a:spAutoFit/>
-          </a:bodyPr>
-          <a:lstStyle/>
-          <a:p>
-            <a:pPr algn="l">
-              <a:spcAft>
-                <a:spcPts val="1080"/>
-              </a:spcAft>
-            </a:pPr>
-            <a:r>
-              <a:rPr sz="2400" b="0" i="0">
-                <a:solidFill>
-                  <a:srgbClr val="1C1B19"/>
-                </a:solidFill>
-                <a:latin typeface="Source Serif 4"/>
-              </a:rPr>
-              <a:t>What I did, specifically, with no "but." How I'll make it right. What I'll do differently.</a:t>
-            </a:r>
-          </a:p>
-        </p:txBody>
-      </p:sp>
-      <p:sp>
-        <p:nvSpPr>
-          <p:cNvPr id="7" name="Rectangle 6"/>
-          <p:cNvSpPr/>
-          <p:nvPr/>
-        </p:nvSpPr>
-        <p:spPr>
-          <a:xfrm>
-            <a:off x="822960" y="4023360"/>
-            <a:ext cx="10515600" cy="1371600"/>
-          </a:xfrm>
-          <a:prstGeom prst="rect">
-            <a:avLst/>
-          </a:prstGeom>
-          <a:solidFill>
-            <a:srgbClr val="FFFFFF"/>
-          </a:solidFill>
-          <a:ln w="15875">
-            <a:solidFill>
-              <a:srgbClr val="1C1B19"/>
-            </a:solidFill>
-          </a:ln>
-          <a:effectLst/>
-        </p:spPr>
-        <p:style>
-          <a:lnRef idx="1">
-            <a:schemeClr val="accent1"/>
-          </a:lnRef>
-          <a:fillRef idx="3">
-            <a:schemeClr val="accent1"/>
-          </a:fillRef>
-          <a:effectRef idx="2">
-            <a:schemeClr val="accent1"/>
-          </a:effectRef>
-          <a:fontRef idx="minor">
-            <a:schemeClr val="lt1"/>
-          </a:fontRef>
-        </p:style>
-        <p:txBody>
-          <a:bodyPr rtlCol="0" anchor="ctr"/>
-          <a:lstStyle/>
-          <a:p>
-            <a:pPr algn="ctr"/>
-          </a:p>
-        </p:txBody>
-      </p:sp>
-      <p:sp>
-        <p:nvSpPr>
-          <p:cNvPr id="8" name="TextBox 7"/>
-          <p:cNvSpPr txBox="1"/>
-          <p:nvPr/>
-        </p:nvSpPr>
-        <p:spPr>
-          <a:xfrm>
-            <a:off x="1097280" y="4206240"/>
-            <a:ext cx="10058400" cy="365760"/>
-          </a:xfrm>
-          <a:prstGeom prst="rect">
-            <a:avLst/>
-          </a:prstGeom>
-          <a:noFill/>
-        </p:spPr>
-        <p:txBody>
-          <a:bodyPr wrap="square" anchor="t" lIns="0" rIns="0" tIns="0" bIns="0">
-            <a:spAutoFit/>
-          </a:bodyPr>
-          <a:lstStyle/>
-          <a:p>
-            <a:pPr algn="l">
-              <a:spcAft>
-                <a:spcPts val="540"/>
-              </a:spcAft>
-            </a:pPr>
-            <a:r>
-              <a:rPr sz="1200" b="1" i="0">
-                <a:solidFill>
-                  <a:srgbClr val="0B2D5B"/>
-                </a:solidFill>
-                <a:latin typeface="Inter Tight"/>
-              </a:rPr>
-              <a:t>ON THE BVR DINER MENU</a:t>
-            </a:r>
-          </a:p>
-        </p:txBody>
-      </p:sp>
-      <p:sp>
-        <p:nvSpPr>
-          <p:cNvPr id="9" name="TextBox 8"/>
-          <p:cNvSpPr txBox="1"/>
-          <p:nvPr/>
-        </p:nvSpPr>
-        <p:spPr>
-          <a:xfrm>
-            <a:off x="1097280" y="4617720"/>
-            <a:ext cx="10058400" cy="640080"/>
-          </a:xfrm>
-          <a:prstGeom prst="rect">
-            <a:avLst/>
-          </a:prstGeom>
-          <a:noFill/>
-        </p:spPr>
-        <p:txBody>
-          <a:bodyPr wrap="square" anchor="t" lIns="0" rIns="0" tIns="0" bIns="0">
-            <a:spAutoFit/>
-          </a:bodyPr>
-          <a:lstStyle/>
-          <a:p>
-            <a:pPr algn="l">
-              <a:spcAft>
-                <a:spcPts val="900"/>
-              </a:spcAft>
-            </a:pPr>
-            <a:r>
-              <a:rPr sz="2000" b="0" i="0">
-                <a:solidFill>
-                  <a:srgbClr val="1C1B19"/>
-                </a:solidFill>
-                <a:latin typeface="Inter Tight"/>
-              </a:rPr>
-              <a:t>https://rmwtoolkit.github.io/bcds-toolkit/the-repair-kit-high-school.html</a:t>
-            </a:r>
-          </a:p>
-        </p:txBody>
-      </p:sp>
-    </p:spTree>
-  </p:cSld>
-  <p:clrMapOvr>
-    <a:masterClrMapping/>
-  </p:clrMapOvr>
-</p:sld>
-</file>
-
-<file path=ppt/slides/slide2.xml><?xml version="1.0" encoding="utf-8"?>
-<p:sld xmlns:a="http://schemas.openxmlformats.org/drawingml/2006/main" xmlns:p="http://schemas.openxmlformats.org/presentationml/2006/main" xmlns:r="http://schemas.openxmlformats.org/officeDocument/2006/relationships" show="0">
-  <p:cSld>
-    <p:bg>
-      <p:bgPr>
-        <a:solidFill>
-          <a:srgbClr val="EEEBE4"/>
-        </a:solidFill>
-        <a:effectLst/>
-      </p:bgPr>
-    </p:bg>
-    <p:spTree>
-      <p:nvGrpSpPr>
-        <p:cNvPr id="1" name=""/>
-        <p:cNvGrpSpPr/>
-        <p:nvPr/>
-      </p:nvGrpSpPr>
-      <p:grpSpPr/>
-      <p:sp>
-        <p:nvSpPr>
-          <p:cNvPr id="2" name="Rectangle 1"/>
-          <p:cNvSpPr/>
-          <p:nvPr/>
-        </p:nvSpPr>
-        <p:spPr>
-          <a:xfrm>
-            <a:off x="0" y="0"/>
-            <a:ext cx="12191695" cy="384048"/>
-          </a:xfrm>
-          <a:prstGeom prst="rect">
-            <a:avLst/>
-          </a:prstGeom>
-          <a:solidFill>
-            <a:srgbClr val="0B2D5B"/>
-          </a:solidFill>
-          <a:ln>
-            <a:noFill/>
-          </a:ln>
-          <a:effectLst/>
-        </p:spPr>
-        <p:style>
-          <a:lnRef idx="1">
-            <a:schemeClr val="accent1"/>
-          </a:lnRef>
-          <a:fillRef idx="3">
-            <a:schemeClr val="accent1"/>
-          </a:fillRef>
-          <a:effectRef idx="2">
-            <a:schemeClr val="accent1"/>
-          </a:effectRef>
-          <a:fontRef idx="minor">
-            <a:schemeClr val="lt1"/>
-          </a:fontRef>
-        </p:style>
-        <p:txBody>
-          <a:bodyPr rtlCol="0" anchor="ctr"/>
-          <a:lstStyle/>
-          <a:p>
-            <a:pPr algn="ctr"/>
-          </a:p>
-        </p:txBody>
-      </p:sp>
-      <p:sp>
-        <p:nvSpPr>
-          <p:cNvPr id="3" name="TextBox 2"/>
-          <p:cNvSpPr txBox="1"/>
-          <p:nvPr/>
-        </p:nvSpPr>
-        <p:spPr>
-          <a:xfrm>
-            <a:off x="548640" y="100584"/>
-            <a:ext cx="10972800" cy="274320"/>
-          </a:xfrm>
-          <a:prstGeom prst="rect">
-            <a:avLst/>
-          </a:prstGeom>
-          <a:noFill/>
-        </p:spPr>
-        <p:txBody>
-          <a:bodyPr wrap="square" anchor="t" lIns="0" rIns="0" tIns="0" bIns="0">
-            <a:spAutoFit/>
-          </a:bodyPr>
-          <a:lstStyle/>
-          <a:p>
-            <a:pPr algn="l">
-              <a:spcAft>
-                <a:spcPts val="495"/>
-              </a:spcAft>
-            </a:pPr>
-            <a:r>
-              <a:rPr sz="1100" b="1" i="0">
-                <a:solidFill>
-                  <a:srgbClr val="FFFFFF"/>
-                </a:solidFill>
-                <a:latin typeface="Inter Tight"/>
-              </a:rPr>
-              <a:t>TEACHER PAGE  ·  skipped when you present  ·  Before you teach</a:t>
-            </a:r>
-          </a:p>
-        </p:txBody>
-      </p:sp>
-      <p:sp>
-        <p:nvSpPr>
-          <p:cNvPr id="4" name="TextBox 3"/>
-          <p:cNvSpPr txBox="1"/>
-          <p:nvPr/>
-        </p:nvSpPr>
-        <p:spPr>
-          <a:xfrm>
-            <a:off x="548640" y="685800"/>
-            <a:ext cx="10972800" cy="640080"/>
-          </a:xfrm>
-          <a:prstGeom prst="rect">
-            <a:avLst/>
-          </a:prstGeom>
-          <a:noFill/>
-        </p:spPr>
-        <p:txBody>
-          <a:bodyPr wrap="square" anchor="t" lIns="0" rIns="0" tIns="0" bIns="0">
-            <a:spAutoFit/>
-          </a:bodyPr>
-          <a:lstStyle/>
-          <a:p>
-            <a:pPr algn="l">
-              <a:spcAft>
-                <a:spcPts val="1350"/>
-              </a:spcAft>
-            </a:pPr>
-            <a:r>
-              <a:rPr sz="3000" b="1" i="0">
-                <a:solidFill>
-                  <a:srgbClr val="1C1B19"/>
-                </a:solidFill>
-                <a:latin typeface="Source Serif 4"/>
-              </a:rPr>
-              <a:t>Before you teach</a:t>
-            </a:r>
-          </a:p>
-        </p:txBody>
-      </p:sp>
-      <p:sp>
-        <p:nvSpPr>
-          <p:cNvPr id="5" name="TextBox 4"/>
-          <p:cNvSpPr txBox="1"/>
-          <p:nvPr/>
-        </p:nvSpPr>
-        <p:spPr>
-          <a:xfrm>
-            <a:off x="548640" y="1463040"/>
-            <a:ext cx="5394960" cy="4937760"/>
-          </a:xfrm>
-          <a:prstGeom prst="rect">
-            <a:avLst/>
-          </a:prstGeom>
-          <a:noFill/>
-        </p:spPr>
-        <p:txBody>
-          <a:bodyPr wrap="square" anchor="t" lIns="0" rIns="0" tIns="0" bIns="0">
-            <a:spAutoFit/>
-          </a:bodyPr>
-          <a:lstStyle/>
-          <a:p>
-            <a:pPr algn="l">
-              <a:spcAft>
-                <a:spcPts val="585"/>
-              </a:spcAft>
-            </a:pPr>
-            <a:r>
-              <a:rPr sz="1500" b="1" i="0">
-                <a:solidFill>
-                  <a:srgbClr val="1C1B19"/>
-                </a:solidFill>
-                <a:latin typeface="Source Serif 4"/>
-              </a:rPr>
-              <a:t>Both sides of a fight may be in the room.</a:t>
-            </a:r>
-          </a:p>
-          <a:p>
-            <a:pPr algn="l">
-              <a:spcAft>
-                <a:spcPts val="585"/>
-              </a:spcAft>
-            </a:pPr>
-            <a:r>
-              <a:rPr sz="1300" b="0" i="0">
-                <a:solidFill>
-                  <a:srgbClr val="1C1B19"/>
-                </a:solidFill>
-                <a:latin typeface="Source Serif 4"/>
-              </a:rPr>
-              <a:t>9th grade conflicts often run through one advisory or one team. No real names, no retelling current fights, no "who was wrong" discussions. The reflections are private and stay on cards that go home.</a:t>
-            </a:r>
-          </a:p>
-          <a:p>
-            <a:pPr algn="l">
-              <a:spcAft>
-                <a:spcPts val="585"/>
-              </a:spcAft>
-            </a:pPr>
-            <a:r>
-              <a:rPr sz="1300" b="0" i="0">
-                <a:solidFill>
-                  <a:srgbClr val="1C1B19"/>
-                </a:solidFill>
-                <a:latin typeface="Source Serif 4"/>
-              </a:rPr>
-              <a:t/>
-            </a:r>
-          </a:p>
-          <a:p>
-            <a:pPr algn="l">
-              <a:spcAft>
-                <a:spcPts val="585"/>
-              </a:spcAft>
-            </a:pPr>
-            <a:r>
-              <a:rPr sz="1500" b="1" i="0">
-                <a:solidFill>
-                  <a:srgbClr val="1C1B19"/>
-                </a:solidFill>
-                <a:latin typeface="Source Serif 4"/>
-              </a:rPr>
-              <a:t>Don't stage apologies in class.</a:t>
-            </a:r>
-          </a:p>
-          <a:p>
-            <a:pPr algn="l">
-              <a:spcAft>
-                <a:spcPts val="585"/>
-              </a:spcAft>
-            </a:pPr>
-            <a:r>
-              <a:rPr sz="1300" b="0" i="0">
-                <a:solidFill>
-                  <a:srgbClr val="1C1B19"/>
-                </a:solidFill>
-                <a:latin typeface="Source Serif 4"/>
-              </a:rPr>
-              <a:t>If a conflict between students is live, handle it outside the lesson with a counselor or dean. A lesson on repair isn't the place to make anyone say sorry in front of peers.</a:t>
-            </a:r>
-          </a:p>
-          <a:p>
-            <a:pPr algn="l">
-              <a:spcAft>
-                <a:spcPts val="585"/>
-              </a:spcAft>
-            </a:pPr>
-            <a:r>
-              <a:rPr sz="1300" b="0" i="0">
-                <a:solidFill>
-                  <a:srgbClr val="1C1B19"/>
-                </a:solidFill>
-                <a:latin typeface="Source Serif 4"/>
-              </a:rPr>
-              <a:t/>
-            </a:r>
-          </a:p>
-          <a:p>
-            <a:pPr algn="l">
-              <a:spcAft>
-                <a:spcPts val="585"/>
-              </a:spcAft>
-            </a:pPr>
-            <a:r>
-              <a:rPr sz="1500" b="1" i="0">
-                <a:solidFill>
-                  <a:srgbClr val="1C1B19"/>
-                </a:solidFill>
-                <a:latin typeface="Source Serif 4"/>
-              </a:rPr>
-              <a:t>Hurt, then sorry, again and again, is a pattern.</a:t>
-            </a:r>
-          </a:p>
-          <a:p>
-            <a:pPr algn="l">
-              <a:spcAft>
-                <a:spcPts val="585"/>
-              </a:spcAft>
-            </a:pPr>
-            <a:r>
-              <a:rPr sz="1300" b="0" i="0">
-                <a:solidFill>
-                  <a:srgbClr val="1C1B19"/>
-                </a:solidFill>
-                <a:latin typeface="Source Serif 4"/>
-              </a:rPr>
-              <a:t>If a student describes someone who keeps hurting them and apologizing, at school, in a dating relationship, or at home, thank them and connect them with a counselor that day. Don't problem-solve it in front of the class.</a:t>
-            </a:r>
-          </a:p>
-          <a:p>
-            <a:pPr algn="l">
-              <a:spcAft>
-                <a:spcPts val="585"/>
-              </a:spcAft>
-            </a:pPr>
-            <a:r>
-              <a:rPr sz="1300" b="0" i="0">
-                <a:solidFill>
-                  <a:srgbClr val="1C1B19"/>
-                </a:solidFill>
-                <a:latin typeface="Source Serif 4"/>
-              </a:rPr>
-              <a:t/>
-            </a:r>
-          </a:p>
-        </p:txBody>
-      </p:sp>
-      <p:sp>
-        <p:nvSpPr>
-          <p:cNvPr id="6" name="TextBox 5"/>
-          <p:cNvSpPr txBox="1"/>
-          <p:nvPr/>
-        </p:nvSpPr>
-        <p:spPr>
-          <a:xfrm>
-            <a:off x="6217920" y="1463040"/>
-            <a:ext cx="5394960" cy="4937760"/>
-          </a:xfrm>
-          <a:prstGeom prst="rect">
-            <a:avLst/>
-          </a:prstGeom>
-          <a:noFill/>
-        </p:spPr>
-        <p:txBody>
-          <a:bodyPr wrap="square" anchor="t" lIns="0" rIns="0" tIns="0" bIns="0">
-            <a:spAutoFit/>
-          </a:bodyPr>
-          <a:lstStyle/>
-          <a:p>
-            <a:pPr algn="l">
-              <a:spcAft>
-                <a:spcPts val="585"/>
-              </a:spcAft>
-            </a:pPr>
-            <a:r>
-              <a:rPr sz="1500" b="1" i="0">
-                <a:solidFill>
-                  <a:srgbClr val="1C1B19"/>
-                </a:solidFill>
-                <a:latin typeface="Source Serif 4"/>
-              </a:rPr>
-              <a:t>Nobody owes forgiveness.</a:t>
-            </a:r>
-          </a:p>
-          <a:p>
-            <a:pPr algn="l">
-              <a:spcAft>
-                <a:spcPts val="585"/>
-              </a:spcAft>
-            </a:pPr>
-            <a:r>
-              <a:rPr sz="1300" b="0" i="0">
-                <a:solidFill>
-                  <a:srgbClr val="1C1B19"/>
-                </a:solidFill>
-                <a:latin typeface="Source Serif 4"/>
-              </a:rPr>
-              <a:t>Students who were hurt can accept an apology and still need time to trust, or decline one that comes with no change. Avoid language that pressures the hurt person to "just move on."</a:t>
-            </a:r>
-          </a:p>
-          <a:p>
-            <a:pPr algn="l">
-              <a:spcAft>
-                <a:spcPts val="585"/>
-              </a:spcAft>
-            </a:pPr>
-            <a:r>
-              <a:rPr sz="1300" b="0" i="0">
-                <a:solidFill>
-                  <a:srgbClr val="1C1B19"/>
-                </a:solidFill>
-                <a:latin typeface="Source Serif 4"/>
-              </a:rPr>
-              <a:t/>
-            </a:r>
-          </a:p>
-          <a:p>
-            <a:pPr algn="l">
-              <a:spcAft>
-                <a:spcPts val="585"/>
-              </a:spcAft>
-            </a:pPr>
-            <a:r>
-              <a:rPr sz="1500" b="1" i="0">
-                <a:solidFill>
-                  <a:srgbClr val="1C1B19"/>
-                </a:solidFill>
-                <a:latin typeface="Source Serif 4"/>
-              </a:rPr>
-              <a:t>Some situations need an adult more than an apology.</a:t>
-            </a:r>
-          </a:p>
-          <a:p>
-            <a:pPr algn="l">
-              <a:spcAft>
-                <a:spcPts val="585"/>
-              </a:spcAft>
-            </a:pPr>
-            <a:r>
-              <a:rPr sz="1300" b="0" i="0">
-                <a:solidFill>
-                  <a:srgbClr val="1C1B19"/>
-                </a:solidFill>
-                <a:latin typeface="Source Serif 4"/>
-              </a:rPr>
-              <a:t>Threats to anyone, a fight turning into a pile-on online or at school, or something that made a student feel unsafe. Say this plainly near the end, and know who you'd walk a student to.</a:t>
-            </a:r>
-          </a:p>
-          <a:p>
-            <a:pPr algn="l">
-              <a:spcAft>
-                <a:spcPts val="585"/>
-              </a:spcAft>
-            </a:pPr>
-            <a:r>
-              <a:rPr sz="1300" b="0" i="0">
-                <a:solidFill>
-                  <a:srgbClr val="1C1B19"/>
-                </a:solidFill>
-                <a:latin typeface="Source Serif 4"/>
-              </a:rPr>
-              <a:t/>
-            </a:r>
-          </a:p>
-          <a:p>
-            <a:pPr algn="l">
-              <a:spcAft>
-                <a:spcPts val="585"/>
-              </a:spcAft>
-            </a:pPr>
-            <a:r>
-              <a:rPr sz="1500" b="1" i="0">
-                <a:solidFill>
-                  <a:srgbClr val="1C1B19"/>
-                </a:solidFill>
-                <a:latin typeface="Source Serif 4"/>
-              </a:rPr>
-              <a:t>Screenshots of fights come up.</a:t>
-            </a:r>
-          </a:p>
-          <a:p>
-            <a:pPr algn="l">
-              <a:spcAft>
-                <a:spcPts val="585"/>
-              </a:spcAft>
-            </a:pPr>
-            <a:r>
-              <a:rPr sz="1300" b="0" i="0">
-                <a:solidFill>
-                  <a:srgbClr val="1C1B19"/>
-                </a:solidFill>
-                <a:latin typeface="Source Serif 4"/>
-              </a:rPr>
-              <a:t>Students may bring up a group chat fight everyone saw. Keep it general. If someone's private messages or photos are being passed around, that's a counselor conversation that day.</a:t>
-            </a:r>
-          </a:p>
-          <a:p>
-            <a:pPr algn="l">
-              <a:spcAft>
-                <a:spcPts val="585"/>
-              </a:spcAft>
-            </a:pPr>
-            <a:r>
-              <a:rPr sz="1300" b="0" i="0">
-                <a:solidFill>
-                  <a:srgbClr val="1C1B19"/>
-                </a:solidFill>
-                <a:latin typeface="Source Serif 4"/>
-              </a:rPr>
-              <a:t/>
-            </a:r>
-          </a:p>
-        </p:txBody>
-      </p:sp>
-    </p:spTree>
-  </p:cSld>
-  <p:clrMapOvr>
-    <a:masterClrMapping/>
-  </p:clrMapOvr>
-</p:sld>
-</file>
-
-<file path=ppt/slides/slide3.xml><?xml version="1.0" encoding="utf-8"?>
-<p:sld xmlns:a="http://schemas.openxmlformats.org/drawingml/2006/main" xmlns:p="http://schemas.openxmlformats.org/presentationml/2006/main" xmlns:r="http://schemas.openxmlformats.org/officeDocument/2006/relationships" show="0">
-  <p:cSld>
-    <p:bg>
-      <p:bgPr>
-        <a:solidFill>
-          <a:srgbClr val="EEEBE4"/>
-        </a:solidFill>
-        <a:effectLst/>
-      </p:bgPr>
-    </p:bg>
-    <p:spTree>
-      <p:nvGrpSpPr>
-        <p:cNvPr id="1" name=""/>
-        <p:cNvGrpSpPr/>
-        <p:nvPr/>
-      </p:nvGrpSpPr>
-      <p:grpSpPr/>
-      <p:sp>
-        <p:nvSpPr>
-          <p:cNvPr id="2" name="Rectangle 1"/>
-          <p:cNvSpPr/>
-          <p:nvPr/>
-        </p:nvSpPr>
-        <p:spPr>
-          <a:xfrm>
-            <a:off x="0" y="0"/>
-            <a:ext cx="12191695" cy="384048"/>
-          </a:xfrm>
-          <a:prstGeom prst="rect">
-            <a:avLst/>
-          </a:prstGeom>
-          <a:solidFill>
-            <a:srgbClr val="0B2D5B"/>
-          </a:solidFill>
-          <a:ln>
-            <a:noFill/>
-          </a:ln>
-          <a:effectLst/>
-        </p:spPr>
-        <p:style>
-          <a:lnRef idx="1">
-            <a:schemeClr val="accent1"/>
-          </a:lnRef>
-          <a:fillRef idx="3">
-            <a:schemeClr val="accent1"/>
-          </a:fillRef>
-          <a:effectRef idx="2">
-            <a:schemeClr val="accent1"/>
-          </a:effectRef>
-          <a:fontRef idx="minor">
-            <a:schemeClr val="lt1"/>
-          </a:fontRef>
-        </p:style>
-        <p:txBody>
-          <a:bodyPr rtlCol="0" anchor="ctr"/>
-          <a:lstStyle/>
-          <a:p>
-            <a:pPr algn="ctr"/>
-          </a:p>
-        </p:txBody>
-      </p:sp>
-      <p:sp>
-        <p:nvSpPr>
-          <p:cNvPr id="3" name="TextBox 2"/>
-          <p:cNvSpPr txBox="1"/>
-          <p:nvPr/>
-        </p:nvSpPr>
-        <p:spPr>
-          <a:xfrm>
-            <a:off x="548640" y="100584"/>
-            <a:ext cx="10972800" cy="274320"/>
-          </a:xfrm>
-          <a:prstGeom prst="rect">
-            <a:avLst/>
-          </a:prstGeom>
-          <a:noFill/>
-        </p:spPr>
-        <p:txBody>
-          <a:bodyPr wrap="square" anchor="t" lIns="0" rIns="0" tIns="0" bIns="0">
-            <a:spAutoFit/>
-          </a:bodyPr>
-          <a:lstStyle/>
-          <a:p>
-            <a:pPr algn="l">
-              <a:spcAft>
-                <a:spcPts val="495"/>
-              </a:spcAft>
-            </a:pPr>
-            <a:r>
-              <a:rPr sz="1100" b="1" i="0">
-                <a:solidFill>
-                  <a:srgbClr val="FFFFFF"/>
-                </a:solidFill>
-                <a:latin typeface="Inter Tight"/>
-              </a:rPr>
-              <a:t>TEACHER PAGE  ·  skipped when you present  ·  Every student in the room</a:t>
-            </a:r>
-          </a:p>
-        </p:txBody>
-      </p:sp>
-      <p:sp>
-        <p:nvSpPr>
-          <p:cNvPr id="4" name="TextBox 3"/>
-          <p:cNvSpPr txBox="1"/>
-          <p:nvPr/>
-        </p:nvSpPr>
-        <p:spPr>
-          <a:xfrm>
-            <a:off x="548640" y="685800"/>
-            <a:ext cx="10972800" cy="640080"/>
-          </a:xfrm>
-          <a:prstGeom prst="rect">
-            <a:avLst/>
-          </a:prstGeom>
-          <a:noFill/>
-        </p:spPr>
-        <p:txBody>
-          <a:bodyPr wrap="square" anchor="t" lIns="0" rIns="0" tIns="0" bIns="0">
-            <a:spAutoFit/>
-          </a:bodyPr>
-          <a:lstStyle/>
-          <a:p>
-            <a:pPr algn="l">
-              <a:spcAft>
-                <a:spcPts val="1350"/>
-              </a:spcAft>
-            </a:pPr>
-            <a:r>
-              <a:rPr sz="3000" b="1" i="0">
-                <a:solidFill>
-                  <a:srgbClr val="1C1B19"/>
-                </a:solidFill>
-                <a:latin typeface="Source Serif 4"/>
-              </a:rPr>
-              <a:t>Every student in the room</a:t>
-            </a:r>
-          </a:p>
-        </p:txBody>
-      </p:sp>
-      <p:sp>
-        <p:nvSpPr>
-          <p:cNvPr id="5" name="TextBox 4"/>
-          <p:cNvSpPr txBox="1"/>
-          <p:nvPr/>
-        </p:nvSpPr>
-        <p:spPr>
-          <a:xfrm>
-            <a:off x="548640" y="1325880"/>
-            <a:ext cx="10972800" cy="365760"/>
-          </a:xfrm>
-          <a:prstGeom prst="rect">
-            <a:avLst/>
-          </a:prstGeom>
-          <a:noFill/>
-        </p:spPr>
-        <p:txBody>
-          <a:bodyPr wrap="square" anchor="t" lIns="0" rIns="0" tIns="0" bIns="0">
-            <a:spAutoFit/>
-          </a:bodyPr>
-          <a:lstStyle/>
-          <a:p>
-            <a:pPr algn="l">
-              <a:spcAft>
-                <a:spcPts val="630"/>
-              </a:spcAft>
-            </a:pPr>
-            <a:r>
-              <a:rPr sz="1400" b="0" i="0">
+                <a:spcPts val="990"/>
+              </a:spcAft>
+            </a:pPr>
+            <a:r>
+              <a:rPr sz="2200" b="0" i="1">
                 <a:solidFill>
                   <a:srgbClr val="5D5A54"/>
                 </a:solidFill>
-                <a:latin typeface="Inter Tight"/>
-              </a:rPr>
-              <a:t>Culture, family, identity, ability and money: what to keep in mind for this topic.</a:t>
-            </a:r>
-          </a:p>
-        </p:txBody>
-      </p:sp>
-      <p:sp>
-        <p:nvSpPr>
-          <p:cNvPr id="6" name="TextBox 5"/>
-          <p:cNvSpPr txBox="1"/>
-          <p:nvPr/>
-        </p:nvSpPr>
-        <p:spPr>
-          <a:xfrm>
-            <a:off x="548640" y="1828800"/>
-            <a:ext cx="5394960" cy="4572000"/>
-          </a:xfrm>
-          <a:prstGeom prst="rect">
-            <a:avLst/>
-          </a:prstGeom>
-          <a:noFill/>
-        </p:spPr>
-        <p:txBody>
-          <a:bodyPr wrap="square" anchor="t" lIns="0" rIns="0" tIns="0" bIns="0">
-            <a:spAutoFit/>
-          </a:bodyPr>
-          <a:lstStyle/>
-          <a:p>
-            <a:pPr algn="l">
-              <a:spcAft>
-                <a:spcPts val="585"/>
-              </a:spcAft>
-            </a:pPr>
-            <a:r>
-              <a:rPr sz="1500" b="1" i="0">
-                <a:solidFill>
-                  <a:srgbClr val="1C1B19"/>
-                </a:solidFill>
-                <a:latin typeface="Source Serif 4"/>
-              </a:rPr>
-              <a:t>Repair looks different from family to family.</a:t>
-            </a:r>
-          </a:p>
-          <a:p>
-            <a:pPr algn="l">
-              <a:spcAft>
-                <a:spcPts val="585"/>
-              </a:spcAft>
-            </a:pPr>
-            <a:r>
-              <a:rPr sz="1300" b="0" i="0">
-                <a:solidFill>
-                  <a:srgbClr val="1C1B19"/>
-                </a:solidFill>
-                <a:latin typeface="Source Serif 4"/>
-              </a:rPr>
-              <a:t>Some families expect a direct "I was wrong." Others repair through action: showing up, doing a favor, cooking for someone, acting normal again. Some rarely say sorry out loud. Present each as real repair and ask about students' own families privately.</a:t>
-            </a:r>
-          </a:p>
-          <a:p>
-            <a:pPr algn="l">
-              <a:spcAft>
-                <a:spcPts val="585"/>
-              </a:spcAft>
-            </a:pPr>
-            <a:r>
-              <a:rPr sz="1300" b="0" i="0">
-                <a:solidFill>
-                  <a:srgbClr val="1C1B19"/>
-                </a:solidFill>
-                <a:latin typeface="Source Serif 4"/>
-              </a:rPr>
-              <a:t/>
-            </a:r>
-          </a:p>
-          <a:p>
-            <a:pPr algn="l">
-              <a:spcAft>
-                <a:spcPts val="585"/>
-              </a:spcAft>
-            </a:pPr>
-            <a:r>
-              <a:rPr sz="1500" b="1" i="0">
-                <a:solidFill>
-                  <a:srgbClr val="1C1B19"/>
-                </a:solidFill>
-                <a:latin typeface="Source Serif 4"/>
-              </a:rPr>
-              <a:t>The people you can't walk away from vary.</a:t>
-            </a:r>
-          </a:p>
-          <a:p>
-            <a:pPr algn="l">
-              <a:spcAft>
-                <a:spcPts val="585"/>
-              </a:spcAft>
-            </a:pPr>
-            <a:r>
-              <a:rPr sz="1300" b="0" i="0">
-                <a:solidFill>
-                  <a:srgbClr val="1C1B19"/>
-                </a:solidFill>
-                <a:latin typeface="Source Serif 4"/>
-              </a:rPr>
-              <a:t>For some students it's a sibling, a step-sibling, a cousin they share a room with, or a parent in one of two homes. In some families an older relative steps in to settle things. Use "someone you live with" so every household fits.</a:t>
-            </a:r>
-          </a:p>
-          <a:p>
-            <a:pPr algn="l">
-              <a:spcAft>
-                <a:spcPts val="585"/>
-              </a:spcAft>
-            </a:pPr>
-            <a:r>
-              <a:rPr sz="1300" b="0" i="0">
-                <a:solidFill>
-                  <a:srgbClr val="1C1B19"/>
-                </a:solidFill>
-                <a:latin typeface="Source Serif 4"/>
-              </a:rPr>
-              <a:t/>
-            </a:r>
-          </a:p>
-          <a:p>
-            <a:pPr algn="l">
-              <a:spcAft>
-                <a:spcPts val="585"/>
-              </a:spcAft>
-            </a:pPr>
-            <a:r>
-              <a:rPr sz="1500" b="1" i="0">
-                <a:solidFill>
-                  <a:srgbClr val="1C1B19"/>
-                </a:solidFill>
-                <a:latin typeface="Source Serif 4"/>
-              </a:rPr>
-              <a:t>Apologizing in a second language.</a:t>
-            </a:r>
-          </a:p>
-          <a:p>
-            <a:pPr algn="l">
-              <a:spcAft>
-                <a:spcPts val="585"/>
-              </a:spcAft>
-            </a:pPr>
-            <a:r>
-              <a:rPr sz="1300" b="0" i="0">
-                <a:solidFill>
-                  <a:srgbClr val="1C1B19"/>
-                </a:solidFill>
-                <a:latin typeface="Source Serif 4"/>
-              </a:rPr>
-              <a:t>Getting the words exactly right is harder in a language you're still learning, and text strips out tone. Students who are new to English can apologize in person, by action, or in writing they've had time to check. The Andre card (mocking an accent) names a hurt these students know.</a:t>
-            </a:r>
-          </a:p>
-          <a:p>
-            <a:pPr algn="l">
-              <a:spcAft>
-                <a:spcPts val="585"/>
-              </a:spcAft>
-            </a:pPr>
-            <a:r>
-              <a:rPr sz="1300" b="0" i="0">
-                <a:solidFill>
-                  <a:srgbClr val="1C1B19"/>
-                </a:solidFill>
-                <a:latin typeface="Source Serif 4"/>
-              </a:rPr>
-              <a:t/>
-            </a:r>
-          </a:p>
-        </p:txBody>
-      </p:sp>
-      <p:sp>
-        <p:nvSpPr>
-          <p:cNvPr id="7" name="TextBox 6"/>
-          <p:cNvSpPr txBox="1"/>
-          <p:nvPr/>
-        </p:nvSpPr>
-        <p:spPr>
-          <a:xfrm>
-            <a:off x="6217920" y="1828800"/>
-            <a:ext cx="5394960" cy="4572000"/>
-          </a:xfrm>
-          <a:prstGeom prst="rect">
-            <a:avLst/>
-          </a:prstGeom>
-          <a:noFill/>
-        </p:spPr>
-        <p:txBody>
-          <a:bodyPr wrap="square" anchor="t" lIns="0" rIns="0" tIns="0" bIns="0">
-            <a:spAutoFit/>
-          </a:bodyPr>
-          <a:lstStyle/>
-          <a:p>
-            <a:pPr algn="l">
-              <a:spcAft>
-                <a:spcPts val="585"/>
-              </a:spcAft>
-            </a:pPr>
-            <a:r>
-              <a:rPr sz="1500" b="1" i="0">
-                <a:solidFill>
-                  <a:srgbClr val="1C1B19"/>
-                </a:solidFill>
-                <a:latin typeface="Source Serif 4"/>
-              </a:rPr>
-              <a:t>Neurodivergent students may need a script and time.</a:t>
-            </a:r>
-          </a:p>
-          <a:p>
-            <a:pPr algn="l">
-              <a:spcAft>
-                <a:spcPts val="585"/>
-              </a:spcAft>
-            </a:pPr>
-            <a:r>
-              <a:rPr sz="1300" b="0" i="0">
-                <a:solidFill>
-                  <a:srgbClr val="1C1B19"/>
-                </a:solidFill>
-                <a:latin typeface="Source Serif 4"/>
-              </a:rPr>
-              <a:t>Cooling down can take longer, and reading tone over text is harder for some students. The repair sequence works as a script. Eye contact isn't required for an apology to count, and a written apology can be the right choice.</a:t>
-            </a:r>
-          </a:p>
-          <a:p>
-            <a:pPr algn="l">
-              <a:spcAft>
-                <a:spcPts val="585"/>
-              </a:spcAft>
-            </a:pPr>
-            <a:r>
-              <a:rPr sz="1300" b="0" i="0">
-                <a:solidFill>
-                  <a:srgbClr val="1C1B19"/>
-                </a:solidFill>
-                <a:latin typeface="Source Serif 4"/>
-              </a:rPr>
-              <a:t/>
-            </a:r>
-          </a:p>
-          <a:p>
-            <a:pPr algn="l">
-              <a:spcAft>
-                <a:spcPts val="585"/>
-              </a:spcAft>
-            </a:pPr>
-            <a:r>
-              <a:rPr sz="1500" b="1" i="0">
-                <a:solidFill>
-                  <a:srgbClr val="1C1B19"/>
-                </a:solidFill>
-                <a:latin typeface="Source Serif 4"/>
-              </a:rPr>
-              <a:t>Faith can be a resource here.</a:t>
-            </a:r>
-          </a:p>
-          <a:p>
-            <a:pPr algn="l">
-              <a:spcAft>
-                <a:spcPts val="585"/>
-              </a:spcAft>
-            </a:pPr>
-            <a:r>
-              <a:rPr sz="1300" b="0" i="0">
-                <a:solidFill>
-                  <a:srgbClr val="1C1B19"/>
-                </a:solidFill>
-                <a:latin typeface="Source Serif 4"/>
-              </a:rPr>
-              <a:t>Some students' traditions have practices of confession, forgiveness, or making amends; others have none. Let "how does your family or tradition make things right?" cover both without assuming either.</a:t>
-            </a:r>
-          </a:p>
-          <a:p>
-            <a:pPr algn="l">
-              <a:spcAft>
-                <a:spcPts val="585"/>
-              </a:spcAft>
-            </a:pPr>
-            <a:r>
-              <a:rPr sz="1300" b="0" i="0">
-                <a:solidFill>
-                  <a:srgbClr val="1C1B19"/>
-                </a:solidFill>
-                <a:latin typeface="Source Serif 4"/>
-              </a:rPr>
-              <a:t/>
-            </a:r>
-          </a:p>
-          <a:p>
-            <a:pPr algn="l">
-              <a:spcAft>
-                <a:spcPts val="585"/>
-              </a:spcAft>
-            </a:pPr>
-            <a:r>
-              <a:rPr sz="1500" b="1" i="0">
-                <a:solidFill>
-                  <a:srgbClr val="1C1B19"/>
-                </a:solidFill>
-                <a:latin typeface="Source Serif 4"/>
-              </a:rPr>
-              <a:t>Making it right shouldn't depend on money.</a:t>
-            </a:r>
-          </a:p>
-          <a:p>
-            <a:pPr algn="l">
-              <a:spcAft>
-                <a:spcPts val="585"/>
-              </a:spcAft>
-            </a:pPr>
-            <a:r>
-              <a:rPr sz="1300" b="0" i="0">
-                <a:solidFill>
-                  <a:srgbClr val="1C1B19"/>
-                </a:solidFill>
-                <a:latin typeface="Source Serif 4"/>
-              </a:rPr>
-              <a:t>"Paying for what broke" is one kind of repair offer. Deleting a post, telling the group it was your fault, fixing or replacing something with time or effort all count. Keep the examples free.</a:t>
-            </a:r>
-          </a:p>
-          <a:p>
-            <a:pPr algn="l">
-              <a:spcAft>
-                <a:spcPts val="585"/>
-              </a:spcAft>
-            </a:pPr>
-            <a:r>
-              <a:rPr sz="1300" b="0" i="0">
-                <a:solidFill>
-                  <a:srgbClr val="1C1B19"/>
-                </a:solidFill>
-                <a:latin typeface="Source Serif 4"/>
-              </a:rPr>
-              <a:t/>
-            </a:r>
-          </a:p>
-        </p:txBody>
-      </p:sp>
-    </p:spTree>
-  </p:cSld>
-  <p:clrMapOvr>
-    <a:masterClrMapping/>
-  </p:clrMapOvr>
-</p:sld>
-</file>
-
-<file path=ppt/slides/slide4.xml><?xml version="1.0" encoding="utf-8"?>
-<p:sld xmlns:a="http://schemas.openxmlformats.org/drawingml/2006/main" xmlns:p="http://schemas.openxmlformats.org/presentationml/2006/main" xmlns:r="http://schemas.openxmlformats.org/officeDocument/2006/relationships" show="0">
-  <p:cSld>
-    <p:bg>
-      <p:bgPr>
-        <a:solidFill>
-          <a:srgbClr val="EEEBE4"/>
-        </a:solidFill>
-        <a:effectLst/>
-      </p:bgPr>
-    </p:bg>
-    <p:spTree>
-      <p:nvGrpSpPr>
-        <p:cNvPr id="1" name=""/>
-        <p:cNvGrpSpPr/>
-        <p:nvPr/>
-      </p:nvGrpSpPr>
-      <p:grpSpPr/>
-      <p:sp>
-        <p:nvSpPr>
-          <p:cNvPr id="2" name="Rectangle 1"/>
-          <p:cNvSpPr/>
-          <p:nvPr/>
-        </p:nvSpPr>
-        <p:spPr>
-          <a:xfrm>
-            <a:off x="0" y="0"/>
-            <a:ext cx="12191695" cy="384048"/>
-          </a:xfrm>
-          <a:prstGeom prst="rect">
-            <a:avLst/>
-          </a:prstGeom>
-          <a:solidFill>
-            <a:srgbClr val="0B2D5B"/>
-          </a:solidFill>
-          <a:ln>
-            <a:noFill/>
-          </a:ln>
-          <a:effectLst/>
-        </p:spPr>
-        <p:style>
-          <a:lnRef idx="1">
-            <a:schemeClr val="accent1"/>
-          </a:lnRef>
-          <a:fillRef idx="3">
-            <a:schemeClr val="accent1"/>
-          </a:fillRef>
-          <a:effectRef idx="2">
-            <a:schemeClr val="accent1"/>
-          </a:effectRef>
-          <a:fontRef idx="minor">
-            <a:schemeClr val="lt1"/>
-          </a:fontRef>
-        </p:style>
-        <p:txBody>
-          <a:bodyPr rtlCol="0" anchor="ctr"/>
-          <a:lstStyle/>
-          <a:p>
-            <a:pPr algn="ctr"/>
-          </a:p>
-        </p:txBody>
-      </p:sp>
-      <p:sp>
-        <p:nvSpPr>
-          <p:cNvPr id="3" name="TextBox 2"/>
-          <p:cNvSpPr txBox="1"/>
-          <p:nvPr/>
-        </p:nvSpPr>
-        <p:spPr>
-          <a:xfrm>
-            <a:off x="548640" y="100584"/>
-            <a:ext cx="10972800" cy="274320"/>
-          </a:xfrm>
-          <a:prstGeom prst="rect">
-            <a:avLst/>
-          </a:prstGeom>
-          <a:noFill/>
-        </p:spPr>
-        <p:txBody>
-          <a:bodyPr wrap="square" anchor="t" lIns="0" rIns="0" tIns="0" bIns="0">
-            <a:spAutoFit/>
-          </a:bodyPr>
-          <a:lstStyle/>
-          <a:p>
-            <a:pPr algn="l">
-              <a:spcAft>
-                <a:spcPts val="495"/>
-              </a:spcAft>
-            </a:pPr>
-            <a:r>
-              <a:rPr sz="1100" b="1" i="0">
-                <a:solidFill>
-                  <a:srgbClr val="FFFFFF"/>
-                </a:solidFill>
-                <a:latin typeface="Inter Tight"/>
-              </a:rPr>
-              <a:t>TEACHER PAGE  ·  skipped when you present  ·  Background</a:t>
-            </a:r>
-          </a:p>
-        </p:txBody>
-      </p:sp>
-      <p:sp>
-        <p:nvSpPr>
-          <p:cNvPr id="4" name="TextBox 3"/>
-          <p:cNvSpPr txBox="1"/>
-          <p:nvPr/>
-        </p:nvSpPr>
-        <p:spPr>
-          <a:xfrm>
-            <a:off x="548640" y="685800"/>
-            <a:ext cx="10972800" cy="640080"/>
-          </a:xfrm>
-          <a:prstGeom prst="rect">
-            <a:avLst/>
-          </a:prstGeom>
-          <a:noFill/>
-        </p:spPr>
-        <p:txBody>
-          <a:bodyPr wrap="square" anchor="t" lIns="0" rIns="0" tIns="0" bIns="0">
-            <a:spAutoFit/>
-          </a:bodyPr>
-          <a:lstStyle/>
-          <a:p>
-            <a:pPr algn="l">
-              <a:spcAft>
-                <a:spcPts val="1350"/>
-              </a:spcAft>
-            </a:pPr>
-            <a:r>
-              <a:rPr sz="3000" b="1" i="0">
-                <a:solidFill>
-                  <a:srgbClr val="1C1B19"/>
-                </a:solidFill>
-                <a:latin typeface="Source Serif 4"/>
-              </a:rPr>
-              <a:t>What the research says</a:t>
-            </a:r>
-          </a:p>
-        </p:txBody>
-      </p:sp>
-      <p:sp>
-        <p:nvSpPr>
-          <p:cNvPr id="5" name="TextBox 4"/>
-          <p:cNvSpPr txBox="1"/>
-          <p:nvPr/>
-        </p:nvSpPr>
-        <p:spPr>
-          <a:xfrm>
-            <a:off x="548640" y="1463040"/>
-            <a:ext cx="5394960" cy="4937760"/>
-          </a:xfrm>
-          <a:prstGeom prst="rect">
-            <a:avLst/>
-          </a:prstGeom>
-          <a:noFill/>
-        </p:spPr>
-        <p:txBody>
-          <a:bodyPr wrap="square" anchor="t" lIns="0" rIns="0" tIns="0" bIns="0">
-            <a:spAutoFit/>
-          </a:bodyPr>
-          <a:lstStyle/>
-          <a:p>
-            <a:pPr algn="l">
-              <a:spcAft>
-                <a:spcPts val="585"/>
-              </a:spcAft>
-            </a:pPr>
-            <a:r>
-              <a:rPr sz="1300" b="0" i="0">
-                <a:solidFill>
-                  <a:srgbClr val="1C1B19"/>
-                </a:solidFill>
-                <a:latin typeface="Source Serif 4"/>
-              </a:rPr>
-              <a:t>755 people rated apologies built from six possible parts. Apologies with more parts worked better, but the parts weren't equal. The studies were with adults.</a:t>
-            </a:r>
-          </a:p>
-          <a:p>
-            <a:pPr algn="l">
-              <a:spcAft>
-                <a:spcPts val="585"/>
-              </a:spcAft>
-            </a:pPr>
-            <a:r>
-              <a:rPr sz="1050" b="0" i="0">
-                <a:solidFill>
-                  <a:srgbClr val="5D5A54"/>
-                </a:solidFill>
-                <a:latin typeface="Inter Tight"/>
-              </a:rPr>
-              <a:t>Lewicki, Polin and Lount, Negotiation and Conflict Management Research, 2016 (Ohio State)</a:t>
-            </a:r>
-          </a:p>
-          <a:p>
-            <a:pPr algn="l">
-              <a:spcAft>
-                <a:spcPts val="585"/>
-              </a:spcAft>
-            </a:pPr>
-            <a:r>
-              <a:rPr sz="1300" b="0" i="0">
-                <a:solidFill>
-                  <a:srgbClr val="1C1B19"/>
-                </a:solidFill>
-                <a:latin typeface="Source Serif 4"/>
-              </a:rPr>
-              <a:t>Taking responsibility mattered most, then an offer of repair. Regret, explanation, and a promise to change were in the middle. Asking for forgiveness mattered least.</a:t>
-            </a:r>
-          </a:p>
-          <a:p>
-            <a:pPr algn="l">
-              <a:spcAft>
-                <a:spcPts val="585"/>
-              </a:spcAft>
-            </a:pPr>
-            <a:r>
-              <a:rPr sz="1050" b="0" i="0">
-                <a:solidFill>
-                  <a:srgbClr val="5D5A54"/>
-                </a:solidFill>
-                <a:latin typeface="Inter Tight"/>
-              </a:rPr>
-              <a:t>Lewicki, Polin and Lount, 2016</a:t>
-            </a:r>
-          </a:p>
-          <a:p>
-            <a:pPr algn="l">
-              <a:spcAft>
-                <a:spcPts val="585"/>
-              </a:spcAft>
-            </a:pPr>
-            <a:r>
-              <a:rPr sz="1300" b="0" i="0">
-                <a:solidFill>
-                  <a:srgbClr val="1C1B19"/>
-                </a:solidFill>
-                <a:latin typeface="Source Serif 4"/>
-              </a:rPr>
-              <a:t>Across four studies, people who believe personality can change were more likely to take responsibility after hurting someone.</a:t>
-            </a:r>
-          </a:p>
-          <a:p>
-            <a:pPr algn="l">
-              <a:spcAft>
-                <a:spcPts val="585"/>
-              </a:spcAft>
-            </a:pPr>
-            <a:r>
-              <a:rPr sz="1050" b="0" i="0">
-                <a:solidFill>
-                  <a:srgbClr val="5D5A54"/>
-                </a:solidFill>
-                <a:latin typeface="Inter Tight"/>
-              </a:rPr>
-              <a:t>Schumann and Dweck, Personality and Social Psychology Bulletin, 2014</a:t>
-            </a:r>
-          </a:p>
-        </p:txBody>
-      </p:sp>
-      <p:sp>
-        <p:nvSpPr>
-          <p:cNvPr id="6" name="TextBox 5"/>
-          <p:cNvSpPr txBox="1"/>
-          <p:nvPr/>
-        </p:nvSpPr>
-        <p:spPr>
-          <a:xfrm>
-            <a:off x="6217920" y="1463040"/>
-            <a:ext cx="5394960" cy="4937760"/>
-          </a:xfrm>
-          <a:prstGeom prst="rect">
-            <a:avLst/>
-          </a:prstGeom>
-          <a:noFill/>
-        </p:spPr>
-        <p:txBody>
-          <a:bodyPr wrap="square" anchor="t" lIns="0" rIns="0" tIns="0" bIns="0">
-            <a:spAutoFit/>
-          </a:bodyPr>
-          <a:lstStyle/>
-          <a:p>
-            <a:pPr algn="l">
-              <a:spcAft>
-                <a:spcPts val="585"/>
-              </a:spcAft>
-            </a:pPr>
-            <a:r>
-              <a:rPr sz="1300" b="0" i="0">
-                <a:solidFill>
-                  <a:srgbClr val="1C1B19"/>
-                </a:solidFill>
-                <a:latin typeface="Source Serif 4"/>
-              </a:rPr>
-              <a:t>People who wrote a message refusing to apologize felt more powerful and had higher self-esteem afterward than people who didn't.</a:t>
-            </a:r>
-          </a:p>
-          <a:p>
-            <a:pPr algn="l">
-              <a:spcAft>
-                <a:spcPts val="585"/>
-              </a:spcAft>
-            </a:pPr>
-            <a:r>
-              <a:rPr sz="1050" b="0" i="0">
-                <a:solidFill>
-                  <a:srgbClr val="5D5A54"/>
-                </a:solidFill>
-                <a:latin typeface="Inter Tight"/>
-              </a:rPr>
-              <a:t>Okimoto, Wenzel and Hedrick, European Journal of Social Psychology, 2013</a:t>
-            </a:r>
-          </a:p>
-          <a:p>
-            <a:pPr algn="l">
-              <a:spcAft>
-                <a:spcPts val="585"/>
-              </a:spcAft>
-            </a:pPr>
-            <a:r>
-              <a:rPr sz="1300" b="0" i="0">
-                <a:solidFill>
-                  <a:srgbClr val="1C1B19"/>
-                </a:solidFill>
-                <a:latin typeface="Source Serif 4"/>
-              </a:rPr>
-              <a:t>People reasoned more wisely about a friend's relationship conflict than their own: considering other viewpoints, admitting what they didn't know, looking for compromise.</a:t>
-            </a:r>
-          </a:p>
-          <a:p>
-            <a:pPr algn="l">
-              <a:spcAft>
-                <a:spcPts val="585"/>
-              </a:spcAft>
-            </a:pPr>
-            <a:r>
-              <a:rPr sz="1050" b="0" i="0">
-                <a:solidFill>
-                  <a:srgbClr val="5D5A54"/>
-                </a:solidFill>
-                <a:latin typeface="Inter Tight"/>
-              </a:rPr>
-              <a:t>Grossmann and Kross, Psychological Science, 2014</a:t>
-            </a:r>
-          </a:p>
-          <a:p>
-            <a:pPr algn="l">
-              <a:spcAft>
-                <a:spcPts val="585"/>
-              </a:spcAft>
-            </a:pPr>
-            <a:r>
-              <a:rPr sz="1300" b="0" i="0">
-                <a:solidFill>
-                  <a:srgbClr val="1C1B19"/>
-                </a:solidFill>
-                <a:latin typeface="Source Serif 4"/>
-              </a:rPr>
-              <a:t>When people thought about their own conflict from a distance, for example in the third person, the gap disappeared, in younger and older adults alike.</a:t>
-            </a:r>
-          </a:p>
-          <a:p>
-            <a:pPr algn="l">
-              <a:spcAft>
-                <a:spcPts val="585"/>
-              </a:spcAft>
-            </a:pPr>
-            <a:r>
-              <a:rPr sz="1050" b="0" i="0">
-                <a:solidFill>
-                  <a:srgbClr val="5D5A54"/>
-                </a:solidFill>
-                <a:latin typeface="Inter Tight"/>
-              </a:rPr>
-              <a:t>Grossmann and Kross, Psychological Science, 2014</a:t>
-            </a:r>
-          </a:p>
-        </p:txBody>
-      </p:sp>
-    </p:spTree>
-  </p:cSld>
-  <p:clrMapOvr>
-    <a:masterClrMapping/>
-  </p:clrMapOvr>
-</p:sld>
-</file>
-
-<file path=ppt/slides/slide5.xml><?xml version="1.0" encoding="utf-8"?>
-<p:sld xmlns:a="http://schemas.openxmlformats.org/drawingml/2006/main" xmlns:p="http://schemas.openxmlformats.org/presentationml/2006/main" xmlns:r="http://schemas.openxmlformats.org/officeDocument/2006/relationships">
-  <p:cSld>
-    <p:bg>
-      <p:bgPr>
-        <a:solidFill>
-          <a:srgbClr val="0B2D5B"/>
-        </a:solidFill>
-        <a:effectLst/>
-      </p:bgPr>
-    </p:bg>
-    <p:spTree>
-      <p:nvGrpSpPr>
-        <p:cNvPr id="1" name=""/>
-        <p:cNvGrpSpPr/>
-        <p:nvPr/>
-      </p:nvGrpSpPr>
-      <p:grpSpPr/>
-      <p:sp>
-        <p:nvSpPr>
-          <p:cNvPr id="2" name="Rectangle 1"/>
-          <p:cNvSpPr/>
-          <p:nvPr/>
-        </p:nvSpPr>
-        <p:spPr>
-          <a:xfrm>
-            <a:off x="548640" y="502920"/>
-            <a:ext cx="457200" cy="54864"/>
-          </a:xfrm>
-          <a:prstGeom prst="rect">
-            <a:avLst/>
-          </a:prstGeom>
-          <a:solidFill>
-            <a:srgbClr val="F47B20"/>
-          </a:solidFill>
-          <a:ln>
-            <a:noFill/>
-          </a:ln>
-          <a:effectLst/>
-        </p:spPr>
-        <p:style>
-          <a:lnRef idx="1">
-            <a:schemeClr val="accent1"/>
-          </a:lnRef>
-          <a:fillRef idx="3">
-            <a:schemeClr val="accent1"/>
-          </a:fillRef>
-          <a:effectRef idx="2">
-            <a:schemeClr val="accent1"/>
-          </a:effectRef>
-          <a:fontRef idx="minor">
-            <a:schemeClr val="lt1"/>
-          </a:fontRef>
-        </p:style>
-        <p:txBody>
-          <a:bodyPr rtlCol="0" anchor="ctr"/>
-          <a:lstStyle/>
-          <a:p>
-            <a:pPr algn="ctr"/>
-          </a:p>
-        </p:txBody>
-      </p:sp>
-      <p:sp>
-        <p:nvSpPr>
-          <p:cNvPr id="3" name="TextBox 2"/>
-          <p:cNvSpPr txBox="1"/>
-          <p:nvPr/>
-        </p:nvSpPr>
-        <p:spPr>
-          <a:xfrm>
-            <a:off x="1143000" y="393192"/>
-            <a:ext cx="8229600" cy="274320"/>
-          </a:xfrm>
-          <a:prstGeom prst="rect">
-            <a:avLst/>
-          </a:prstGeom>
-          <a:noFill/>
-        </p:spPr>
-        <p:txBody>
-          <a:bodyPr wrap="square" anchor="t" lIns="0" rIns="0" tIns="0" bIns="0">
-            <a:spAutoFit/>
-          </a:bodyPr>
-          <a:lstStyle/>
-          <a:p>
-            <a:pPr algn="l">
-              <a:spcAft>
-                <a:spcPts val="540"/>
-              </a:spcAft>
-            </a:pPr>
-            <a:r>
-              <a:rPr sz="1200" b="1" i="0">
-                <a:solidFill>
-                  <a:srgbClr val="5D5A54"/>
-                </a:solidFill>
-                <a:latin typeface="Inter Tight"/>
-              </a:rPr>
-              <a:t>THE REPAIR KIT</a:t>
-            </a:r>
-          </a:p>
-        </p:txBody>
-      </p:sp>
-      <p:sp>
-        <p:nvSpPr>
-          <p:cNvPr id="4" name="TextBox 3"/>
-          <p:cNvSpPr txBox="1"/>
-          <p:nvPr/>
-        </p:nvSpPr>
-        <p:spPr>
-          <a:xfrm>
-            <a:off x="8229600" y="6400800"/>
-            <a:ext cx="3410712" cy="274320"/>
-          </a:xfrm>
-          <a:prstGeom prst="rect">
-            <a:avLst/>
-          </a:prstGeom>
-          <a:noFill/>
-        </p:spPr>
-        <p:txBody>
-          <a:bodyPr wrap="square" anchor="t" lIns="0" rIns="0" tIns="0" bIns="0">
-            <a:spAutoFit/>
-          </a:bodyPr>
-          <a:lstStyle/>
-          <a:p>
-            <a:pPr algn="r">
-              <a:spcAft>
-                <a:spcPts val="450"/>
-              </a:spcAft>
-            </a:pPr>
-            <a:r>
-              <a:rPr sz="1000" b="0" i="0">
-                <a:solidFill>
-                  <a:srgbClr val="5D5A54"/>
-                </a:solidFill>
-                <a:latin typeface="Inter Tight"/>
-              </a:rPr>
-              <a:t>Beaver Counseling</a:t>
-            </a:r>
-          </a:p>
-        </p:txBody>
-      </p:sp>
-      <p:sp>
-        <p:nvSpPr>
-          <p:cNvPr id="5" name="TextBox 4"/>
-          <p:cNvSpPr txBox="1"/>
-          <p:nvPr/>
-        </p:nvSpPr>
-        <p:spPr>
-          <a:xfrm>
-            <a:off x="822960" y="2011680"/>
-            <a:ext cx="10515600" cy="1463040"/>
-          </a:xfrm>
-          <a:prstGeom prst="rect">
-            <a:avLst/>
-          </a:prstGeom>
-          <a:noFill/>
-        </p:spPr>
-        <p:txBody>
-          <a:bodyPr wrap="square" anchor="b" lIns="0" rIns="0" tIns="0" bIns="0">
-            <a:spAutoFit/>
-          </a:bodyPr>
-          <a:lstStyle/>
-          <a:p>
-            <a:pPr algn="l">
-              <a:spcAft>
-                <a:spcPts val="2700"/>
-              </a:spcAft>
-            </a:pPr>
-            <a:r>
-              <a:rPr sz="6000" b="1" i="0">
-                <a:solidFill>
-                  <a:srgbClr val="FFFFFF"/>
-                </a:solidFill>
-                <a:latin typeface="Source Serif 4"/>
-              </a:rPr>
-              <a:t>The Repair Kit</a:t>
-            </a:r>
-          </a:p>
-        </p:txBody>
-      </p:sp>
-      <p:sp>
-        <p:nvSpPr>
-          <p:cNvPr id="6" name="TextBox 5"/>
-          <p:cNvSpPr txBox="1"/>
-          <p:nvPr/>
-        </p:nvSpPr>
-        <p:spPr>
-          <a:xfrm>
-            <a:off x="822960" y="3611880"/>
-            <a:ext cx="10515600" cy="914400"/>
-          </a:xfrm>
-          <a:prstGeom prst="rect">
-            <a:avLst/>
-          </a:prstGeom>
-          <a:noFill/>
-        </p:spPr>
-        <p:txBody>
-          <a:bodyPr wrap="square" anchor="t" lIns="0" rIns="0" tIns="0" bIns="0">
-            <a:spAutoFit/>
-          </a:bodyPr>
-          <a:lstStyle/>
-          <a:p>
-            <a:pPr algn="l">
-              <a:spcAft>
-                <a:spcPts val="1080"/>
-              </a:spcAft>
-            </a:pPr>
-            <a:r>
-              <a:rPr sz="2400" b="0" i="1">
-                <a:solidFill>
-                  <a:srgbClr val="E8E4DA"/>
-                </a:solidFill>
-                <a:latin typeface="Source Serif 4"/>
-              </a:rPr>
-              <a:t>Which parts of sorry actually matter.</a:t>
-            </a:r>
-          </a:p>
-        </p:txBody>
-      </p:sp>
-      <p:sp>
-        <p:nvSpPr>
-          <p:cNvPr id="7" name="TextBox 6"/>
-          <p:cNvSpPr txBox="1"/>
-          <p:nvPr/>
-        </p:nvSpPr>
-        <p:spPr>
-          <a:xfrm>
-            <a:off x="822960" y="6035040"/>
-            <a:ext cx="7315200" cy="365760"/>
-          </a:xfrm>
-          <a:prstGeom prst="rect">
-            <a:avLst/>
-          </a:prstGeom>
-          <a:noFill/>
-        </p:spPr>
-        <p:txBody>
-          <a:bodyPr wrap="square" anchor="t" lIns="0" rIns="0" tIns="0" bIns="0">
-            <a:spAutoFit/>
-          </a:bodyPr>
-          <a:lstStyle/>
-          <a:p>
-            <a:pPr algn="l">
-              <a:spcAft>
-                <a:spcPts val="585"/>
-              </a:spcAft>
-            </a:pPr>
-            <a:r>
-              <a:rPr sz="1300" b="0" i="0">
-                <a:solidFill>
-                  <a:srgbClr val="E8E4DA"/>
-                </a:solidFill>
-                <a:latin typeface="Inter Tight"/>
-              </a:rPr>
-              <a:t>Beaver Upper School · Counseling</a:t>
+                <a:latin typeface="Source Serif 4"/>
+              </a:rPr>
+              <a:t>People who refused felt more powerful afterward. The relationship got nothing.</a:t>
             </a:r>
           </a:p>
         </p:txBody>
@@ -8596,7 +8702,7 @@
                 </a:solidFill>
                 <a:latin typeface="Inter Tight"/>
               </a:rPr>
-              <a:t>GUESS THE RANKING</a:t>
+              <a:t>STEP BACK</a:t>
             </a:r>
           </a:p>
         </p:txBody>
@@ -8642,14 +8748,97 @@
       </p:sp>
       <p:sp>
         <p:nvSpPr>
-          <p:cNvPr id="5" name="TextBox 4"/>
+          <p:cNvPr id="5" name="Rectangle 4"/>
+          <p:cNvSpPr/>
+          <p:nvPr/>
+        </p:nvSpPr>
+        <p:spPr>
+          <a:xfrm>
+            <a:off x="822960" y="1371600"/>
+            <a:ext cx="73152" cy="3566160"/>
+          </a:xfrm>
+          <a:prstGeom prst="rect">
+            <a:avLst/>
+          </a:prstGeom>
+          <a:solidFill>
+            <a:srgbClr val="F47B20"/>
+          </a:solidFill>
+          <a:ln>
+            <a:noFill/>
+          </a:ln>
+          <a:effectLst/>
+        </p:spPr>
+        <p:style>
+          <a:lnRef idx="1">
+            <a:schemeClr val="accent1"/>
+          </a:lnRef>
+          <a:fillRef idx="3">
+            <a:schemeClr val="accent1"/>
+          </a:fillRef>
+          <a:effectRef idx="2">
+            <a:schemeClr val="accent1"/>
+          </a:effectRef>
+          <a:fontRef idx="minor">
+            <a:schemeClr val="lt1"/>
+          </a:fontRef>
+        </p:style>
+        <p:txBody>
+          <a:bodyPr rtlCol="0" anchor="ctr"/>
+          <a:lstStyle/>
+          <a:p>
+            <a:pPr algn="ctr"/>
+          </a:p>
+        </p:txBody>
+      </p:sp>
+      <p:sp>
+        <p:nvSpPr>
+          <p:cNvPr id="6" name="TextBox 5"/>
           <p:cNvSpPr txBox="1"/>
           <p:nvPr/>
         </p:nvSpPr>
         <p:spPr>
           <a:xfrm>
-            <a:off x="822960" y="1005840"/>
-            <a:ext cx="10515600" cy="1097280"/>
+            <a:off x="1188720" y="1371600"/>
+            <a:ext cx="10058400" cy="3566160"/>
+          </a:xfrm>
+          <a:prstGeom prst="rect">
+            <a:avLst/>
+          </a:prstGeom>
+          <a:noFill/>
+        </p:spPr>
+        <p:txBody>
+          <a:bodyPr wrap="square" anchor="ctr" lIns="0" rIns="0" tIns="0" bIns="0">
+            <a:spAutoFit/>
+          </a:bodyPr>
+          <a:lstStyle/>
+          <a:p>
+            <a:pPr algn="l">
+              <a:spcAft>
+                <a:spcPts val="1800"/>
+              </a:spcAft>
+            </a:pPr>
+            <a:r>
+              <a:rPr sz="4000" b="0" i="1">
+                <a:solidFill>
+                  <a:srgbClr val="1C1B19"/>
+                </a:solidFill>
+                <a:latin typeface="Source Serif 4"/>
+              </a:rPr>
+              <a:t>Think of a fight. Now tell it in the third person.</a:t>
+            </a:r>
+          </a:p>
+        </p:txBody>
+      </p:sp>
+      <p:sp>
+        <p:nvSpPr>
+          <p:cNvPr id="7" name="TextBox 6"/>
+          <p:cNvSpPr txBox="1"/>
+          <p:nvPr/>
+        </p:nvSpPr>
+        <p:spPr>
+          <a:xfrm>
+            <a:off x="1188720" y="5120640"/>
+            <a:ext cx="10058400" cy="914400"/>
           </a:xfrm>
           <a:prstGeom prst="rect">
             <a:avLst/>
@@ -8664,485 +8853,17 @@
           <a:p>
             <a:pPr algn="l">
               <a:spcAft>
-                <a:spcPts val="1620"/>
-              </a:spcAft>
-            </a:pPr>
-            <a:r>
-              <a:rPr sz="3600" b="1" i="0">
-                <a:solidFill>
-                  <a:srgbClr val="1C1B19"/>
-                </a:solidFill>
-                <a:latin typeface="Source Serif 4"/>
-              </a:rPr>
-              <a:t>Which part of an apology matters most?</a:t>
-            </a:r>
-          </a:p>
-        </p:txBody>
-      </p:sp>
-      <p:sp>
-        <p:nvSpPr>
-          <p:cNvPr id="6" name="TextBox 5"/>
-          <p:cNvSpPr txBox="1"/>
-          <p:nvPr/>
-        </p:nvSpPr>
-        <p:spPr>
-          <a:xfrm>
-            <a:off x="822960" y="2057400"/>
-            <a:ext cx="548640" cy="670560"/>
-          </a:xfrm>
-          <a:prstGeom prst="rect">
-            <a:avLst/>
-          </a:prstGeom>
-          <a:noFill/>
-        </p:spPr>
-        <p:txBody>
-          <a:bodyPr wrap="square" anchor="t" lIns="0" rIns="0" tIns="0" bIns="0">
-            <a:spAutoFit/>
-          </a:bodyPr>
-          <a:lstStyle/>
-          <a:p>
-            <a:pPr algn="l">
-              <a:spcAft>
-                <a:spcPts val="1170"/>
-              </a:spcAft>
-            </a:pPr>
-            <a:r>
-              <a:rPr sz="2600" b="1" i="0">
-                <a:solidFill>
-                  <a:srgbClr val="F47B20"/>
-                </a:solidFill>
-                <a:latin typeface="Source Serif 4"/>
-              </a:rPr>
-              <a:t>1</a:t>
-            </a:r>
-          </a:p>
-        </p:txBody>
-      </p:sp>
-      <p:sp>
-        <p:nvSpPr>
-          <p:cNvPr id="7" name="TextBox 6"/>
-          <p:cNvSpPr txBox="1"/>
-          <p:nvPr/>
-        </p:nvSpPr>
-        <p:spPr>
-          <a:xfrm>
-            <a:off x="1463040" y="2093976"/>
-            <a:ext cx="9875520" cy="670560"/>
-          </a:xfrm>
-          <a:prstGeom prst="rect">
-            <a:avLst/>
-          </a:prstGeom>
-          <a:noFill/>
-        </p:spPr>
-        <p:txBody>
-          <a:bodyPr wrap="square" anchor="t" lIns="0" rIns="0" tIns="0" bIns="0">
-            <a:spAutoFit/>
-          </a:bodyPr>
-          <a:lstStyle/>
-          <a:p>
-            <a:pPr algn="l">
-              <a:spcAft>
-                <a:spcPts val="945"/>
-              </a:spcAft>
-            </a:pPr>
-            <a:r>
-              <a:rPr sz="2100" b="1" i="0">
-                <a:solidFill>
-                  <a:srgbClr val="1C1B19"/>
-                </a:solidFill>
-                <a:latin typeface="Source Serif 4"/>
-              </a:rPr>
-              <a:t>"I'm sorry."</a:t>
-            </a:r>
-          </a:p>
-        </p:txBody>
-      </p:sp>
-      <p:sp>
-        <p:nvSpPr>
-          <p:cNvPr id="8" name="TextBox 7"/>
-          <p:cNvSpPr txBox="1"/>
-          <p:nvPr/>
-        </p:nvSpPr>
-        <p:spPr>
-          <a:xfrm>
-            <a:off x="822960" y="2727960"/>
-            <a:ext cx="548640" cy="670560"/>
-          </a:xfrm>
-          <a:prstGeom prst="rect">
-            <a:avLst/>
-          </a:prstGeom>
-          <a:noFill/>
-        </p:spPr>
-        <p:txBody>
-          <a:bodyPr wrap="square" anchor="t" lIns="0" rIns="0" tIns="0" bIns="0">
-            <a:spAutoFit/>
-          </a:bodyPr>
-          <a:lstStyle/>
-          <a:p>
-            <a:pPr algn="l">
-              <a:spcAft>
-                <a:spcPts val="1170"/>
-              </a:spcAft>
-            </a:pPr>
-            <a:r>
-              <a:rPr sz="2600" b="1" i="0">
-                <a:solidFill>
-                  <a:srgbClr val="F47B20"/>
-                </a:solidFill>
-                <a:latin typeface="Source Serif 4"/>
-              </a:rPr>
-              <a:t>2</a:t>
-            </a:r>
-          </a:p>
-        </p:txBody>
-      </p:sp>
-      <p:sp>
-        <p:nvSpPr>
-          <p:cNvPr id="9" name="TextBox 8"/>
-          <p:cNvSpPr txBox="1"/>
-          <p:nvPr/>
-        </p:nvSpPr>
-        <p:spPr>
-          <a:xfrm>
-            <a:off x="1463040" y="2764536"/>
-            <a:ext cx="9875520" cy="670560"/>
-          </a:xfrm>
-          <a:prstGeom prst="rect">
-            <a:avLst/>
-          </a:prstGeom>
-          <a:noFill/>
-        </p:spPr>
-        <p:txBody>
-          <a:bodyPr wrap="square" anchor="t" lIns="0" rIns="0" tIns="0" bIns="0">
-            <a:spAutoFit/>
-          </a:bodyPr>
-          <a:lstStyle/>
-          <a:p>
-            <a:pPr algn="l">
-              <a:spcAft>
-                <a:spcPts val="945"/>
-              </a:spcAft>
-            </a:pPr>
-            <a:r>
-              <a:rPr sz="2100" b="1" i="0">
-                <a:solidFill>
-                  <a:srgbClr val="1C1B19"/>
-                </a:solidFill>
-                <a:latin typeface="Source Serif 4"/>
-              </a:rPr>
-              <a:t>"Here's why it happened."</a:t>
-            </a:r>
-          </a:p>
-        </p:txBody>
-      </p:sp>
-      <p:sp>
-        <p:nvSpPr>
-          <p:cNvPr id="10" name="TextBox 9"/>
-          <p:cNvSpPr txBox="1"/>
-          <p:nvPr/>
-        </p:nvSpPr>
-        <p:spPr>
-          <a:xfrm>
-            <a:off x="822960" y="3398520"/>
-            <a:ext cx="548640" cy="670560"/>
-          </a:xfrm>
-          <a:prstGeom prst="rect">
-            <a:avLst/>
-          </a:prstGeom>
-          <a:noFill/>
-        </p:spPr>
-        <p:txBody>
-          <a:bodyPr wrap="square" anchor="t" lIns="0" rIns="0" tIns="0" bIns="0">
-            <a:spAutoFit/>
-          </a:bodyPr>
-          <a:lstStyle/>
-          <a:p>
-            <a:pPr algn="l">
-              <a:spcAft>
-                <a:spcPts val="1170"/>
-              </a:spcAft>
-            </a:pPr>
-            <a:r>
-              <a:rPr sz="2600" b="1" i="0">
-                <a:solidFill>
-                  <a:srgbClr val="F47B20"/>
-                </a:solidFill>
-                <a:latin typeface="Source Serif 4"/>
-              </a:rPr>
-              <a:t>3</a:t>
-            </a:r>
-          </a:p>
-        </p:txBody>
-      </p:sp>
-      <p:sp>
-        <p:nvSpPr>
-          <p:cNvPr id="11" name="TextBox 10"/>
-          <p:cNvSpPr txBox="1"/>
-          <p:nvPr/>
-        </p:nvSpPr>
-        <p:spPr>
-          <a:xfrm>
-            <a:off x="1463040" y="3435096"/>
-            <a:ext cx="9875520" cy="670560"/>
-          </a:xfrm>
-          <a:prstGeom prst="rect">
-            <a:avLst/>
-          </a:prstGeom>
-          <a:noFill/>
-        </p:spPr>
-        <p:txBody>
-          <a:bodyPr wrap="square" anchor="t" lIns="0" rIns="0" tIns="0" bIns="0">
-            <a:spAutoFit/>
-          </a:bodyPr>
-          <a:lstStyle/>
-          <a:p>
-            <a:pPr algn="l">
-              <a:spcAft>
-                <a:spcPts val="945"/>
-              </a:spcAft>
-            </a:pPr>
-            <a:r>
-              <a:rPr sz="2100" b="1" i="0">
-                <a:solidFill>
-                  <a:srgbClr val="1C1B19"/>
-                </a:solidFill>
-                <a:latin typeface="Source Serif 4"/>
-              </a:rPr>
-              <a:t>"I did this. It was wrong."</a:t>
-            </a:r>
-          </a:p>
-        </p:txBody>
-      </p:sp>
-      <p:sp>
-        <p:nvSpPr>
-          <p:cNvPr id="12" name="TextBox 11"/>
-          <p:cNvSpPr txBox="1"/>
-          <p:nvPr/>
-        </p:nvSpPr>
-        <p:spPr>
-          <a:xfrm>
-            <a:off x="822960" y="4069080"/>
-            <a:ext cx="548640" cy="670560"/>
-          </a:xfrm>
-          <a:prstGeom prst="rect">
-            <a:avLst/>
-          </a:prstGeom>
-          <a:noFill/>
-        </p:spPr>
-        <p:txBody>
-          <a:bodyPr wrap="square" anchor="t" lIns="0" rIns="0" tIns="0" bIns="0">
-            <a:spAutoFit/>
-          </a:bodyPr>
-          <a:lstStyle/>
-          <a:p>
-            <a:pPr algn="l">
-              <a:spcAft>
-                <a:spcPts val="1170"/>
-              </a:spcAft>
-            </a:pPr>
-            <a:r>
-              <a:rPr sz="2600" b="1" i="0">
-                <a:solidFill>
-                  <a:srgbClr val="F47B20"/>
-                </a:solidFill>
-                <a:latin typeface="Source Serif 4"/>
-              </a:rPr>
-              <a:t>4</a:t>
-            </a:r>
-          </a:p>
-        </p:txBody>
-      </p:sp>
-      <p:sp>
-        <p:nvSpPr>
-          <p:cNvPr id="13" name="TextBox 12"/>
-          <p:cNvSpPr txBox="1"/>
-          <p:nvPr/>
-        </p:nvSpPr>
-        <p:spPr>
-          <a:xfrm>
-            <a:off x="1463040" y="4105656"/>
-            <a:ext cx="9875520" cy="670560"/>
-          </a:xfrm>
-          <a:prstGeom prst="rect">
-            <a:avLst/>
-          </a:prstGeom>
-          <a:noFill/>
-        </p:spPr>
-        <p:txBody>
-          <a:bodyPr wrap="square" anchor="t" lIns="0" rIns="0" tIns="0" bIns="0">
-            <a:spAutoFit/>
-          </a:bodyPr>
-          <a:lstStyle/>
-          <a:p>
-            <a:pPr algn="l">
-              <a:spcAft>
-                <a:spcPts val="945"/>
-              </a:spcAft>
-            </a:pPr>
-            <a:r>
-              <a:rPr sz="2100" b="1" i="0">
-                <a:solidFill>
-                  <a:srgbClr val="1C1B19"/>
-                </a:solidFill>
-                <a:latin typeface="Source Serif 4"/>
-              </a:rPr>
-              <a:t>"I won't do it again."</a:t>
-            </a:r>
-          </a:p>
-        </p:txBody>
-      </p:sp>
-      <p:sp>
-        <p:nvSpPr>
-          <p:cNvPr id="14" name="TextBox 13"/>
-          <p:cNvSpPr txBox="1"/>
-          <p:nvPr/>
-        </p:nvSpPr>
-        <p:spPr>
-          <a:xfrm>
-            <a:off x="822960" y="4739640"/>
-            <a:ext cx="548640" cy="670560"/>
-          </a:xfrm>
-          <a:prstGeom prst="rect">
-            <a:avLst/>
-          </a:prstGeom>
-          <a:noFill/>
-        </p:spPr>
-        <p:txBody>
-          <a:bodyPr wrap="square" anchor="t" lIns="0" rIns="0" tIns="0" bIns="0">
-            <a:spAutoFit/>
-          </a:bodyPr>
-          <a:lstStyle/>
-          <a:p>
-            <a:pPr algn="l">
-              <a:spcAft>
-                <a:spcPts val="1170"/>
-              </a:spcAft>
-            </a:pPr>
-            <a:r>
-              <a:rPr sz="2600" b="1" i="0">
-                <a:solidFill>
-                  <a:srgbClr val="F47B20"/>
-                </a:solidFill>
-                <a:latin typeface="Source Serif 4"/>
-              </a:rPr>
-              <a:t>5</a:t>
-            </a:r>
-          </a:p>
-        </p:txBody>
-      </p:sp>
-      <p:sp>
-        <p:nvSpPr>
-          <p:cNvPr id="15" name="TextBox 14"/>
-          <p:cNvSpPr txBox="1"/>
-          <p:nvPr/>
-        </p:nvSpPr>
-        <p:spPr>
-          <a:xfrm>
-            <a:off x="1463040" y="4776216"/>
-            <a:ext cx="9875520" cy="670560"/>
-          </a:xfrm>
-          <a:prstGeom prst="rect">
-            <a:avLst/>
-          </a:prstGeom>
-          <a:noFill/>
-        </p:spPr>
-        <p:txBody>
-          <a:bodyPr wrap="square" anchor="t" lIns="0" rIns="0" tIns="0" bIns="0">
-            <a:spAutoFit/>
-          </a:bodyPr>
-          <a:lstStyle/>
-          <a:p>
-            <a:pPr algn="l">
-              <a:spcAft>
-                <a:spcPts val="945"/>
-              </a:spcAft>
-            </a:pPr>
-            <a:r>
-              <a:rPr sz="2100" b="1" i="0">
-                <a:solidFill>
-                  <a:srgbClr val="1C1B19"/>
-                </a:solidFill>
-                <a:latin typeface="Source Serif 4"/>
-              </a:rPr>
-              <a:t>"Here's how I'll fix it."</a:t>
-            </a:r>
-          </a:p>
-        </p:txBody>
-      </p:sp>
-      <p:sp>
-        <p:nvSpPr>
-          <p:cNvPr id="16" name="TextBox 15"/>
-          <p:cNvSpPr txBox="1"/>
-          <p:nvPr/>
-        </p:nvSpPr>
-        <p:spPr>
-          <a:xfrm>
-            <a:off x="822960" y="5410200"/>
-            <a:ext cx="548640" cy="670560"/>
-          </a:xfrm>
-          <a:prstGeom prst="rect">
-            <a:avLst/>
-          </a:prstGeom>
-          <a:noFill/>
-        </p:spPr>
-        <p:txBody>
-          <a:bodyPr wrap="square" anchor="t" lIns="0" rIns="0" tIns="0" bIns="0">
-            <a:spAutoFit/>
-          </a:bodyPr>
-          <a:lstStyle/>
-          <a:p>
-            <a:pPr algn="l">
-              <a:spcAft>
-                <a:spcPts val="1170"/>
-              </a:spcAft>
-            </a:pPr>
-            <a:r>
-              <a:rPr sz="2600" b="1" i="0">
-                <a:solidFill>
-                  <a:srgbClr val="F47B20"/>
-                </a:solidFill>
-                <a:latin typeface="Source Serif 4"/>
-              </a:rPr>
-              <a:t>6</a:t>
-            </a:r>
-          </a:p>
-        </p:txBody>
-      </p:sp>
-      <p:sp>
-        <p:nvSpPr>
-          <p:cNvPr id="17" name="TextBox 16"/>
-          <p:cNvSpPr txBox="1"/>
-          <p:nvPr/>
-        </p:nvSpPr>
-        <p:spPr>
-          <a:xfrm>
-            <a:off x="1463040" y="5446776"/>
-            <a:ext cx="9875520" cy="670560"/>
-          </a:xfrm>
-          <a:prstGeom prst="rect">
-            <a:avLst/>
-          </a:prstGeom>
-          <a:noFill/>
-        </p:spPr>
-        <p:txBody>
-          <a:bodyPr wrap="square" anchor="t" lIns="0" rIns="0" tIns="0" bIns="0">
-            <a:spAutoFit/>
-          </a:bodyPr>
-          <a:lstStyle/>
-          <a:p>
-            <a:pPr algn="l">
-              <a:spcAft>
-                <a:spcPts val="945"/>
-              </a:spcAft>
-            </a:pPr>
-            <a:r>
-              <a:rPr sz="2100" b="1" i="0">
-                <a:solidFill>
-                  <a:srgbClr val="1C1B19"/>
-                </a:solidFill>
-                <a:latin typeface="Source Serif 4"/>
-              </a:rPr>
-              <a:t>"Will you forgive me?"</a:t>
+                <a:spcPts val="810"/>
+              </a:spcAft>
+            </a:pPr>
+            <a:r>
+              <a:rPr sz="1800" b="0" i="0">
+                <a:solidFill>
+                  <a:srgbClr val="5D5A54"/>
+                </a:solidFill>
+                <a:latin typeface="Inter Tight"/>
+              </a:rPr>
+              <a:t>"Why is Jae so angry at Sam?" instead of "Why is Sam so angry at me?" Private. Write it for yourself.</a:t>
             </a:r>
           </a:p>
         </p:txBody>
@@ -9251,7 +8972,7 @@
                 </a:solidFill>
                 <a:latin typeface="Inter Tight"/>
               </a:rPr>
-              <a:t>WHAT MAKES AN APOLOGY WORK</a:t>
+              <a:t>THE REPAIR SEQUENCE</a:t>
             </a:r>
           </a:p>
         </p:txBody>
@@ -9329,7 +9050,7 @@
                 </a:solidFill>
                 <a:latin typeface="Source Serif 4"/>
               </a:rPr>
-              <a:t>What 755 people said</a:t>
+              <a:t>Cool down, own it, make it right, listen.</a:t>
             </a:r>
           </a:p>
         </p:txBody>
@@ -9342,8 +9063,8 @@
         </p:nvSpPr>
         <p:spPr>
           <a:xfrm>
-            <a:off x="822960" y="2194560"/>
-            <a:ext cx="548640" cy="1005840"/>
+            <a:off x="822960" y="2057400"/>
+            <a:ext cx="548640" cy="804672"/>
           </a:xfrm>
           <a:prstGeom prst="rect">
             <a:avLst/>
@@ -9381,8 +9102,8 @@
         </p:nvSpPr>
         <p:spPr>
           <a:xfrm>
-            <a:off x="1463040" y="2231136"/>
-            <a:ext cx="9875520" cy="1005840"/>
+            <a:off x="1463040" y="2093976"/>
+            <a:ext cx="9875520" cy="804672"/>
           </a:xfrm>
           <a:prstGeom prst="rect">
             <a:avLst/>
@@ -9407,7 +9128,7 @@
                 </a:solidFill>
                 <a:latin typeface="Source Serif 4"/>
               </a:rPr>
-              <a:t>Taking responsibility.</a:t>
+              <a:t>Cool down first.</a:t>
             </a:r>
           </a:p>
           <a:p>
@@ -9423,7 +9144,7 @@
                 </a:solidFill>
                 <a:latin typeface="Source Serif 4"/>
               </a:rPr>
-              <a:t>Specific, with no "if" and no "but." Mattered most.</a:t>
+              <a:t>Ready when you're curious about their side.</a:t>
             </a:r>
           </a:p>
         </p:txBody>
@@ -9436,8 +9157,8 @@
         </p:nvSpPr>
         <p:spPr>
           <a:xfrm>
-            <a:off x="822960" y="3200400"/>
-            <a:ext cx="548640" cy="1005840"/>
+            <a:off x="822960" y="2862072"/>
+            <a:ext cx="548640" cy="804672"/>
           </a:xfrm>
           <a:prstGeom prst="rect">
             <a:avLst/>
@@ -9475,8 +9196,8 @@
         </p:nvSpPr>
         <p:spPr>
           <a:xfrm>
-            <a:off x="1463040" y="3236976"/>
-            <a:ext cx="9875520" cy="1005840"/>
+            <a:off x="1463040" y="2898648"/>
+            <a:ext cx="9875520" cy="804672"/>
           </a:xfrm>
           <a:prstGeom prst="rect">
             <a:avLst/>
@@ -9501,7 +9222,7 @@
                 </a:solidFill>
                 <a:latin typeface="Source Serif 4"/>
               </a:rPr>
-              <a:t>An offer to fix it.</a:t>
+              <a:t>Lead with responsibility.</a:t>
             </a:r>
           </a:p>
           <a:p>
@@ -9517,7 +9238,7 @@
                 </a:solidFill>
                 <a:latin typeface="Source Serif 4"/>
               </a:rPr>
-              <a:t>Delete it, tell the group, make it right.</a:t>
+              <a:t>"I shouldn't have posted your message."</a:t>
             </a:r>
           </a:p>
         </p:txBody>
@@ -9530,8 +9251,8 @@
         </p:nvSpPr>
         <p:spPr>
           <a:xfrm>
-            <a:off x="822960" y="4206240"/>
-            <a:ext cx="548640" cy="1005840"/>
+            <a:off x="822960" y="3666744"/>
+            <a:ext cx="548640" cy="804672"/>
           </a:xfrm>
           <a:prstGeom prst="rect">
             <a:avLst/>
@@ -9569,8 +9290,8 @@
         </p:nvSpPr>
         <p:spPr>
           <a:xfrm>
-            <a:off x="1463040" y="4242816"/>
-            <a:ext cx="9875520" cy="1005840"/>
+            <a:off x="1463040" y="3703320"/>
+            <a:ext cx="9875520" cy="804672"/>
           </a:xfrm>
           <a:prstGeom prst="rect">
             <a:avLst/>
@@ -9595,7 +9316,7 @@
                 </a:solidFill>
                 <a:latin typeface="Source Serif 4"/>
               </a:rPr>
-              <a:t>Regret, explanation, a promise.</a:t>
+              <a:t>Offer to repair, and do it.</a:t>
             </a:r>
           </a:p>
           <a:p>
@@ -9611,7 +9332,7 @@
                 </a:solidFill>
                 <a:latin typeface="Source Serif 4"/>
               </a:rPr>
-              <a:t>All help, about equally.</a:t>
+              <a:t>The part people skip.</a:t>
             </a:r>
           </a:p>
         </p:txBody>
@@ -9624,8 +9345,8 @@
         </p:nvSpPr>
         <p:spPr>
           <a:xfrm>
-            <a:off x="822960" y="5212080"/>
-            <a:ext cx="548640" cy="1005840"/>
+            <a:off x="822960" y="4471416"/>
+            <a:ext cx="548640" cy="804672"/>
           </a:xfrm>
           <a:prstGeom prst="rect">
             <a:avLst/>
@@ -9663,8 +9384,8 @@
         </p:nvSpPr>
         <p:spPr>
           <a:xfrm>
-            <a:off x="1463040" y="5248656"/>
-            <a:ext cx="9875520" cy="1005840"/>
+            <a:off x="1463040" y="4507992"/>
+            <a:ext cx="9875520" cy="804672"/>
           </a:xfrm>
           <a:prstGeom prst="rect">
             <a:avLst/>
@@ -9689,7 +9410,7 @@
                 </a:solidFill>
                 <a:latin typeface="Source Serif 4"/>
               </a:rPr>
-              <a:t>Asking forgiveness.</a:t>
+              <a:t>Drop the "but."</a:t>
             </a:r>
           </a:p>
           <a:p>
@@ -9705,7 +9426,101 @@
                 </a:solidFill>
                 <a:latin typeface="Source Serif 4"/>
               </a:rPr>
-              <a:t>Mattered least. It can feel like pressure.</a:t>
+              <a:t>"Sorry, but you started it" cancels it.</a:t>
+            </a:r>
+          </a:p>
+        </p:txBody>
+      </p:sp>
+      <p:sp>
+        <p:nvSpPr>
+          <p:cNvPr id="14" name="TextBox 13"/>
+          <p:cNvSpPr txBox="1"/>
+          <p:nvPr/>
+        </p:nvSpPr>
+        <p:spPr>
+          <a:xfrm>
+            <a:off x="822960" y="5276088"/>
+            <a:ext cx="548640" cy="804672"/>
+          </a:xfrm>
+          <a:prstGeom prst="rect">
+            <a:avLst/>
+          </a:prstGeom>
+          <a:noFill/>
+        </p:spPr>
+        <p:txBody>
+          <a:bodyPr wrap="square" anchor="t" lIns="0" rIns="0" tIns="0" bIns="0">
+            <a:spAutoFit/>
+          </a:bodyPr>
+          <a:lstStyle/>
+          <a:p>
+            <a:pPr algn="l">
+              <a:spcAft>
+                <a:spcPts val="1170"/>
+              </a:spcAft>
+            </a:pPr>
+            <a:r>
+              <a:rPr sz="2600" b="1" i="0">
+                <a:solidFill>
+                  <a:srgbClr val="F47B20"/>
+                </a:solidFill>
+                <a:latin typeface="Source Serif 4"/>
+              </a:rPr>
+              <a:t>5</a:t>
+            </a:r>
+          </a:p>
+        </p:txBody>
+      </p:sp>
+      <p:sp>
+        <p:nvSpPr>
+          <p:cNvPr id="15" name="TextBox 14"/>
+          <p:cNvSpPr txBox="1"/>
+          <p:nvPr/>
+        </p:nvSpPr>
+        <p:spPr>
+          <a:xfrm>
+            <a:off x="1463040" y="5312664"/>
+            <a:ext cx="9875520" cy="804672"/>
+          </a:xfrm>
+          <a:prstGeom prst="rect">
+            <a:avLst/>
+          </a:prstGeom>
+          <a:noFill/>
+        </p:spPr>
+        <p:txBody>
+          <a:bodyPr wrap="square" anchor="t" lIns="0" rIns="0" tIns="0" bIns="0">
+            <a:spAutoFit/>
+          </a:bodyPr>
+          <a:lstStyle/>
+          <a:p>
+            <a:pPr algn="l">
+              <a:spcAft>
+                <a:spcPts val="945"/>
+              </a:spcAft>
+            </a:pPr>
+            <a:r>
+              <a:rPr sz="2100" b="1" i="0">
+                <a:solidFill>
+                  <a:srgbClr val="1C1B19"/>
+                </a:solidFill>
+                <a:latin typeface="Source Serif 4"/>
+              </a:rPr>
+              <a:t>Listen to understand.</a:t>
+            </a:r>
+          </a:p>
+          <a:p>
+            <a:pPr algn="l">
+              <a:spcAft>
+                <a:spcPts val="945"/>
+              </a:spcAft>
+            </a:pPr>
+            <a:r>
+              <a:rPr sz="1600" b="0" i="0">
+                <a:solidFill>
+                  <a:srgbClr val="5D5A54"/>
+                </a:solidFill>
+                <a:latin typeface="Source Serif 4"/>
+              </a:rPr>
+              <a:t>"What was it like from your side?"</a:t>
             </a:r>
           </a:p>
         </p:txBody>
@@ -9814,7 +9629,7 @@
                 </a:solidFill>
                 <a:latin typeface="Inter Tight"/>
               </a:rPr>
-              <a:t>WHY IT'S SO HARD</a:t>
+              <a:t>WHICH APOLOGY LANDS?</a:t>
             </a:r>
           </a:p>
         </p:txBody>
@@ -9866,47 +9681,8 @@
         </p:nvSpPr>
         <p:spPr>
           <a:xfrm>
-            <a:off x="822960" y="1463040"/>
-            <a:ext cx="10515600" cy="3291840"/>
-          </a:xfrm>
-          <a:prstGeom prst="rect">
-            <a:avLst/>
-          </a:prstGeom>
-          <a:noFill/>
-        </p:spPr>
-        <p:txBody>
-          <a:bodyPr wrap="square" anchor="ctr" lIns="0" rIns="0" tIns="0" bIns="0">
-            <a:spAutoFit/>
-          </a:bodyPr>
-          <a:lstStyle/>
-          <a:p>
-            <a:pPr algn="l">
-              <a:spcAft>
-                <a:spcPts val="2070"/>
-              </a:spcAft>
-            </a:pPr>
-            <a:r>
-              <a:rPr sz="4600" b="1" i="0">
-                <a:solidFill>
-                  <a:srgbClr val="1C1B19"/>
-                </a:solidFill>
-                <a:latin typeface="Source Serif 4"/>
-              </a:rPr>
-              <a:t>Refusing to apologize feels good. For a minute.</a:t>
-            </a:r>
-          </a:p>
-        </p:txBody>
-      </p:sp>
-      <p:sp>
-        <p:nvSpPr>
-          <p:cNvPr id="6" name="TextBox 5"/>
-          <p:cNvSpPr txBox="1"/>
-          <p:nvPr/>
-        </p:nvSpPr>
-        <p:spPr>
-          <a:xfrm>
-            <a:off x="822960" y="4846320"/>
-            <a:ext cx="10515600" cy="1097280"/>
+            <a:off x="822960" y="1005840"/>
+            <a:ext cx="10515600" cy="914400"/>
           </a:xfrm>
           <a:prstGeom prst="rect">
             <a:avLst/>
@@ -9921,17 +9697,389 @@
           <a:p>
             <a:pPr algn="l">
               <a:spcAft>
-                <a:spcPts val="990"/>
-              </a:spcAft>
-            </a:pPr>
-            <a:r>
-              <a:rPr sz="2200" b="0" i="1">
-                <a:solidFill>
-                  <a:srgbClr val="5D5A54"/>
-                </a:solidFill>
-                <a:latin typeface="Source Serif 4"/>
-              </a:rPr>
-              <a:t>People who refused felt more powerful afterward. The relationship got nothing.</a:t>
+                <a:spcPts val="1530"/>
+              </a:spcAft>
+            </a:pPr>
+            <a:r>
+              <a:rPr sz="3400" b="1" i="0">
+                <a:solidFill>
+                  <a:srgbClr val="1C1B19"/>
+                </a:solidFill>
+                <a:latin typeface="Source Serif 4"/>
+              </a:rPr>
+              <a:t>What would you say or do?</a:t>
+            </a:r>
+          </a:p>
+        </p:txBody>
+      </p:sp>
+      <p:sp>
+        <p:nvSpPr>
+          <p:cNvPr id="6" name="Rectangle 5"/>
+          <p:cNvSpPr/>
+          <p:nvPr/>
+        </p:nvSpPr>
+        <p:spPr>
+          <a:xfrm>
+            <a:off x="822960" y="2103120"/>
+            <a:ext cx="3322320" cy="3840480"/>
+          </a:xfrm>
+          <a:prstGeom prst="rect">
+            <a:avLst/>
+          </a:prstGeom>
+          <a:solidFill>
+            <a:srgbClr val="FFFFFF"/>
+          </a:solidFill>
+          <a:ln w="15875">
+            <a:solidFill>
+              <a:srgbClr val="D8D2C6"/>
+            </a:solidFill>
+          </a:ln>
+          <a:effectLst/>
+        </p:spPr>
+        <p:style>
+          <a:lnRef idx="1">
+            <a:schemeClr val="accent1"/>
+          </a:lnRef>
+          <a:fillRef idx="3">
+            <a:schemeClr val="accent1"/>
+          </a:fillRef>
+          <a:effectRef idx="2">
+            <a:schemeClr val="accent1"/>
+          </a:effectRef>
+          <a:fontRef idx="minor">
+            <a:schemeClr val="lt1"/>
+          </a:fontRef>
+        </p:style>
+        <p:txBody>
+          <a:bodyPr rtlCol="0" anchor="ctr"/>
+          <a:lstStyle/>
+          <a:p>
+            <a:pPr algn="ctr"/>
+          </a:p>
+        </p:txBody>
+      </p:sp>
+      <p:sp>
+        <p:nvSpPr>
+          <p:cNvPr id="7" name="TextBox 6"/>
+          <p:cNvSpPr txBox="1"/>
+          <p:nvPr/>
+        </p:nvSpPr>
+        <p:spPr>
+          <a:xfrm>
+            <a:off x="1051560" y="2286000"/>
+            <a:ext cx="2865120" cy="365760"/>
+          </a:xfrm>
+          <a:prstGeom prst="rect">
+            <a:avLst/>
+          </a:prstGeom>
+          <a:noFill/>
+        </p:spPr>
+        <p:txBody>
+          <a:bodyPr wrap="square" anchor="t" lIns="0" rIns="0" tIns="0" bIns="0">
+            <a:spAutoFit/>
+          </a:bodyPr>
+          <a:lstStyle/>
+          <a:p>
+            <a:pPr algn="l">
+              <a:spcAft>
+                <a:spcPts val="585"/>
+              </a:spcAft>
+            </a:pPr>
+            <a:r>
+              <a:rPr sz="1300" b="1" i="0">
+                <a:solidFill>
+                  <a:srgbClr val="0B2D5B"/>
+                </a:solidFill>
+                <a:latin typeface="Inter Tight"/>
+              </a:rPr>
+              <a:t>YOU AND MEI</a:t>
+            </a:r>
+          </a:p>
+        </p:txBody>
+      </p:sp>
+      <p:sp>
+        <p:nvSpPr>
+          <p:cNvPr id="8" name="TextBox 7"/>
+          <p:cNvSpPr txBox="1"/>
+          <p:nvPr/>
+        </p:nvSpPr>
+        <p:spPr>
+          <a:xfrm>
+            <a:off x="1051560" y="2743200"/>
+            <a:ext cx="2865120" cy="3017520"/>
+          </a:xfrm>
+          <a:prstGeom prst="rect">
+            <a:avLst/>
+          </a:prstGeom>
+          <a:noFill/>
+        </p:spPr>
+        <p:txBody>
+          <a:bodyPr wrap="square" anchor="t" lIns="0" rIns="0" tIns="0" bIns="0">
+            <a:spAutoFit/>
+          </a:bodyPr>
+          <a:lstStyle/>
+          <a:p>
+            <a:pPr algn="l">
+              <a:spcAft>
+                <a:spcPts val="810"/>
+              </a:spcAft>
+            </a:pPr>
+            <a:r>
+              <a:rPr sz="1800" b="0" i="0">
+                <a:solidFill>
+                  <a:srgbClr val="1C1B19"/>
+                </a:solidFill>
+                <a:latin typeface="Source Serif 4"/>
+              </a:rPr>
+              <a:t>You posted Mei's private message in the class group chat as a joke. She's furious and hasn't answered since.</a:t>
+            </a:r>
+          </a:p>
+        </p:txBody>
+      </p:sp>
+      <p:sp>
+        <p:nvSpPr>
+          <p:cNvPr id="9" name="Rectangle 8"/>
+          <p:cNvSpPr/>
+          <p:nvPr/>
+        </p:nvSpPr>
+        <p:spPr>
+          <a:xfrm>
+            <a:off x="4419600" y="2103120"/>
+            <a:ext cx="3322320" cy="3840480"/>
+          </a:xfrm>
+          <a:prstGeom prst="rect">
+            <a:avLst/>
+          </a:prstGeom>
+          <a:solidFill>
+            <a:srgbClr val="FFFFFF"/>
+          </a:solidFill>
+          <a:ln w="15875">
+            <a:solidFill>
+              <a:srgbClr val="D8D2C6"/>
+            </a:solidFill>
+          </a:ln>
+          <a:effectLst/>
+        </p:spPr>
+        <p:style>
+          <a:lnRef idx="1">
+            <a:schemeClr val="accent1"/>
+          </a:lnRef>
+          <a:fillRef idx="3">
+            <a:schemeClr val="accent1"/>
+          </a:fillRef>
+          <a:effectRef idx="2">
+            <a:schemeClr val="accent1"/>
+          </a:effectRef>
+          <a:fontRef idx="minor">
+            <a:schemeClr val="lt1"/>
+          </a:fontRef>
+        </p:style>
+        <p:txBody>
+          <a:bodyPr rtlCol="0" anchor="ctr"/>
+          <a:lstStyle/>
+          <a:p>
+            <a:pPr algn="ctr"/>
+          </a:p>
+        </p:txBody>
+      </p:sp>
+      <p:sp>
+        <p:nvSpPr>
+          <p:cNvPr id="10" name="TextBox 9"/>
+          <p:cNvSpPr txBox="1"/>
+          <p:nvPr/>
+        </p:nvSpPr>
+        <p:spPr>
+          <a:xfrm>
+            <a:off x="4648200" y="2286000"/>
+            <a:ext cx="2865120" cy="365760"/>
+          </a:xfrm>
+          <a:prstGeom prst="rect">
+            <a:avLst/>
+          </a:prstGeom>
+          <a:noFill/>
+        </p:spPr>
+        <p:txBody>
+          <a:bodyPr wrap="square" anchor="t" lIns="0" rIns="0" tIns="0" bIns="0">
+            <a:spAutoFit/>
+          </a:bodyPr>
+          <a:lstStyle/>
+          <a:p>
+            <a:pPr algn="l">
+              <a:spcAft>
+                <a:spcPts val="585"/>
+              </a:spcAft>
+            </a:pPr>
+            <a:r>
+              <a:rPr sz="1300" b="1" i="0">
+                <a:solidFill>
+                  <a:srgbClr val="0B2D5B"/>
+                </a:solidFill>
+                <a:latin typeface="Inter Tight"/>
+              </a:rPr>
+              <a:t>ANDRE</a:t>
+            </a:r>
+          </a:p>
+        </p:txBody>
+      </p:sp>
+      <p:sp>
+        <p:nvSpPr>
+          <p:cNvPr id="11" name="TextBox 10"/>
+          <p:cNvSpPr txBox="1"/>
+          <p:nvPr/>
+        </p:nvSpPr>
+        <p:spPr>
+          <a:xfrm>
+            <a:off x="4648200" y="2743200"/>
+            <a:ext cx="2865120" cy="3017520"/>
+          </a:xfrm>
+          <a:prstGeom prst="rect">
+            <a:avLst/>
+          </a:prstGeom>
+          <a:noFill/>
+        </p:spPr>
+        <p:txBody>
+          <a:bodyPr wrap="square" anchor="t" lIns="0" rIns="0" tIns="0" bIns="0">
+            <a:spAutoFit/>
+          </a:bodyPr>
+          <a:lstStyle/>
+          <a:p>
+            <a:pPr algn="l">
+              <a:spcAft>
+                <a:spcPts val="810"/>
+              </a:spcAft>
+            </a:pPr>
+            <a:r>
+              <a:rPr sz="1800" b="0" i="0">
+                <a:solidFill>
+                  <a:srgbClr val="1C1B19"/>
+                </a:solidFill>
+                <a:latin typeface="Source Serif 4"/>
+              </a:rPr>
+              <a:t>Mocked your accent in front of the team and said sorry. A week later he did it again, and said sorry again.</a:t>
+            </a:r>
+          </a:p>
+        </p:txBody>
+      </p:sp>
+      <p:sp>
+        <p:nvSpPr>
+          <p:cNvPr id="12" name="Rectangle 11"/>
+          <p:cNvSpPr/>
+          <p:nvPr/>
+        </p:nvSpPr>
+        <p:spPr>
+          <a:xfrm>
+            <a:off x="8016239" y="2103120"/>
+            <a:ext cx="3322320" cy="3840480"/>
+          </a:xfrm>
+          <a:prstGeom prst="rect">
+            <a:avLst/>
+          </a:prstGeom>
+          <a:solidFill>
+            <a:srgbClr val="FFFFFF"/>
+          </a:solidFill>
+          <a:ln w="15875">
+            <a:solidFill>
+              <a:srgbClr val="D8D2C6"/>
+            </a:solidFill>
+          </a:ln>
+          <a:effectLst/>
+        </p:spPr>
+        <p:style>
+          <a:lnRef idx="1">
+            <a:schemeClr val="accent1"/>
+          </a:lnRef>
+          <a:fillRef idx="3">
+            <a:schemeClr val="accent1"/>
+          </a:fillRef>
+          <a:effectRef idx="2">
+            <a:schemeClr val="accent1"/>
+          </a:effectRef>
+          <a:fontRef idx="minor">
+            <a:schemeClr val="lt1"/>
+          </a:fontRef>
+        </p:style>
+        <p:txBody>
+          <a:bodyPr rtlCol="0" anchor="ctr"/>
+          <a:lstStyle/>
+          <a:p>
+            <a:pPr algn="ctr"/>
+          </a:p>
+        </p:txBody>
+      </p:sp>
+      <p:sp>
+        <p:nvSpPr>
+          <p:cNvPr id="13" name="TextBox 12"/>
+          <p:cNvSpPr txBox="1"/>
+          <p:nvPr/>
+        </p:nvSpPr>
+        <p:spPr>
+          <a:xfrm>
+            <a:off x="8244839" y="2286000"/>
+            <a:ext cx="2865120" cy="365760"/>
+          </a:xfrm>
+          <a:prstGeom prst="rect">
+            <a:avLst/>
+          </a:prstGeom>
+          <a:noFill/>
+        </p:spPr>
+        <p:txBody>
+          <a:bodyPr wrap="square" anchor="t" lIns="0" rIns="0" tIns="0" bIns="0">
+            <a:spAutoFit/>
+          </a:bodyPr>
+          <a:lstStyle/>
+          <a:p>
+            <a:pPr algn="l">
+              <a:spcAft>
+                <a:spcPts val="585"/>
+              </a:spcAft>
+            </a:pPr>
+            <a:r>
+              <a:rPr sz="1300" b="1" i="0">
+                <a:solidFill>
+                  <a:srgbClr val="0B2D5B"/>
+                </a:solidFill>
+                <a:latin typeface="Inter Tight"/>
+              </a:rPr>
+              <a:t>TESS AND JORDAN</a:t>
+            </a:r>
+          </a:p>
+        </p:txBody>
+      </p:sp>
+      <p:sp>
+        <p:nvSpPr>
+          <p:cNvPr id="14" name="TextBox 13"/>
+          <p:cNvSpPr txBox="1"/>
+          <p:nvPr/>
+        </p:nvSpPr>
+        <p:spPr>
+          <a:xfrm>
+            <a:off x="8244839" y="2743200"/>
+            <a:ext cx="2865120" cy="3017520"/>
+          </a:xfrm>
+          <a:prstGeom prst="rect">
+            <a:avLst/>
+          </a:prstGeom>
+          <a:noFill/>
+        </p:spPr>
+        <p:txBody>
+          <a:bodyPr wrap="square" anchor="t" lIns="0" rIns="0" tIns="0" bIns="0">
+            <a:spAutoFit/>
+          </a:bodyPr>
+          <a:lstStyle/>
+          <a:p>
+            <a:pPr algn="l">
+              <a:spcAft>
+                <a:spcPts val="810"/>
+              </a:spcAft>
+            </a:pPr>
+            <a:r>
+              <a:rPr sz="1800" b="0" i="0">
+                <a:solidFill>
+                  <a:srgbClr val="1C1B19"/>
+                </a:solidFill>
+                <a:latin typeface="Source Serif 4"/>
+              </a:rPr>
+              <a:t>JV teammates who haven't really talked since a blowup at practice two weeks ago. A month of season left.</a:t>
             </a:r>
           </a:p>
         </p:txBody>
@@ -10040,7 +10188,7 @@
                 </a:solidFill>
                 <a:latin typeface="Inter Tight"/>
               </a:rPr>
-              <a:t>STEP BACK</a:t>
+              <a:t>IF YOU GOT HURT</a:t>
             </a:r>
           </a:p>
         </p:txBody>
@@ -10086,23 +10234,64 @@
       </p:sp>
       <p:sp>
         <p:nvSpPr>
-          <p:cNvPr id="5" name="Rectangle 4"/>
+          <p:cNvPr id="5" name="TextBox 4"/>
+          <p:cNvSpPr txBox="1"/>
+          <p:nvPr/>
+        </p:nvSpPr>
+        <p:spPr>
+          <a:xfrm>
+            <a:off x="822960" y="1005840"/>
+            <a:ext cx="10515600" cy="914400"/>
+          </a:xfrm>
+          <a:prstGeom prst="rect">
+            <a:avLst/>
+          </a:prstGeom>
+          <a:noFill/>
+        </p:spPr>
+        <p:txBody>
+          <a:bodyPr wrap="square" anchor="t" lIns="0" rIns="0" tIns="0" bIns="0">
+            <a:spAutoFit/>
+          </a:bodyPr>
+          <a:lstStyle/>
+          <a:p>
+            <a:pPr algn="l">
+              <a:spcAft>
+                <a:spcPts val="1530"/>
+              </a:spcAft>
+            </a:pPr>
+            <a:r>
+              <a:rPr sz="3400" b="1" i="0">
+                <a:solidFill>
+                  <a:srgbClr val="1C1B19"/>
+                </a:solidFill>
+                <a:latin typeface="Source Serif 4"/>
+              </a:rPr>
+              <a:t>Your side of repair counts too.</a:t>
+            </a:r>
+          </a:p>
+        </p:txBody>
+      </p:sp>
+      <p:sp>
+        <p:nvSpPr>
+          <p:cNvPr id="6" name="Rectangle 5"/>
           <p:cNvSpPr/>
           <p:nvPr/>
         </p:nvSpPr>
         <p:spPr>
           <a:xfrm>
-            <a:off x="822960" y="1371600"/>
-            <a:ext cx="73152" cy="3566160"/>
+            <a:off x="822960" y="2103120"/>
+            <a:ext cx="5120640" cy="3931920"/>
           </a:xfrm>
           <a:prstGeom prst="rect">
             <a:avLst/>
           </a:prstGeom>
           <a:solidFill>
-            <a:srgbClr val="F47B20"/>
+            <a:srgbClr val="FFFFFF"/>
           </a:solidFill>
-          <a:ln>
-            <a:noFill/>
+          <a:ln w="15875">
+            <a:solidFill>
+              <a:srgbClr val="D8D2C6"/>
+            </a:solidFill>
           </a:ln>
           <a:effectLst/>
         </p:spPr>
@@ -10130,53 +10319,14 @@
       </p:sp>
       <p:sp>
         <p:nvSpPr>
-          <p:cNvPr id="6" name="TextBox 5"/>
-          <p:cNvSpPr txBox="1"/>
-          <p:nvPr/>
-        </p:nvSpPr>
-        <p:spPr>
-          <a:xfrm>
-            <a:off x="1188720" y="1371600"/>
-            <a:ext cx="10058400" cy="3566160"/>
-          </a:xfrm>
-          <a:prstGeom prst="rect">
-            <a:avLst/>
-          </a:prstGeom>
-          <a:noFill/>
-        </p:spPr>
-        <p:txBody>
-          <a:bodyPr wrap="square" anchor="ctr" lIns="0" rIns="0" tIns="0" bIns="0">
-            <a:spAutoFit/>
-          </a:bodyPr>
-          <a:lstStyle/>
-          <a:p>
-            <a:pPr algn="l">
-              <a:spcAft>
-                <a:spcPts val="1800"/>
-              </a:spcAft>
-            </a:pPr>
-            <a:r>
-              <a:rPr sz="4000" b="0" i="1">
-                <a:solidFill>
-                  <a:srgbClr val="1C1B19"/>
-                </a:solidFill>
-                <a:latin typeface="Source Serif 4"/>
-              </a:rPr>
-              <a:t>Think of a fight. Now tell it in the third person.</a:t>
-            </a:r>
-          </a:p>
-        </p:txBody>
-      </p:sp>
-      <p:sp>
-        <p:nvSpPr>
           <p:cNvPr id="7" name="TextBox 6"/>
           <p:cNvSpPr txBox="1"/>
           <p:nvPr/>
         </p:nvSpPr>
         <p:spPr>
           <a:xfrm>
-            <a:off x="1188720" y="5120640"/>
-            <a:ext cx="10058400" cy="914400"/>
+            <a:off x="1097280" y="2286000"/>
+            <a:ext cx="4572000" cy="457200"/>
           </a:xfrm>
           <a:prstGeom prst="rect">
             <a:avLst/>
@@ -10191,17 +10341,276 @@
           <a:p>
             <a:pPr algn="l">
               <a:spcAft>
-                <a:spcPts val="810"/>
-              </a:spcAft>
-            </a:pPr>
-            <a:r>
-              <a:rPr sz="1800" b="0" i="0">
-                <a:solidFill>
-                  <a:srgbClr val="5D5A54"/>
+                <a:spcPts val="585"/>
+              </a:spcAft>
+            </a:pPr>
+            <a:r>
+              <a:rPr sz="1300" b="1" i="0">
+                <a:solidFill>
+                  <a:srgbClr val="0B2D5B"/>
                 </a:solidFill>
                 <a:latin typeface="Inter Tight"/>
               </a:rPr>
-              <a:t>"Why is Jae so angry at Sam?" instead of "Why is Sam so angry at me?" Private. Write it for yourself.</a:t>
+              <a:t>WHAT HELPS</a:t>
+            </a:r>
+          </a:p>
+        </p:txBody>
+      </p:sp>
+      <p:sp>
+        <p:nvSpPr>
+          <p:cNvPr id="8" name="TextBox 7"/>
+          <p:cNvSpPr txBox="1"/>
+          <p:nvPr/>
+        </p:nvSpPr>
+        <p:spPr>
+          <a:xfrm>
+            <a:off x="1097280" y="2788920"/>
+            <a:ext cx="4572000" cy="3108960"/>
+          </a:xfrm>
+          <a:prstGeom prst="rect">
+            <a:avLst/>
+          </a:prstGeom>
+          <a:noFill/>
+        </p:spPr>
+        <p:txBody>
+          <a:bodyPr wrap="square" anchor="t" lIns="0" rIns="0" tIns="0" bIns="0">
+            <a:spAutoFit/>
+          </a:bodyPr>
+          <a:lstStyle/>
+          <a:p>
+            <a:pPr algn="l">
+              <a:spcAft>
+                <a:spcPts val="855"/>
+              </a:spcAft>
+            </a:pPr>
+            <a:r>
+              <a:rPr sz="1900" b="0" i="0">
+                <a:solidFill>
+                  <a:srgbClr val="1C1B19"/>
+                </a:solidFill>
+                <a:latin typeface="Source Serif 4"/>
+              </a:rPr>
+              <a:t>Say it once: "When you ___, I felt ___."</a:t>
+            </a:r>
+          </a:p>
+          <a:p>
+            <a:pPr algn="l">
+              <a:spcAft>
+                <a:spcPts val="855"/>
+              </a:spcAft>
+            </a:pPr>
+            <a:r>
+              <a:rPr sz="1900" b="0" i="0">
+                <a:solidFill>
+                  <a:srgbClr val="1C1B19"/>
+                </a:solidFill>
+                <a:latin typeface="Source Serif 4"/>
+              </a:rPr>
+              <a:t>One thing, not a list</a:t>
+            </a:r>
+          </a:p>
+          <a:p>
+            <a:pPr algn="l">
+              <a:spcAft>
+                <a:spcPts val="855"/>
+              </a:spcAft>
+            </a:pPr>
+            <a:r>
+              <a:rPr sz="1900" b="0" i="0">
+                <a:solidFill>
+                  <a:srgbClr val="1C1B19"/>
+                </a:solidFill>
+                <a:latin typeface="Source Serif 4"/>
+              </a:rPr>
+              <a:t>Let them answer</a:t>
+            </a:r>
+          </a:p>
+          <a:p>
+            <a:pPr algn="l">
+              <a:spcAft>
+                <a:spcPts val="855"/>
+              </a:spcAft>
+            </a:pPr>
+            <a:r>
+              <a:rPr sz="1900" b="0" i="0">
+                <a:solidFill>
+                  <a:srgbClr val="1C1B19"/>
+                </a:solidFill>
+                <a:latin typeface="Source Serif 4"/>
+              </a:rPr>
+              <a:t>Take time to trust again</a:t>
+            </a:r>
+          </a:p>
+        </p:txBody>
+      </p:sp>
+      <p:sp>
+        <p:nvSpPr>
+          <p:cNvPr id="9" name="Rectangle 8"/>
+          <p:cNvSpPr/>
+          <p:nvPr/>
+        </p:nvSpPr>
+        <p:spPr>
+          <a:xfrm>
+            <a:off x="6309360" y="2103120"/>
+            <a:ext cx="5120640" cy="3931920"/>
+          </a:xfrm>
+          <a:prstGeom prst="rect">
+            <a:avLst/>
+          </a:prstGeom>
+          <a:solidFill>
+            <a:srgbClr val="FFFFFF"/>
+          </a:solidFill>
+          <a:ln w="15875">
+            <a:solidFill>
+              <a:srgbClr val="D8D2C6"/>
+            </a:solidFill>
+          </a:ln>
+          <a:effectLst/>
+        </p:spPr>
+        <p:style>
+          <a:lnRef idx="1">
+            <a:schemeClr val="accent1"/>
+          </a:lnRef>
+          <a:fillRef idx="3">
+            <a:schemeClr val="accent1"/>
+          </a:fillRef>
+          <a:effectRef idx="2">
+            <a:schemeClr val="accent1"/>
+          </a:effectRef>
+          <a:fontRef idx="minor">
+            <a:schemeClr val="lt1"/>
+          </a:fontRef>
+        </p:style>
+        <p:txBody>
+          <a:bodyPr rtlCol="0" anchor="ctr"/>
+          <a:lstStyle/>
+          <a:p>
+            <a:pPr algn="ctr"/>
+          </a:p>
+        </p:txBody>
+      </p:sp>
+      <p:sp>
+        <p:nvSpPr>
+          <p:cNvPr id="10" name="TextBox 9"/>
+          <p:cNvSpPr txBox="1"/>
+          <p:nvPr/>
+        </p:nvSpPr>
+        <p:spPr>
+          <a:xfrm>
+            <a:off x="6583680" y="2286000"/>
+            <a:ext cx="4572000" cy="457200"/>
+          </a:xfrm>
+          <a:prstGeom prst="rect">
+            <a:avLst/>
+          </a:prstGeom>
+          <a:noFill/>
+        </p:spPr>
+        <p:txBody>
+          <a:bodyPr wrap="square" anchor="t" lIns="0" rIns="0" tIns="0" bIns="0">
+            <a:spAutoFit/>
+          </a:bodyPr>
+          <a:lstStyle/>
+          <a:p>
+            <a:pPr algn="l">
+              <a:spcAft>
+                <a:spcPts val="585"/>
+              </a:spcAft>
+            </a:pPr>
+            <a:r>
+              <a:rPr sz="1300" b="1" i="0">
+                <a:solidFill>
+                  <a:srgbClr val="0B2D5B"/>
+                </a:solidFill>
+                <a:latin typeface="Inter Tight"/>
+              </a:rPr>
+              <a:t>WHAT MAKES IT BIGGER</a:t>
+            </a:r>
+          </a:p>
+        </p:txBody>
+      </p:sp>
+      <p:sp>
+        <p:nvSpPr>
+          <p:cNvPr id="11" name="TextBox 10"/>
+          <p:cNvSpPr txBox="1"/>
+          <p:nvPr/>
+        </p:nvSpPr>
+        <p:spPr>
+          <a:xfrm>
+            <a:off x="6583680" y="2788920"/>
+            <a:ext cx="4572000" cy="3108960"/>
+          </a:xfrm>
+          <a:prstGeom prst="rect">
+            <a:avLst/>
+          </a:prstGeom>
+          <a:noFill/>
+        </p:spPr>
+        <p:txBody>
+          <a:bodyPr wrap="square" anchor="t" lIns="0" rIns="0" tIns="0" bIns="0">
+            <a:spAutoFit/>
+          </a:bodyPr>
+          <a:lstStyle/>
+          <a:p>
+            <a:pPr algn="l">
+              <a:spcAft>
+                <a:spcPts val="855"/>
+              </a:spcAft>
+            </a:pPr>
+            <a:r>
+              <a:rPr sz="1900" b="0" i="0">
+                <a:solidFill>
+                  <a:srgbClr val="1C1B19"/>
+                </a:solidFill>
+                <a:latin typeface="Source Serif 4"/>
+              </a:rPr>
+              <a:t>Fighting over text</a:t>
+            </a:r>
+          </a:p>
+          <a:p>
+            <a:pPr algn="l">
+              <a:spcAft>
+                <a:spcPts val="855"/>
+              </a:spcAft>
+            </a:pPr>
+            <a:r>
+              <a:rPr sz="1900" b="0" i="0">
+                <a:solidFill>
+                  <a:srgbClr val="1C1B19"/>
+                </a:solidFill>
+                <a:latin typeface="Source Serif 4"/>
+              </a:rPr>
+              <a:t>Recruiting a team</a:t>
+            </a:r>
+          </a:p>
+          <a:p>
+            <a:pPr algn="l">
+              <a:spcAft>
+                <a:spcPts val="855"/>
+              </a:spcAft>
+            </a:pPr>
+            <a:r>
+              <a:rPr sz="1900" b="0" i="0">
+                <a:solidFill>
+                  <a:srgbClr val="1C1B19"/>
+                </a:solidFill>
+                <a:latin typeface="Source Serif 4"/>
+              </a:rPr>
+              <a:t>Bringing up everything ever</a:t>
+            </a:r>
+          </a:p>
+          <a:p>
+            <a:pPr algn="l">
+              <a:spcAft>
+                <a:spcPts val="855"/>
+              </a:spcAft>
+            </a:pPr>
+            <a:r>
+              <a:rPr sz="1900" b="0" i="0">
+                <a:solidFill>
+                  <a:srgbClr val="1C1B19"/>
+                </a:solidFill>
+                <a:latin typeface="Source Serif 4"/>
+              </a:rPr>
+              <a:t>Screenshotting and sharing</a:t>
             </a:r>
           </a:p>
         </p:txBody>

--- a/decks/the-repair-kit-lesson-v2.pptx
+++ b/decks/the-repair-kit-lesson-v2.pptx
@@ -7150,6 +7150,45 @@
                 <a:latin typeface="Inter Tight"/>
               </a:rPr>
               <a:t>Beaver Upper School · Counseling</a:t>
+            </a:r>
+          </a:p>
+        </p:txBody>
+      </p:sp>
+      <p:sp>
+        <p:nvSpPr>
+          <p:cNvPr id="8" name="TextBox 7"/>
+          <p:cNvSpPr txBox="1"/>
+          <p:nvPr/>
+        </p:nvSpPr>
+        <p:spPr>
+          <a:xfrm>
+            <a:off x="6766560" y="5897880"/>
+            <a:ext cx="4846320" cy="640080"/>
+          </a:xfrm>
+          <a:prstGeom prst="rect">
+            <a:avLst/>
+          </a:prstGeom>
+          <a:noFill/>
+        </p:spPr>
+        <p:txBody>
+          <a:bodyPr wrap="square" anchor="t" lIns="0" rIns="0" tIns="0" bIns="0">
+            <a:spAutoFit/>
+          </a:bodyPr>
+          <a:lstStyle/>
+          <a:p>
+            <a:pPr algn="r">
+              <a:spcAft>
+                <a:spcPts val="495"/>
+              </a:spcAft>
+            </a:pPr>
+            <a:r>
+              <a:rPr sz="1100" b="0" i="0">
+                <a:solidFill>
+                  <a:srgbClr val="E8E4DA"/>
+                </a:solidFill>
+                <a:latin typeface="Inter Tight"/>
+              </a:rPr>
+              <a:t>Written by Dr. Rick Wilson, with AI-assisted drafting. Every lesson is reviewed and edited by Dr. Wilson.</a:t>
             </a:r>
           </a:p>
         </p:txBody>
